--- a/docs/ReconResolve_Leadership.pptx
+++ b/docs/ReconResolve_Leadership.pptx
@@ -14,6 +14,8 @@
     <p:sldId id="262" r:id="rId13"/>
     <p:sldId id="263" r:id="rId14"/>
     <p:sldId id="264" r:id="rId15"/>
+    <p:sldId id="265" r:id="rId16"/>
+    <p:sldId id="266" r:id="rId17"/>
   </p:sldIdLst>
   <p:sldSz cx="9144000" cy="5143500" type="screen4x3"/>
   <p:notesSz cx="6858000" cy="9144000"/>
@@ -3920,6 +3922,3402 @@
 </p:sld>
 </file>
 
+<file path=ppt/slides/slide10.xml><?xml version="1.0" encoding="utf-8"?>
+<p:sld xmlns:a="http://schemas.openxmlformats.org/drawingml/2006/main" xmlns:p="http://schemas.openxmlformats.org/presentationml/2006/main" xmlns:r="http://schemas.openxmlformats.org/officeDocument/2006/relationships">
+  <p:cSld>
+    <p:spTree>
+      <p:nvGrpSpPr>
+        <p:cNvPr id="1" name=""/>
+        <p:cNvGrpSpPr/>
+        <p:nvPr/>
+      </p:nvGrpSpPr>
+      <p:grpSpPr/>
+      <p:sp>
+        <p:nvSpPr>
+          <p:cNvPr id="2" name="Rectangle 1"/>
+          <p:cNvSpPr/>
+          <p:nvPr/>
+        </p:nvSpPr>
+        <p:spPr>
+          <a:xfrm>
+            <a:off x="0" y="0"/>
+            <a:ext cx="9144000" cy="5143500"/>
+          </a:xfrm>
+          <a:prstGeom prst="rect">
+            <a:avLst/>
+          </a:prstGeom>
+          <a:solidFill>
+            <a:srgbClr val="FFFFFF"/>
+          </a:solidFill>
+          <a:ln>
+            <a:noFill/>
+          </a:ln>
+          <a:effectLst/>
+        </p:spPr>
+        <p:style>
+          <a:lnRef idx="1">
+            <a:schemeClr val="accent1"/>
+          </a:lnRef>
+          <a:fillRef idx="3">
+            <a:schemeClr val="accent1"/>
+          </a:fillRef>
+          <a:effectRef idx="2">
+            <a:schemeClr val="accent1"/>
+          </a:effectRef>
+          <a:fontRef idx="minor">
+            <a:schemeClr val="lt1"/>
+          </a:fontRef>
+        </p:style>
+        <p:txBody>
+          <a:bodyPr rtlCol="0" anchor="ctr"/>
+          <a:lstStyle/>
+          <a:p>
+            <a:pPr algn="ctr"/>
+          </a:p>
+        </p:txBody>
+      </p:sp>
+      <p:sp>
+        <p:nvSpPr>
+          <p:cNvPr id="3" name="Rectangle 2"/>
+          <p:cNvSpPr/>
+          <p:nvPr/>
+        </p:nvSpPr>
+        <p:spPr>
+          <a:xfrm>
+            <a:off x="548640" y="475488"/>
+            <a:ext cx="502920" cy="82296"/>
+          </a:xfrm>
+          <a:prstGeom prst="rect">
+            <a:avLst/>
+          </a:prstGeom>
+          <a:solidFill>
+            <a:srgbClr val="FF3620"/>
+          </a:solidFill>
+          <a:ln>
+            <a:noFill/>
+          </a:ln>
+          <a:effectLst/>
+        </p:spPr>
+        <p:style>
+          <a:lnRef idx="1">
+            <a:schemeClr val="accent1"/>
+          </a:lnRef>
+          <a:fillRef idx="3">
+            <a:schemeClr val="accent1"/>
+          </a:fillRef>
+          <a:effectRef idx="2">
+            <a:schemeClr val="accent1"/>
+          </a:effectRef>
+          <a:fontRef idx="minor">
+            <a:schemeClr val="lt1"/>
+          </a:fontRef>
+        </p:style>
+        <p:txBody>
+          <a:bodyPr rtlCol="0" anchor="ctr"/>
+          <a:lstStyle/>
+          <a:p>
+            <a:pPr algn="ctr"/>
+          </a:p>
+        </p:txBody>
+      </p:sp>
+      <p:sp>
+        <p:nvSpPr>
+          <p:cNvPr id="4" name="TextBox 3"/>
+          <p:cNvSpPr txBox="1"/>
+          <p:nvPr/>
+        </p:nvSpPr>
+        <p:spPr>
+          <a:xfrm>
+            <a:off x="548640" y="585216"/>
+            <a:ext cx="8046720" cy="274320"/>
+          </a:xfrm>
+          <a:prstGeom prst="rect">
+            <a:avLst/>
+          </a:prstGeom>
+          <a:noFill/>
+        </p:spPr>
+        <p:txBody>
+          <a:bodyPr wrap="square" anchor="t" lIns="0" rIns="0" tIns="0" bIns="0">
+            <a:spAutoFit/>
+          </a:bodyPr>
+          <a:lstStyle/>
+          <a:p>
+            <a:pPr algn="l">
+              <a:lnSpc>
+                <a:spcPct val="100000"/>
+              </a:lnSpc>
+              <a:spcAft>
+                <a:spcPts val="300"/>
+              </a:spcAft>
+            </a:pPr>
+            <a:r>
+              <a:rPr sz="1200" b="1">
+                <a:solidFill>
+                  <a:srgbClr val="618793"/>
+                </a:solidFill>
+                <a:latin typeface="Barlow"/>
+              </a:rPr>
+              <a:t>CAPABILITY MATRIX</a:t>
+            </a:r>
+          </a:p>
+        </p:txBody>
+      </p:sp>
+      <p:sp>
+        <p:nvSpPr>
+          <p:cNvPr id="5" name="TextBox 4"/>
+          <p:cNvSpPr txBox="1"/>
+          <p:nvPr/>
+        </p:nvSpPr>
+        <p:spPr>
+          <a:xfrm>
+            <a:off x="548640" y="896112"/>
+            <a:ext cx="8138160" cy="640080"/>
+          </a:xfrm>
+          <a:prstGeom prst="rect">
+            <a:avLst/>
+          </a:prstGeom>
+          <a:noFill/>
+        </p:spPr>
+        <p:txBody>
+          <a:bodyPr wrap="square" anchor="t" lIns="0" rIns="0" tIns="0" bIns="0">
+            <a:spAutoFit/>
+          </a:bodyPr>
+          <a:lstStyle/>
+          <a:p>
+            <a:pPr algn="l">
+              <a:lnSpc>
+                <a:spcPct val="100000"/>
+              </a:lnSpc>
+              <a:spcAft>
+                <a:spcPts val="300"/>
+              </a:spcAft>
+            </a:pPr>
+            <a:r>
+              <a:rPr sz="2200" b="1">
+                <a:solidFill>
+                  <a:srgbClr val="1B3037"/>
+                </a:solidFill>
+                <a:latin typeface="Barlow"/>
+              </a:rPr>
+              <a:t>Capability status — the same across App, CLI &amp; Skill</a:t>
+            </a:r>
+          </a:p>
+        </p:txBody>
+      </p:sp>
+      <p:sp>
+        <p:nvSpPr>
+          <p:cNvPr id="6" name="TextBox 5"/>
+          <p:cNvSpPr txBox="1"/>
+          <p:nvPr/>
+        </p:nvSpPr>
+        <p:spPr>
+          <a:xfrm>
+            <a:off x="548640" y="1874519"/>
+            <a:ext cx="2834640" cy="274320"/>
+          </a:xfrm>
+          <a:prstGeom prst="rect">
+            <a:avLst/>
+          </a:prstGeom>
+          <a:noFill/>
+        </p:spPr>
+        <p:txBody>
+          <a:bodyPr wrap="square" anchor="t" lIns="0" rIns="0" tIns="0" bIns="0">
+            <a:spAutoFit/>
+          </a:bodyPr>
+          <a:lstStyle/>
+          <a:p>
+            <a:pPr algn="l">
+              <a:lnSpc>
+                <a:spcPct val="100000"/>
+              </a:lnSpc>
+              <a:spcAft>
+                <a:spcPts val="300"/>
+              </a:spcAft>
+            </a:pPr>
+            <a:r>
+              <a:rPr sz="900" b="1">
+                <a:solidFill>
+                  <a:srgbClr val="618793"/>
+                </a:solidFill>
+                <a:latin typeface="Barlow"/>
+              </a:rPr>
+              <a:t>CAPABILITY</a:t>
+            </a:r>
+          </a:p>
+        </p:txBody>
+      </p:sp>
+      <p:sp>
+        <p:nvSpPr>
+          <p:cNvPr id="7" name="TextBox 6"/>
+          <p:cNvSpPr txBox="1"/>
+          <p:nvPr/>
+        </p:nvSpPr>
+        <p:spPr>
+          <a:xfrm>
+            <a:off x="3520440" y="1874519"/>
+            <a:ext cx="1051560" cy="274320"/>
+          </a:xfrm>
+          <a:prstGeom prst="rect">
+            <a:avLst/>
+          </a:prstGeom>
+          <a:noFill/>
+        </p:spPr>
+        <p:txBody>
+          <a:bodyPr wrap="square" anchor="t" lIns="0" rIns="0" tIns="0" bIns="0">
+            <a:spAutoFit/>
+          </a:bodyPr>
+          <a:lstStyle/>
+          <a:p>
+            <a:pPr algn="l">
+              <a:lnSpc>
+                <a:spcPct val="100000"/>
+              </a:lnSpc>
+              <a:spcAft>
+                <a:spcPts val="300"/>
+              </a:spcAft>
+            </a:pPr>
+            <a:r>
+              <a:rPr sz="900" b="1">
+                <a:solidFill>
+                  <a:srgbClr val="618793"/>
+                </a:solidFill>
+                <a:latin typeface="Barlow"/>
+              </a:rPr>
+              <a:t>STATUS</a:t>
+            </a:r>
+          </a:p>
+        </p:txBody>
+      </p:sp>
+      <p:sp>
+        <p:nvSpPr>
+          <p:cNvPr id="8" name="TextBox 7"/>
+          <p:cNvSpPr txBox="1"/>
+          <p:nvPr/>
+        </p:nvSpPr>
+        <p:spPr>
+          <a:xfrm>
+            <a:off x="4663440" y="1874519"/>
+            <a:ext cx="2834640" cy="274320"/>
+          </a:xfrm>
+          <a:prstGeom prst="rect">
+            <a:avLst/>
+          </a:prstGeom>
+          <a:noFill/>
+        </p:spPr>
+        <p:txBody>
+          <a:bodyPr wrap="square" anchor="t" lIns="0" rIns="0" tIns="0" bIns="0">
+            <a:spAutoFit/>
+          </a:bodyPr>
+          <a:lstStyle/>
+          <a:p>
+            <a:pPr algn="l">
+              <a:lnSpc>
+                <a:spcPct val="100000"/>
+              </a:lnSpc>
+              <a:spcAft>
+                <a:spcPts val="300"/>
+              </a:spcAft>
+            </a:pPr>
+            <a:r>
+              <a:rPr sz="900" b="1">
+                <a:solidFill>
+                  <a:srgbClr val="618793"/>
+                </a:solidFill>
+                <a:latin typeface="Barlow"/>
+              </a:rPr>
+              <a:t>WHAT WORKS</a:t>
+            </a:r>
+          </a:p>
+        </p:txBody>
+      </p:sp>
+      <p:sp>
+        <p:nvSpPr>
+          <p:cNvPr id="9" name="TextBox 8"/>
+          <p:cNvSpPr txBox="1"/>
+          <p:nvPr/>
+        </p:nvSpPr>
+        <p:spPr>
+          <a:xfrm>
+            <a:off x="7635240" y="1874519"/>
+            <a:ext cx="1143000" cy="274320"/>
+          </a:xfrm>
+          <a:prstGeom prst="rect">
+            <a:avLst/>
+          </a:prstGeom>
+          <a:noFill/>
+        </p:spPr>
+        <p:txBody>
+          <a:bodyPr wrap="square" anchor="t" lIns="0" rIns="0" tIns="0" bIns="0">
+            <a:spAutoFit/>
+          </a:bodyPr>
+          <a:lstStyle/>
+          <a:p>
+            <a:pPr algn="l">
+              <a:lnSpc>
+                <a:spcPct val="100000"/>
+              </a:lnSpc>
+              <a:spcAft>
+                <a:spcPts val="300"/>
+              </a:spcAft>
+            </a:pPr>
+            <a:r>
+              <a:rPr sz="900" b="1">
+                <a:solidFill>
+                  <a:srgbClr val="618793"/>
+                </a:solidFill>
+                <a:latin typeface="Barlow"/>
+              </a:rPr>
+              <a:t>ENTRY POINTS</a:t>
+            </a:r>
+          </a:p>
+        </p:txBody>
+      </p:sp>
+      <p:sp>
+        <p:nvSpPr>
+          <p:cNvPr id="10" name="Rectangle 9"/>
+          <p:cNvSpPr/>
+          <p:nvPr/>
+        </p:nvSpPr>
+        <p:spPr>
+          <a:xfrm>
+            <a:off x="548640" y="2130552"/>
+            <a:ext cx="8046720" cy="18288"/>
+          </a:xfrm>
+          <a:prstGeom prst="rect">
+            <a:avLst/>
+          </a:prstGeom>
+          <a:solidFill>
+            <a:srgbClr val="9EB7BE"/>
+          </a:solidFill>
+          <a:ln>
+            <a:noFill/>
+          </a:ln>
+          <a:effectLst/>
+        </p:spPr>
+        <p:style>
+          <a:lnRef idx="1">
+            <a:schemeClr val="accent1"/>
+          </a:lnRef>
+          <a:fillRef idx="3">
+            <a:schemeClr val="accent1"/>
+          </a:fillRef>
+          <a:effectRef idx="2">
+            <a:schemeClr val="accent1"/>
+          </a:effectRef>
+          <a:fontRef idx="minor">
+            <a:schemeClr val="lt1"/>
+          </a:fontRef>
+        </p:style>
+        <p:txBody>
+          <a:bodyPr rtlCol="0" anchor="ctr"/>
+          <a:lstStyle/>
+          <a:p>
+            <a:pPr algn="ctr"/>
+          </a:p>
+        </p:txBody>
+      </p:sp>
+      <p:sp>
+        <p:nvSpPr>
+          <p:cNvPr id="11" name="TextBox 10"/>
+          <p:cNvSpPr txBox="1"/>
+          <p:nvPr/>
+        </p:nvSpPr>
+        <p:spPr>
+          <a:xfrm>
+            <a:off x="548640" y="2240280"/>
+            <a:ext cx="2834640" cy="329184"/>
+          </a:xfrm>
+          <a:prstGeom prst="rect">
+            <a:avLst/>
+          </a:prstGeom>
+          <a:noFill/>
+        </p:spPr>
+        <p:txBody>
+          <a:bodyPr wrap="square" anchor="t" lIns="0" rIns="0" tIns="0" bIns="0">
+            <a:spAutoFit/>
+          </a:bodyPr>
+          <a:lstStyle/>
+          <a:p>
+            <a:pPr algn="l">
+              <a:lnSpc>
+                <a:spcPct val="98000"/>
+              </a:lnSpc>
+              <a:spcAft>
+                <a:spcPts val="300"/>
+              </a:spcAft>
+            </a:pPr>
+            <a:r>
+              <a:rPr sz="1050" b="1">
+                <a:solidFill>
+                  <a:srgbClr val="1B3037"/>
+                </a:solidFill>
+                <a:latin typeface="Barlow"/>
+              </a:rPr>
+              <a:t>Deterministic RCA</a:t>
+            </a:r>
+          </a:p>
+        </p:txBody>
+      </p:sp>
+      <p:sp>
+        <p:nvSpPr>
+          <p:cNvPr id="12" name="TextBox 11"/>
+          <p:cNvSpPr txBox="1"/>
+          <p:nvPr/>
+        </p:nvSpPr>
+        <p:spPr>
+          <a:xfrm>
+            <a:off x="3520440" y="2240280"/>
+            <a:ext cx="1051560" cy="274320"/>
+          </a:xfrm>
+          <a:prstGeom prst="rect">
+            <a:avLst/>
+          </a:prstGeom>
+          <a:noFill/>
+        </p:spPr>
+        <p:txBody>
+          <a:bodyPr wrap="square" anchor="t" lIns="0" rIns="0" tIns="0" bIns="0">
+            <a:spAutoFit/>
+          </a:bodyPr>
+          <a:lstStyle/>
+          <a:p>
+            <a:pPr algn="l">
+              <a:lnSpc>
+                <a:spcPct val="100000"/>
+              </a:lnSpc>
+              <a:spcAft>
+                <a:spcPts val="300"/>
+              </a:spcAft>
+            </a:pPr>
+            <a:r>
+              <a:rPr sz="1000" b="1">
+                <a:solidFill>
+                  <a:srgbClr val="00B378"/>
+                </a:solidFill>
+                <a:latin typeface="Barlow"/>
+              </a:rPr>
+              <a:t>✅ Works</a:t>
+            </a:r>
+          </a:p>
+        </p:txBody>
+      </p:sp>
+      <p:sp>
+        <p:nvSpPr>
+          <p:cNvPr id="13" name="TextBox 12"/>
+          <p:cNvSpPr txBox="1"/>
+          <p:nvPr/>
+        </p:nvSpPr>
+        <p:spPr>
+          <a:xfrm>
+            <a:off x="4663440" y="2240280"/>
+            <a:ext cx="2834640" cy="329184"/>
+          </a:xfrm>
+          <a:prstGeom prst="rect">
+            <a:avLst/>
+          </a:prstGeom>
+          <a:noFill/>
+        </p:spPr>
+        <p:txBody>
+          <a:bodyPr wrap="square" anchor="t" lIns="0" rIns="0" tIns="0" bIns="0">
+            <a:spAutoFit/>
+          </a:bodyPr>
+          <a:lstStyle/>
+          <a:p>
+            <a:pPr algn="l">
+              <a:lnSpc>
+                <a:spcPct val="98000"/>
+              </a:lnSpc>
+              <a:spcAft>
+                <a:spcPts val="300"/>
+              </a:spcAft>
+            </a:pPr>
+            <a:r>
+              <a:rPr sz="900" b="0">
+                <a:solidFill>
+                  <a:srgbClr val="618793"/>
+                </a:solidFill>
+                <a:latin typeface="DM Sans"/>
+              </a:rPr>
+              <a:t>rule + confirming query per finding</a:t>
+            </a:r>
+          </a:p>
+        </p:txBody>
+      </p:sp>
+      <p:sp>
+        <p:nvSpPr>
+          <p:cNvPr id="14" name="TextBox 13"/>
+          <p:cNvSpPr txBox="1"/>
+          <p:nvPr/>
+        </p:nvSpPr>
+        <p:spPr>
+          <a:xfrm>
+            <a:off x="7635240" y="2240280"/>
+            <a:ext cx="1143000" cy="274320"/>
+          </a:xfrm>
+          <a:prstGeom prst="rect">
+            <a:avLst/>
+          </a:prstGeom>
+          <a:noFill/>
+        </p:spPr>
+        <p:txBody>
+          <a:bodyPr wrap="square" anchor="t" lIns="0" rIns="0" tIns="0" bIns="0">
+            <a:spAutoFit/>
+          </a:bodyPr>
+          <a:lstStyle/>
+          <a:p>
+            <a:pPr algn="l">
+              <a:lnSpc>
+                <a:spcPct val="100000"/>
+              </a:lnSpc>
+              <a:spcAft>
+                <a:spcPts val="300"/>
+              </a:spcAft>
+            </a:pPr>
+            <a:r>
+              <a:rPr sz="900" b="0">
+                <a:solidFill>
+                  <a:srgbClr val="1B5161"/>
+                </a:solidFill>
+                <a:latin typeface="DM Sans"/>
+              </a:rPr>
+              <a:t>App·CLI·Skill</a:t>
+            </a:r>
+          </a:p>
+        </p:txBody>
+      </p:sp>
+      <p:sp>
+        <p:nvSpPr>
+          <p:cNvPr id="15" name="Rectangle 14"/>
+          <p:cNvSpPr/>
+          <p:nvPr/>
+        </p:nvSpPr>
+        <p:spPr>
+          <a:xfrm>
+            <a:off x="548640" y="2587752"/>
+            <a:ext cx="8046720" cy="10972"/>
+          </a:xfrm>
+          <a:prstGeom prst="rect">
+            <a:avLst/>
+          </a:prstGeom>
+          <a:solidFill>
+            <a:srgbClr val="F1F1F1"/>
+          </a:solidFill>
+          <a:ln>
+            <a:noFill/>
+          </a:ln>
+          <a:effectLst/>
+        </p:spPr>
+        <p:style>
+          <a:lnRef idx="1">
+            <a:schemeClr val="accent1"/>
+          </a:lnRef>
+          <a:fillRef idx="3">
+            <a:schemeClr val="accent1"/>
+          </a:fillRef>
+          <a:effectRef idx="2">
+            <a:schemeClr val="accent1"/>
+          </a:effectRef>
+          <a:fontRef idx="minor">
+            <a:schemeClr val="lt1"/>
+          </a:fontRef>
+        </p:style>
+        <p:txBody>
+          <a:bodyPr rtlCol="0" anchor="ctr"/>
+          <a:lstStyle/>
+          <a:p>
+            <a:pPr algn="ctr"/>
+          </a:p>
+        </p:txBody>
+      </p:sp>
+      <p:sp>
+        <p:nvSpPr>
+          <p:cNvPr id="16" name="TextBox 15"/>
+          <p:cNvSpPr txBox="1"/>
+          <p:nvPr/>
+        </p:nvSpPr>
+        <p:spPr>
+          <a:xfrm>
+            <a:off x="548640" y="2606040"/>
+            <a:ext cx="2834640" cy="329184"/>
+          </a:xfrm>
+          <a:prstGeom prst="rect">
+            <a:avLst/>
+          </a:prstGeom>
+          <a:noFill/>
+        </p:spPr>
+        <p:txBody>
+          <a:bodyPr wrap="square" anchor="t" lIns="0" rIns="0" tIns="0" bIns="0">
+            <a:spAutoFit/>
+          </a:bodyPr>
+          <a:lstStyle/>
+          <a:p>
+            <a:pPr algn="l">
+              <a:lnSpc>
+                <a:spcPct val="98000"/>
+              </a:lnSpc>
+              <a:spcAft>
+                <a:spcPts val="300"/>
+              </a:spcAft>
+            </a:pPr>
+            <a:r>
+              <a:rPr sz="1050" b="1">
+                <a:solidFill>
+                  <a:srgbClr val="1B3037"/>
+                </a:solidFill>
+                <a:latin typeface="Barlow"/>
+              </a:rPr>
+              <a:t>Transformation logic + culprit + script location</a:t>
+            </a:r>
+          </a:p>
+        </p:txBody>
+      </p:sp>
+      <p:sp>
+        <p:nvSpPr>
+          <p:cNvPr id="17" name="TextBox 16"/>
+          <p:cNvSpPr txBox="1"/>
+          <p:nvPr/>
+        </p:nvSpPr>
+        <p:spPr>
+          <a:xfrm>
+            <a:off x="3520440" y="2606040"/>
+            <a:ext cx="1051560" cy="274320"/>
+          </a:xfrm>
+          <a:prstGeom prst="rect">
+            <a:avLst/>
+          </a:prstGeom>
+          <a:noFill/>
+        </p:spPr>
+        <p:txBody>
+          <a:bodyPr wrap="square" anchor="t" lIns="0" rIns="0" tIns="0" bIns="0">
+            <a:spAutoFit/>
+          </a:bodyPr>
+          <a:lstStyle/>
+          <a:p>
+            <a:pPr algn="l">
+              <a:lnSpc>
+                <a:spcPct val="100000"/>
+              </a:lnSpc>
+              <a:spcAft>
+                <a:spcPts val="300"/>
+              </a:spcAft>
+            </a:pPr>
+            <a:r>
+              <a:rPr sz="1000" b="1">
+                <a:solidFill>
+                  <a:srgbClr val="00B378"/>
+                </a:solidFill>
+                <a:latin typeface="Barlow"/>
+              </a:rPr>
+              <a:t>✅ Works</a:t>
+            </a:r>
+          </a:p>
+        </p:txBody>
+      </p:sp>
+      <p:sp>
+        <p:nvSpPr>
+          <p:cNvPr id="18" name="TextBox 17"/>
+          <p:cNvSpPr txBox="1"/>
+          <p:nvPr/>
+        </p:nvSpPr>
+        <p:spPr>
+          <a:xfrm>
+            <a:off x="4663440" y="2606040"/>
+            <a:ext cx="2834640" cy="329184"/>
+          </a:xfrm>
+          <a:prstGeom prst="rect">
+            <a:avLst/>
+          </a:prstGeom>
+          <a:noFill/>
+        </p:spPr>
+        <p:txBody>
+          <a:bodyPr wrap="square" anchor="t" lIns="0" rIns="0" tIns="0" bIns="0">
+            <a:spAutoFit/>
+          </a:bodyPr>
+          <a:lstStyle/>
+          <a:p>
+            <a:pPr algn="l">
+              <a:lnSpc>
+                <a:spcPct val="98000"/>
+              </a:lnSpc>
+              <a:spcAft>
+                <a:spcPts val="300"/>
+              </a:spcAft>
+            </a:pPr>
+            <a:r>
+              <a:rPr sz="900" b="0">
+                <a:solidFill>
+                  <a:srgbClr val="618793"/>
+                </a:solidFill>
+                <a:latin typeface="DM Sans"/>
+              </a:rPr>
+              <a:t>derivation, culprit sub-expr, path·line·snippet</a:t>
+            </a:r>
+          </a:p>
+        </p:txBody>
+      </p:sp>
+      <p:sp>
+        <p:nvSpPr>
+          <p:cNvPr id="19" name="TextBox 18"/>
+          <p:cNvSpPr txBox="1"/>
+          <p:nvPr/>
+        </p:nvSpPr>
+        <p:spPr>
+          <a:xfrm>
+            <a:off x="7635240" y="2606040"/>
+            <a:ext cx="1143000" cy="274320"/>
+          </a:xfrm>
+          <a:prstGeom prst="rect">
+            <a:avLst/>
+          </a:prstGeom>
+          <a:noFill/>
+        </p:spPr>
+        <p:txBody>
+          <a:bodyPr wrap="square" anchor="t" lIns="0" rIns="0" tIns="0" bIns="0">
+            <a:spAutoFit/>
+          </a:bodyPr>
+          <a:lstStyle/>
+          <a:p>
+            <a:pPr algn="l">
+              <a:lnSpc>
+                <a:spcPct val="100000"/>
+              </a:lnSpc>
+              <a:spcAft>
+                <a:spcPts val="300"/>
+              </a:spcAft>
+            </a:pPr>
+            <a:r>
+              <a:rPr sz="900" b="0">
+                <a:solidFill>
+                  <a:srgbClr val="1B5161"/>
+                </a:solidFill>
+                <a:latin typeface="DM Sans"/>
+              </a:rPr>
+              <a:t>App·CLI·Skill</a:t>
+            </a:r>
+          </a:p>
+        </p:txBody>
+      </p:sp>
+      <p:sp>
+        <p:nvSpPr>
+          <p:cNvPr id="20" name="Rectangle 19"/>
+          <p:cNvSpPr/>
+          <p:nvPr/>
+        </p:nvSpPr>
+        <p:spPr>
+          <a:xfrm>
+            <a:off x="548640" y="2953512"/>
+            <a:ext cx="8046720" cy="10972"/>
+          </a:xfrm>
+          <a:prstGeom prst="rect">
+            <a:avLst/>
+          </a:prstGeom>
+          <a:solidFill>
+            <a:srgbClr val="F1F1F1"/>
+          </a:solidFill>
+          <a:ln>
+            <a:noFill/>
+          </a:ln>
+          <a:effectLst/>
+        </p:spPr>
+        <p:style>
+          <a:lnRef idx="1">
+            <a:schemeClr val="accent1"/>
+          </a:lnRef>
+          <a:fillRef idx="3">
+            <a:schemeClr val="accent1"/>
+          </a:fillRef>
+          <a:effectRef idx="2">
+            <a:schemeClr val="accent1"/>
+          </a:effectRef>
+          <a:fontRef idx="minor">
+            <a:schemeClr val="lt1"/>
+          </a:fontRef>
+        </p:style>
+        <p:txBody>
+          <a:bodyPr rtlCol="0" anchor="ctr"/>
+          <a:lstStyle/>
+          <a:p>
+            <a:pPr algn="ctr"/>
+          </a:p>
+        </p:txBody>
+      </p:sp>
+      <p:sp>
+        <p:nvSpPr>
+          <p:cNvPr id="21" name="TextBox 20"/>
+          <p:cNvSpPr txBox="1"/>
+          <p:nvPr/>
+        </p:nvSpPr>
+        <p:spPr>
+          <a:xfrm>
+            <a:off x="548640" y="2971800"/>
+            <a:ext cx="2834640" cy="329184"/>
+          </a:xfrm>
+          <a:prstGeom prst="rect">
+            <a:avLst/>
+          </a:prstGeom>
+          <a:noFill/>
+        </p:spPr>
+        <p:txBody>
+          <a:bodyPr wrap="square" anchor="t" lIns="0" rIns="0" tIns="0" bIns="0">
+            <a:spAutoFit/>
+          </a:bodyPr>
+          <a:lstStyle/>
+          <a:p>
+            <a:pPr algn="l">
+              <a:lnSpc>
+                <a:spcPct val="98000"/>
+              </a:lnSpc>
+              <a:spcAft>
+                <a:spcPts val="300"/>
+              </a:spcAft>
+            </a:pPr>
+            <a:r>
+              <a:rPr sz="1050" b="1">
+                <a:solidFill>
+                  <a:srgbClr val="1B3037"/>
+                </a:solidFill>
+                <a:latin typeface="Barlow"/>
+              </a:rPr>
+              <a:t>Hybrid (agentic fallback)</a:t>
+            </a:r>
+          </a:p>
+        </p:txBody>
+      </p:sp>
+      <p:sp>
+        <p:nvSpPr>
+          <p:cNvPr id="22" name="TextBox 21"/>
+          <p:cNvSpPr txBox="1"/>
+          <p:nvPr/>
+        </p:nvSpPr>
+        <p:spPr>
+          <a:xfrm>
+            <a:off x="3520440" y="2971800"/>
+            <a:ext cx="1051560" cy="274320"/>
+          </a:xfrm>
+          <a:prstGeom prst="rect">
+            <a:avLst/>
+          </a:prstGeom>
+          <a:noFill/>
+        </p:spPr>
+        <p:txBody>
+          <a:bodyPr wrap="square" anchor="t" lIns="0" rIns="0" tIns="0" bIns="0">
+            <a:spAutoFit/>
+          </a:bodyPr>
+          <a:lstStyle/>
+          <a:p>
+            <a:pPr algn="l">
+              <a:lnSpc>
+                <a:spcPct val="100000"/>
+              </a:lnSpc>
+              <a:spcAft>
+                <a:spcPts val="300"/>
+              </a:spcAft>
+            </a:pPr>
+            <a:r>
+              <a:rPr sz="1000" b="1">
+                <a:solidFill>
+                  <a:srgbClr val="00B378"/>
+                </a:solidFill>
+                <a:latin typeface="Barlow"/>
+              </a:rPr>
+              <a:t>✅ Works</a:t>
+            </a:r>
+          </a:p>
+        </p:txBody>
+      </p:sp>
+      <p:sp>
+        <p:nvSpPr>
+          <p:cNvPr id="23" name="TextBox 22"/>
+          <p:cNvSpPr txBox="1"/>
+          <p:nvPr/>
+        </p:nvSpPr>
+        <p:spPr>
+          <a:xfrm>
+            <a:off x="4663440" y="2971800"/>
+            <a:ext cx="2834640" cy="329184"/>
+          </a:xfrm>
+          <a:prstGeom prst="rect">
+            <a:avLst/>
+          </a:prstGeom>
+          <a:noFill/>
+        </p:spPr>
+        <p:txBody>
+          <a:bodyPr wrap="square" anchor="t" lIns="0" rIns="0" tIns="0" bIns="0">
+            <a:spAutoFit/>
+          </a:bodyPr>
+          <a:lstStyle/>
+          <a:p>
+            <a:pPr algn="l">
+              <a:lnSpc>
+                <a:spcPct val="98000"/>
+              </a:lnSpc>
+              <a:spcAft>
+                <a:spcPts val="300"/>
+              </a:spcAft>
+            </a:pPr>
+            <a:r>
+              <a:rPr sz="900" b="0">
+                <a:solidFill>
+                  <a:srgbClr val="618793"/>
+                </a:solidFill>
+                <a:latin typeface="DM Sans"/>
+              </a:rPr>
+              <a:t>query-gated FM on residual; promote only if confirmed</a:t>
+            </a:r>
+          </a:p>
+        </p:txBody>
+      </p:sp>
+      <p:sp>
+        <p:nvSpPr>
+          <p:cNvPr id="24" name="TextBox 23"/>
+          <p:cNvSpPr txBox="1"/>
+          <p:nvPr/>
+        </p:nvSpPr>
+        <p:spPr>
+          <a:xfrm>
+            <a:off x="7635240" y="2971800"/>
+            <a:ext cx="1143000" cy="274320"/>
+          </a:xfrm>
+          <a:prstGeom prst="rect">
+            <a:avLst/>
+          </a:prstGeom>
+          <a:noFill/>
+        </p:spPr>
+        <p:txBody>
+          <a:bodyPr wrap="square" anchor="t" lIns="0" rIns="0" tIns="0" bIns="0">
+            <a:spAutoFit/>
+          </a:bodyPr>
+          <a:lstStyle/>
+          <a:p>
+            <a:pPr algn="l">
+              <a:lnSpc>
+                <a:spcPct val="100000"/>
+              </a:lnSpc>
+              <a:spcAft>
+                <a:spcPts val="300"/>
+              </a:spcAft>
+            </a:pPr>
+            <a:r>
+              <a:rPr sz="900" b="0">
+                <a:solidFill>
+                  <a:srgbClr val="1B5161"/>
+                </a:solidFill>
+                <a:latin typeface="DM Sans"/>
+              </a:rPr>
+              <a:t>App·CLI·Skill</a:t>
+            </a:r>
+          </a:p>
+        </p:txBody>
+      </p:sp>
+      <p:sp>
+        <p:nvSpPr>
+          <p:cNvPr id="25" name="Rectangle 24"/>
+          <p:cNvSpPr/>
+          <p:nvPr/>
+        </p:nvSpPr>
+        <p:spPr>
+          <a:xfrm>
+            <a:off x="548640" y="3319272"/>
+            <a:ext cx="8046720" cy="10972"/>
+          </a:xfrm>
+          <a:prstGeom prst="rect">
+            <a:avLst/>
+          </a:prstGeom>
+          <a:solidFill>
+            <a:srgbClr val="F1F1F1"/>
+          </a:solidFill>
+          <a:ln>
+            <a:noFill/>
+          </a:ln>
+          <a:effectLst/>
+        </p:spPr>
+        <p:style>
+          <a:lnRef idx="1">
+            <a:schemeClr val="accent1"/>
+          </a:lnRef>
+          <a:fillRef idx="3">
+            <a:schemeClr val="accent1"/>
+          </a:fillRef>
+          <a:effectRef idx="2">
+            <a:schemeClr val="accent1"/>
+          </a:effectRef>
+          <a:fontRef idx="minor">
+            <a:schemeClr val="lt1"/>
+          </a:fontRef>
+        </p:style>
+        <p:txBody>
+          <a:bodyPr rtlCol="0" anchor="ctr"/>
+          <a:lstStyle/>
+          <a:p>
+            <a:pPr algn="ctr"/>
+          </a:p>
+        </p:txBody>
+      </p:sp>
+      <p:sp>
+        <p:nvSpPr>
+          <p:cNvPr id="26" name="TextBox 25"/>
+          <p:cNvSpPr txBox="1"/>
+          <p:nvPr/>
+        </p:nvSpPr>
+        <p:spPr>
+          <a:xfrm>
+            <a:off x="548640" y="3337560"/>
+            <a:ext cx="2834640" cy="329184"/>
+          </a:xfrm>
+          <a:prstGeom prst="rect">
+            <a:avLst/>
+          </a:prstGeom>
+          <a:noFill/>
+        </p:spPr>
+        <p:txBody>
+          <a:bodyPr wrap="square" anchor="t" lIns="0" rIns="0" tIns="0" bIns="0">
+            <a:spAutoFit/>
+          </a:bodyPr>
+          <a:lstStyle/>
+          <a:p>
+            <a:pPr algn="l">
+              <a:lnSpc>
+                <a:spcPct val="98000"/>
+              </a:lnSpc>
+              <a:spcAft>
+                <a:spcPts val="300"/>
+              </a:spcAft>
+            </a:pPr>
+            <a:r>
+              <a:rPr sz="1050" b="1">
+                <a:solidFill>
+                  <a:srgbClr val="1B3037"/>
+                </a:solidFill>
+                <a:latin typeface="Barlow"/>
+              </a:rPr>
+              <a:t>Confidence scoring</a:t>
+            </a:r>
+          </a:p>
+        </p:txBody>
+      </p:sp>
+      <p:sp>
+        <p:nvSpPr>
+          <p:cNvPr id="27" name="TextBox 26"/>
+          <p:cNvSpPr txBox="1"/>
+          <p:nvPr/>
+        </p:nvSpPr>
+        <p:spPr>
+          <a:xfrm>
+            <a:off x="3520440" y="3337560"/>
+            <a:ext cx="1051560" cy="274320"/>
+          </a:xfrm>
+          <a:prstGeom prst="rect">
+            <a:avLst/>
+          </a:prstGeom>
+          <a:noFill/>
+        </p:spPr>
+        <p:txBody>
+          <a:bodyPr wrap="square" anchor="t" lIns="0" rIns="0" tIns="0" bIns="0">
+            <a:spAutoFit/>
+          </a:bodyPr>
+          <a:lstStyle/>
+          <a:p>
+            <a:pPr algn="l">
+              <a:lnSpc>
+                <a:spcPct val="100000"/>
+              </a:lnSpc>
+              <a:spcAft>
+                <a:spcPts val="300"/>
+              </a:spcAft>
+            </a:pPr>
+            <a:r>
+              <a:rPr sz="1000" b="1">
+                <a:solidFill>
+                  <a:srgbClr val="00B378"/>
+                </a:solidFill>
+                <a:latin typeface="Barlow"/>
+              </a:rPr>
+              <a:t>✅ Works</a:t>
+            </a:r>
+          </a:p>
+        </p:txBody>
+      </p:sp>
+      <p:sp>
+        <p:nvSpPr>
+          <p:cNvPr id="28" name="TextBox 27"/>
+          <p:cNvSpPr txBox="1"/>
+          <p:nvPr/>
+        </p:nvSpPr>
+        <p:spPr>
+          <a:xfrm>
+            <a:off x="4663440" y="3337560"/>
+            <a:ext cx="2834640" cy="329184"/>
+          </a:xfrm>
+          <a:prstGeom prst="rect">
+            <a:avLst/>
+          </a:prstGeom>
+          <a:noFill/>
+        </p:spPr>
+        <p:txBody>
+          <a:bodyPr wrap="square" anchor="t" lIns="0" rIns="0" tIns="0" bIns="0">
+            <a:spAutoFit/>
+          </a:bodyPr>
+          <a:lstStyle/>
+          <a:p>
+            <a:pPr algn="l">
+              <a:lnSpc>
+                <a:spcPct val="98000"/>
+              </a:lnSpc>
+              <a:spcAft>
+                <a:spcPts val="300"/>
+              </a:spcAft>
+            </a:pPr>
+            <a:r>
+              <a:rPr sz="900" b="0">
+                <a:solidFill>
+                  <a:srgbClr val="618793"/>
+                </a:solidFill>
+                <a:latin typeface="DM Sans"/>
+              </a:rPr>
+              <a:t>per-finding % + confirmed badge + run rollup</a:t>
+            </a:r>
+          </a:p>
+        </p:txBody>
+      </p:sp>
+      <p:sp>
+        <p:nvSpPr>
+          <p:cNvPr id="29" name="TextBox 28"/>
+          <p:cNvSpPr txBox="1"/>
+          <p:nvPr/>
+        </p:nvSpPr>
+        <p:spPr>
+          <a:xfrm>
+            <a:off x="7635240" y="3337560"/>
+            <a:ext cx="1143000" cy="274320"/>
+          </a:xfrm>
+          <a:prstGeom prst="rect">
+            <a:avLst/>
+          </a:prstGeom>
+          <a:noFill/>
+        </p:spPr>
+        <p:txBody>
+          <a:bodyPr wrap="square" anchor="t" lIns="0" rIns="0" tIns="0" bIns="0">
+            <a:spAutoFit/>
+          </a:bodyPr>
+          <a:lstStyle/>
+          <a:p>
+            <a:pPr algn="l">
+              <a:lnSpc>
+                <a:spcPct val="100000"/>
+              </a:lnSpc>
+              <a:spcAft>
+                <a:spcPts val="300"/>
+              </a:spcAft>
+            </a:pPr>
+            <a:r>
+              <a:rPr sz="900" b="0">
+                <a:solidFill>
+                  <a:srgbClr val="1B5161"/>
+                </a:solidFill>
+                <a:latin typeface="DM Sans"/>
+              </a:rPr>
+              <a:t>App·CLI·Skill</a:t>
+            </a:r>
+          </a:p>
+        </p:txBody>
+      </p:sp>
+      <p:sp>
+        <p:nvSpPr>
+          <p:cNvPr id="30" name="Rectangle 29"/>
+          <p:cNvSpPr/>
+          <p:nvPr/>
+        </p:nvSpPr>
+        <p:spPr>
+          <a:xfrm>
+            <a:off x="548640" y="3685032"/>
+            <a:ext cx="8046720" cy="10972"/>
+          </a:xfrm>
+          <a:prstGeom prst="rect">
+            <a:avLst/>
+          </a:prstGeom>
+          <a:solidFill>
+            <a:srgbClr val="F1F1F1"/>
+          </a:solidFill>
+          <a:ln>
+            <a:noFill/>
+          </a:ln>
+          <a:effectLst/>
+        </p:spPr>
+        <p:style>
+          <a:lnRef idx="1">
+            <a:schemeClr val="accent1"/>
+          </a:lnRef>
+          <a:fillRef idx="3">
+            <a:schemeClr val="accent1"/>
+          </a:fillRef>
+          <a:effectRef idx="2">
+            <a:schemeClr val="accent1"/>
+          </a:effectRef>
+          <a:fontRef idx="minor">
+            <a:schemeClr val="lt1"/>
+          </a:fontRef>
+        </p:style>
+        <p:txBody>
+          <a:bodyPr rtlCol="0" anchor="ctr"/>
+          <a:lstStyle/>
+          <a:p>
+            <a:pPr algn="ctr"/>
+          </a:p>
+        </p:txBody>
+      </p:sp>
+      <p:sp>
+        <p:nvSpPr>
+          <p:cNvPr id="31" name="TextBox 30"/>
+          <p:cNvSpPr txBox="1"/>
+          <p:nvPr/>
+        </p:nvSpPr>
+        <p:spPr>
+          <a:xfrm>
+            <a:off x="548640" y="3703320"/>
+            <a:ext cx="2834640" cy="329184"/>
+          </a:xfrm>
+          <a:prstGeom prst="rect">
+            <a:avLst/>
+          </a:prstGeom>
+          <a:noFill/>
+        </p:spPr>
+        <p:txBody>
+          <a:bodyPr wrap="square" anchor="t" lIns="0" rIns="0" tIns="0" bIns="0">
+            <a:spAutoFit/>
+          </a:bodyPr>
+          <a:lstStyle/>
+          <a:p>
+            <a:pPr algn="l">
+              <a:lnSpc>
+                <a:spcPct val="98000"/>
+              </a:lnSpc>
+              <a:spcAft>
+                <a:spcPts val="300"/>
+              </a:spcAft>
+            </a:pPr>
+            <a:r>
+              <a:rPr sz="1050" b="1">
+                <a:solidFill>
+                  <a:srgbClr val="1B3037"/>
+                </a:solidFill>
+                <a:latin typeface="Barlow"/>
+              </a:rPr>
+              <a:t>Aggregate RCA</a:t>
+            </a:r>
+          </a:p>
+        </p:txBody>
+      </p:sp>
+      <p:sp>
+        <p:nvSpPr>
+          <p:cNvPr id="32" name="TextBox 31"/>
+          <p:cNvSpPr txBox="1"/>
+          <p:nvPr/>
+        </p:nvSpPr>
+        <p:spPr>
+          <a:xfrm>
+            <a:off x="3520440" y="3703320"/>
+            <a:ext cx="1051560" cy="274320"/>
+          </a:xfrm>
+          <a:prstGeom prst="rect">
+            <a:avLst/>
+          </a:prstGeom>
+          <a:noFill/>
+        </p:spPr>
+        <p:txBody>
+          <a:bodyPr wrap="square" anchor="t" lIns="0" rIns="0" tIns="0" bIns="0">
+            <a:spAutoFit/>
+          </a:bodyPr>
+          <a:lstStyle/>
+          <a:p>
+            <a:pPr algn="l">
+              <a:lnSpc>
+                <a:spcPct val="100000"/>
+              </a:lnSpc>
+              <a:spcAft>
+                <a:spcPts val="300"/>
+              </a:spcAft>
+            </a:pPr>
+            <a:r>
+              <a:rPr sz="1000" b="1">
+                <a:solidFill>
+                  <a:srgbClr val="00B378"/>
+                </a:solidFill>
+                <a:latin typeface="Barlow"/>
+              </a:rPr>
+              <a:t>✅ Works</a:t>
+            </a:r>
+          </a:p>
+        </p:txBody>
+      </p:sp>
+      <p:sp>
+        <p:nvSpPr>
+          <p:cNvPr id="33" name="TextBox 32"/>
+          <p:cNvSpPr txBox="1"/>
+          <p:nvPr/>
+        </p:nvSpPr>
+        <p:spPr>
+          <a:xfrm>
+            <a:off x="4663440" y="3703320"/>
+            <a:ext cx="2834640" cy="329184"/>
+          </a:xfrm>
+          <a:prstGeom prst="rect">
+            <a:avLst/>
+          </a:prstGeom>
+          <a:noFill/>
+        </p:spPr>
+        <p:txBody>
+          <a:bodyPr wrap="square" anchor="t" lIns="0" rIns="0" tIns="0" bIns="0">
+            <a:spAutoFit/>
+          </a:bodyPr>
+          <a:lstStyle/>
+          <a:p>
+            <a:pPr algn="l">
+              <a:lnSpc>
+                <a:spcPct val="98000"/>
+              </a:lnSpc>
+              <a:spcAft>
+                <a:spcPts val="300"/>
+              </a:spcAft>
+            </a:pPr>
+            <a:r>
+              <a:rPr sz="900" b="0">
+                <a:solidFill>
+                  <a:srgbClr val="618793"/>
+                </a:solidFill>
+                <a:latin typeface="DM Sans"/>
+              </a:rPr>
+              <a:t>per-rule SUM / AVG / COUNT by group</a:t>
+            </a:r>
+          </a:p>
+        </p:txBody>
+      </p:sp>
+      <p:sp>
+        <p:nvSpPr>
+          <p:cNvPr id="34" name="TextBox 33"/>
+          <p:cNvSpPr txBox="1"/>
+          <p:nvPr/>
+        </p:nvSpPr>
+        <p:spPr>
+          <a:xfrm>
+            <a:off x="7635240" y="3703320"/>
+            <a:ext cx="1143000" cy="274320"/>
+          </a:xfrm>
+          <a:prstGeom prst="rect">
+            <a:avLst/>
+          </a:prstGeom>
+          <a:noFill/>
+        </p:spPr>
+        <p:txBody>
+          <a:bodyPr wrap="square" anchor="t" lIns="0" rIns="0" tIns="0" bIns="0">
+            <a:spAutoFit/>
+          </a:bodyPr>
+          <a:lstStyle/>
+          <a:p>
+            <a:pPr algn="l">
+              <a:lnSpc>
+                <a:spcPct val="100000"/>
+              </a:lnSpc>
+              <a:spcAft>
+                <a:spcPts val="300"/>
+              </a:spcAft>
+            </a:pPr>
+            <a:r>
+              <a:rPr sz="900" b="0">
+                <a:solidFill>
+                  <a:srgbClr val="1B5161"/>
+                </a:solidFill>
+                <a:latin typeface="DM Sans"/>
+              </a:rPr>
+              <a:t>App·CLI·Skill</a:t>
+            </a:r>
+          </a:p>
+        </p:txBody>
+      </p:sp>
+      <p:sp>
+        <p:nvSpPr>
+          <p:cNvPr id="35" name="Rectangle 34"/>
+          <p:cNvSpPr/>
+          <p:nvPr/>
+        </p:nvSpPr>
+        <p:spPr>
+          <a:xfrm>
+            <a:off x="548640" y="4050791"/>
+            <a:ext cx="8046720" cy="10972"/>
+          </a:xfrm>
+          <a:prstGeom prst="rect">
+            <a:avLst/>
+          </a:prstGeom>
+          <a:solidFill>
+            <a:srgbClr val="F1F1F1"/>
+          </a:solidFill>
+          <a:ln>
+            <a:noFill/>
+          </a:ln>
+          <a:effectLst/>
+        </p:spPr>
+        <p:style>
+          <a:lnRef idx="1">
+            <a:schemeClr val="accent1"/>
+          </a:lnRef>
+          <a:fillRef idx="3">
+            <a:schemeClr val="accent1"/>
+          </a:fillRef>
+          <a:effectRef idx="2">
+            <a:schemeClr val="accent1"/>
+          </a:effectRef>
+          <a:fontRef idx="minor">
+            <a:schemeClr val="lt1"/>
+          </a:fontRef>
+        </p:style>
+        <p:txBody>
+          <a:bodyPr rtlCol="0" anchor="ctr"/>
+          <a:lstStyle/>
+          <a:p>
+            <a:pPr algn="ctr"/>
+          </a:p>
+        </p:txBody>
+      </p:sp>
+      <p:sp>
+        <p:nvSpPr>
+          <p:cNvPr id="36" name="TextBox 35"/>
+          <p:cNvSpPr txBox="1"/>
+          <p:nvPr/>
+        </p:nvSpPr>
+        <p:spPr>
+          <a:xfrm>
+            <a:off x="548640" y="4069080"/>
+            <a:ext cx="2834640" cy="329184"/>
+          </a:xfrm>
+          <a:prstGeom prst="rect">
+            <a:avLst/>
+          </a:prstGeom>
+          <a:noFill/>
+        </p:spPr>
+        <p:txBody>
+          <a:bodyPr wrap="square" anchor="t" lIns="0" rIns="0" tIns="0" bIns="0">
+            <a:spAutoFit/>
+          </a:bodyPr>
+          <a:lstStyle/>
+          <a:p>
+            <a:pPr algn="l">
+              <a:lnSpc>
+                <a:spcPct val="98000"/>
+              </a:lnSpc>
+              <a:spcAft>
+                <a:spcPts val="300"/>
+              </a:spcAft>
+            </a:pPr>
+            <a:r>
+              <a:rPr sz="1050" b="1">
+                <a:solidFill>
+                  <a:srgbClr val="1B3037"/>
+                </a:solidFill>
+                <a:latin typeface="Barlow"/>
+              </a:rPr>
+              <a:t>Threshold &amp; schema</a:t>
+            </a:r>
+          </a:p>
+        </p:txBody>
+      </p:sp>
+      <p:sp>
+        <p:nvSpPr>
+          <p:cNvPr id="37" name="TextBox 36"/>
+          <p:cNvSpPr txBox="1"/>
+          <p:nvPr/>
+        </p:nvSpPr>
+        <p:spPr>
+          <a:xfrm>
+            <a:off x="3520440" y="4069080"/>
+            <a:ext cx="1051560" cy="274320"/>
+          </a:xfrm>
+          <a:prstGeom prst="rect">
+            <a:avLst/>
+          </a:prstGeom>
+          <a:noFill/>
+        </p:spPr>
+        <p:txBody>
+          <a:bodyPr wrap="square" anchor="t" lIns="0" rIns="0" tIns="0" bIns="0">
+            <a:spAutoFit/>
+          </a:bodyPr>
+          <a:lstStyle/>
+          <a:p>
+            <a:pPr algn="l">
+              <a:lnSpc>
+                <a:spcPct val="100000"/>
+              </a:lnSpc>
+              <a:spcAft>
+                <a:spcPts val="300"/>
+              </a:spcAft>
+            </a:pPr>
+            <a:r>
+              <a:rPr sz="1000" b="1">
+                <a:solidFill>
+                  <a:srgbClr val="00B378"/>
+                </a:solidFill>
+                <a:latin typeface="Barlow"/>
+              </a:rPr>
+              <a:t>✅ Works</a:t>
+            </a:r>
+          </a:p>
+        </p:txBody>
+      </p:sp>
+      <p:sp>
+        <p:nvSpPr>
+          <p:cNvPr id="38" name="TextBox 37"/>
+          <p:cNvSpPr txBox="1"/>
+          <p:nvPr/>
+        </p:nvSpPr>
+        <p:spPr>
+          <a:xfrm>
+            <a:off x="4663440" y="4069080"/>
+            <a:ext cx="2834640" cy="329184"/>
+          </a:xfrm>
+          <a:prstGeom prst="rect">
+            <a:avLst/>
+          </a:prstGeom>
+          <a:noFill/>
+        </p:spPr>
+        <p:txBody>
+          <a:bodyPr wrap="square" anchor="t" lIns="0" rIns="0" tIns="0" bIns="0">
+            <a:spAutoFit/>
+          </a:bodyPr>
+          <a:lstStyle/>
+          <a:p>
+            <a:pPr algn="l">
+              <a:lnSpc>
+                <a:spcPct val="98000"/>
+              </a:lnSpc>
+              <a:spcAft>
+                <a:spcPts val="300"/>
+              </a:spcAft>
+            </a:pPr>
+            <a:r>
+              <a:rPr sz="900" b="0">
+                <a:solidFill>
+                  <a:srgbClr val="618793"/>
+                </a:solidFill>
+                <a:latin typeface="DM Sans"/>
+              </a:rPr>
+              <a:t>within-tolerance benign; type/precision diffs</a:t>
+            </a:r>
+          </a:p>
+        </p:txBody>
+      </p:sp>
+      <p:sp>
+        <p:nvSpPr>
+          <p:cNvPr id="39" name="TextBox 38"/>
+          <p:cNvSpPr txBox="1"/>
+          <p:nvPr/>
+        </p:nvSpPr>
+        <p:spPr>
+          <a:xfrm>
+            <a:off x="7635240" y="4069080"/>
+            <a:ext cx="1143000" cy="274320"/>
+          </a:xfrm>
+          <a:prstGeom prst="rect">
+            <a:avLst/>
+          </a:prstGeom>
+          <a:noFill/>
+        </p:spPr>
+        <p:txBody>
+          <a:bodyPr wrap="square" anchor="t" lIns="0" rIns="0" tIns="0" bIns="0">
+            <a:spAutoFit/>
+          </a:bodyPr>
+          <a:lstStyle/>
+          <a:p>
+            <a:pPr algn="l">
+              <a:lnSpc>
+                <a:spcPct val="100000"/>
+              </a:lnSpc>
+              <a:spcAft>
+                <a:spcPts val="300"/>
+              </a:spcAft>
+            </a:pPr>
+            <a:r>
+              <a:rPr sz="900" b="0">
+                <a:solidFill>
+                  <a:srgbClr val="1B5161"/>
+                </a:solidFill>
+                <a:latin typeface="DM Sans"/>
+              </a:rPr>
+              <a:t>App·CLI·Skill</a:t>
+            </a:r>
+          </a:p>
+        </p:txBody>
+      </p:sp>
+      <p:sp>
+        <p:nvSpPr>
+          <p:cNvPr id="40" name="Rectangle 39"/>
+          <p:cNvSpPr/>
+          <p:nvPr/>
+        </p:nvSpPr>
+        <p:spPr>
+          <a:xfrm>
+            <a:off x="548640" y="4416552"/>
+            <a:ext cx="8046720" cy="10972"/>
+          </a:xfrm>
+          <a:prstGeom prst="rect">
+            <a:avLst/>
+          </a:prstGeom>
+          <a:solidFill>
+            <a:srgbClr val="F1F1F1"/>
+          </a:solidFill>
+          <a:ln>
+            <a:noFill/>
+          </a:ln>
+          <a:effectLst/>
+        </p:spPr>
+        <p:style>
+          <a:lnRef idx="1">
+            <a:schemeClr val="accent1"/>
+          </a:lnRef>
+          <a:fillRef idx="3">
+            <a:schemeClr val="accent1"/>
+          </a:fillRef>
+          <a:effectRef idx="2">
+            <a:schemeClr val="accent1"/>
+          </a:effectRef>
+          <a:fontRef idx="minor">
+            <a:schemeClr val="lt1"/>
+          </a:fontRef>
+        </p:style>
+        <p:txBody>
+          <a:bodyPr rtlCol="0" anchor="ctr"/>
+          <a:lstStyle/>
+          <a:p>
+            <a:pPr algn="ctr"/>
+          </a:p>
+        </p:txBody>
+      </p:sp>
+      <p:sp>
+        <p:nvSpPr>
+          <p:cNvPr id="41" name="TextBox 40"/>
+          <p:cNvSpPr txBox="1"/>
+          <p:nvPr/>
+        </p:nvSpPr>
+        <p:spPr>
+          <a:xfrm>
+            <a:off x="548640" y="4434840"/>
+            <a:ext cx="2834640" cy="329184"/>
+          </a:xfrm>
+          <a:prstGeom prst="rect">
+            <a:avLst/>
+          </a:prstGeom>
+          <a:noFill/>
+        </p:spPr>
+        <p:txBody>
+          <a:bodyPr wrap="square" anchor="t" lIns="0" rIns="0" tIns="0" bIns="0">
+            <a:spAutoFit/>
+          </a:bodyPr>
+          <a:lstStyle/>
+          <a:p>
+            <a:pPr algn="l">
+              <a:lnSpc>
+                <a:spcPct val="98000"/>
+              </a:lnSpc>
+              <a:spcAft>
+                <a:spcPts val="300"/>
+              </a:spcAft>
+            </a:pPr>
+            <a:r>
+              <a:rPr sz="1050" b="1">
+                <a:solidFill>
+                  <a:srgbClr val="1B3037"/>
+                </a:solidFill>
+                <a:latin typeface="Barlow"/>
+              </a:rPr>
+              <a:t>Scale / prod-volume</a:t>
+            </a:r>
+          </a:p>
+        </p:txBody>
+      </p:sp>
+      <p:sp>
+        <p:nvSpPr>
+          <p:cNvPr id="42" name="TextBox 41"/>
+          <p:cNvSpPr txBox="1"/>
+          <p:nvPr/>
+        </p:nvSpPr>
+        <p:spPr>
+          <a:xfrm>
+            <a:off x="3520440" y="4434840"/>
+            <a:ext cx="1051560" cy="274320"/>
+          </a:xfrm>
+          <a:prstGeom prst="rect">
+            <a:avLst/>
+          </a:prstGeom>
+          <a:noFill/>
+        </p:spPr>
+        <p:txBody>
+          <a:bodyPr wrap="square" anchor="t" lIns="0" rIns="0" tIns="0" bIns="0">
+            <a:spAutoFit/>
+          </a:bodyPr>
+          <a:lstStyle/>
+          <a:p>
+            <a:pPr algn="l">
+              <a:lnSpc>
+                <a:spcPct val="100000"/>
+              </a:lnSpc>
+              <a:spcAft>
+                <a:spcPts val="300"/>
+              </a:spcAft>
+            </a:pPr>
+            <a:r>
+              <a:rPr sz="1000" b="1">
+                <a:solidFill>
+                  <a:srgbClr val="00B378"/>
+                </a:solidFill>
+                <a:latin typeface="Barlow"/>
+              </a:rPr>
+              <a:t>✅ Works</a:t>
+            </a:r>
+          </a:p>
+        </p:txBody>
+      </p:sp>
+      <p:sp>
+        <p:nvSpPr>
+          <p:cNvPr id="43" name="TextBox 42"/>
+          <p:cNvSpPr txBox="1"/>
+          <p:nvPr/>
+        </p:nvSpPr>
+        <p:spPr>
+          <a:xfrm>
+            <a:off x="4663440" y="4434840"/>
+            <a:ext cx="2834640" cy="329184"/>
+          </a:xfrm>
+          <a:prstGeom prst="rect">
+            <a:avLst/>
+          </a:prstGeom>
+          <a:noFill/>
+        </p:spPr>
+        <p:txBody>
+          <a:bodyPr wrap="square" anchor="t" lIns="0" rIns="0" tIns="0" bIns="0">
+            <a:spAutoFit/>
+          </a:bodyPr>
+          <a:lstStyle/>
+          <a:p>
+            <a:pPr algn="l">
+              <a:lnSpc>
+                <a:spcPct val="98000"/>
+              </a:lnSpc>
+              <a:spcAft>
+                <a:spcPts val="300"/>
+              </a:spcAft>
+            </a:pPr>
+            <a:r>
+              <a:rPr sz="900" b="0">
+                <a:solidFill>
+                  <a:srgbClr val="618793"/>
+                </a:solidFill>
+                <a:latin typeface="DM Sans"/>
+              </a:rPr>
+              <a:t>50M rows · 8.5 GB reconciled + RCA</a:t>
+            </a:r>
+          </a:p>
+        </p:txBody>
+      </p:sp>
+      <p:sp>
+        <p:nvSpPr>
+          <p:cNvPr id="44" name="TextBox 43"/>
+          <p:cNvSpPr txBox="1"/>
+          <p:nvPr/>
+        </p:nvSpPr>
+        <p:spPr>
+          <a:xfrm>
+            <a:off x="7635240" y="4434840"/>
+            <a:ext cx="1143000" cy="274320"/>
+          </a:xfrm>
+          <a:prstGeom prst="rect">
+            <a:avLst/>
+          </a:prstGeom>
+          <a:noFill/>
+        </p:spPr>
+        <p:txBody>
+          <a:bodyPr wrap="square" anchor="t" lIns="0" rIns="0" tIns="0" bIns="0">
+            <a:spAutoFit/>
+          </a:bodyPr>
+          <a:lstStyle/>
+          <a:p>
+            <a:pPr algn="l">
+              <a:lnSpc>
+                <a:spcPct val="100000"/>
+              </a:lnSpc>
+              <a:spcAft>
+                <a:spcPts val="300"/>
+              </a:spcAft>
+            </a:pPr>
+            <a:r>
+              <a:rPr sz="900" b="0">
+                <a:solidFill>
+                  <a:srgbClr val="1B5161"/>
+                </a:solidFill>
+                <a:latin typeface="DM Sans"/>
+              </a:rPr>
+              <a:t>All</a:t>
+            </a:r>
+          </a:p>
+        </p:txBody>
+      </p:sp>
+      <p:sp>
+        <p:nvSpPr>
+          <p:cNvPr id="45" name="Rectangle 44"/>
+          <p:cNvSpPr/>
+          <p:nvPr/>
+        </p:nvSpPr>
+        <p:spPr>
+          <a:xfrm>
+            <a:off x="548640" y="4782312"/>
+            <a:ext cx="8046720" cy="10972"/>
+          </a:xfrm>
+          <a:prstGeom prst="rect">
+            <a:avLst/>
+          </a:prstGeom>
+          <a:solidFill>
+            <a:srgbClr val="F1F1F1"/>
+          </a:solidFill>
+          <a:ln>
+            <a:noFill/>
+          </a:ln>
+          <a:effectLst/>
+        </p:spPr>
+        <p:style>
+          <a:lnRef idx="1">
+            <a:schemeClr val="accent1"/>
+          </a:lnRef>
+          <a:fillRef idx="3">
+            <a:schemeClr val="accent1"/>
+          </a:fillRef>
+          <a:effectRef idx="2">
+            <a:schemeClr val="accent1"/>
+          </a:effectRef>
+          <a:fontRef idx="minor">
+            <a:schemeClr val="lt1"/>
+          </a:fontRef>
+        </p:style>
+        <p:txBody>
+          <a:bodyPr rtlCol="0" anchor="ctr"/>
+          <a:lstStyle/>
+          <a:p>
+            <a:pPr algn="ctr"/>
+          </a:p>
+        </p:txBody>
+      </p:sp>
+      <p:sp>
+        <p:nvSpPr>
+          <p:cNvPr id="46" name="TextBox 45"/>
+          <p:cNvSpPr txBox="1"/>
+          <p:nvPr/>
+        </p:nvSpPr>
+        <p:spPr>
+          <a:xfrm>
+            <a:off x="548640" y="4800600"/>
+            <a:ext cx="2834640" cy="329184"/>
+          </a:xfrm>
+          <a:prstGeom prst="rect">
+            <a:avLst/>
+          </a:prstGeom>
+          <a:noFill/>
+        </p:spPr>
+        <p:txBody>
+          <a:bodyPr wrap="square" anchor="t" lIns="0" rIns="0" tIns="0" bIns="0">
+            <a:spAutoFit/>
+          </a:bodyPr>
+          <a:lstStyle/>
+          <a:p>
+            <a:pPr algn="l">
+              <a:lnSpc>
+                <a:spcPct val="98000"/>
+              </a:lnSpc>
+              <a:spcAft>
+                <a:spcPts val="300"/>
+              </a:spcAft>
+            </a:pPr>
+            <a:r>
+              <a:rPr sz="1050" b="1">
+                <a:solidFill>
+                  <a:srgbClr val="1B3037"/>
+                </a:solidFill>
+                <a:latin typeface="Barlow"/>
+              </a:rPr>
+              <a:t>Concurrency</a:t>
+            </a:r>
+          </a:p>
+        </p:txBody>
+      </p:sp>
+      <p:sp>
+        <p:nvSpPr>
+          <p:cNvPr id="47" name="TextBox 46"/>
+          <p:cNvSpPr txBox="1"/>
+          <p:nvPr/>
+        </p:nvSpPr>
+        <p:spPr>
+          <a:xfrm>
+            <a:off x="3520440" y="4800600"/>
+            <a:ext cx="1051560" cy="274320"/>
+          </a:xfrm>
+          <a:prstGeom prst="rect">
+            <a:avLst/>
+          </a:prstGeom>
+          <a:noFill/>
+        </p:spPr>
+        <p:txBody>
+          <a:bodyPr wrap="square" anchor="t" lIns="0" rIns="0" tIns="0" bIns="0">
+            <a:spAutoFit/>
+          </a:bodyPr>
+          <a:lstStyle/>
+          <a:p>
+            <a:pPr algn="l">
+              <a:lnSpc>
+                <a:spcPct val="100000"/>
+              </a:lnSpc>
+              <a:spcAft>
+                <a:spcPts val="300"/>
+              </a:spcAft>
+            </a:pPr>
+            <a:r>
+              <a:rPr sz="1000" b="1">
+                <a:solidFill>
+                  <a:srgbClr val="00B378"/>
+                </a:solidFill>
+                <a:latin typeface="Barlow"/>
+              </a:rPr>
+              <a:t>✅ Works</a:t>
+            </a:r>
+          </a:p>
+        </p:txBody>
+      </p:sp>
+      <p:sp>
+        <p:nvSpPr>
+          <p:cNvPr id="48" name="TextBox 47"/>
+          <p:cNvSpPr txBox="1"/>
+          <p:nvPr/>
+        </p:nvSpPr>
+        <p:spPr>
+          <a:xfrm>
+            <a:off x="4663440" y="4800600"/>
+            <a:ext cx="2834640" cy="329184"/>
+          </a:xfrm>
+          <a:prstGeom prst="rect">
+            <a:avLst/>
+          </a:prstGeom>
+          <a:noFill/>
+        </p:spPr>
+        <p:txBody>
+          <a:bodyPr wrap="square" anchor="t" lIns="0" rIns="0" tIns="0" bIns="0">
+            <a:spAutoFit/>
+          </a:bodyPr>
+          <a:lstStyle/>
+          <a:p>
+            <a:pPr algn="l">
+              <a:lnSpc>
+                <a:spcPct val="98000"/>
+              </a:lnSpc>
+              <a:spcAft>
+                <a:spcPts val="300"/>
+              </a:spcAft>
+            </a:pPr>
+            <a:r>
+              <a:rPr sz="900" b="0">
+                <a:solidFill>
+                  <a:srgbClr val="618793"/>
+                </a:solidFill>
+                <a:latin typeface="DM Sans"/>
+              </a:rPr>
+              <a:t>6 concurrent runs · ~500 s wall</a:t>
+            </a:r>
+          </a:p>
+        </p:txBody>
+      </p:sp>
+      <p:sp>
+        <p:nvSpPr>
+          <p:cNvPr id="49" name="TextBox 48"/>
+          <p:cNvSpPr txBox="1"/>
+          <p:nvPr/>
+        </p:nvSpPr>
+        <p:spPr>
+          <a:xfrm>
+            <a:off x="7635240" y="4800600"/>
+            <a:ext cx="1143000" cy="274320"/>
+          </a:xfrm>
+          <a:prstGeom prst="rect">
+            <a:avLst/>
+          </a:prstGeom>
+          <a:noFill/>
+        </p:spPr>
+        <p:txBody>
+          <a:bodyPr wrap="square" anchor="t" lIns="0" rIns="0" tIns="0" bIns="0">
+            <a:spAutoFit/>
+          </a:bodyPr>
+          <a:lstStyle/>
+          <a:p>
+            <a:pPr algn="l">
+              <a:lnSpc>
+                <a:spcPct val="100000"/>
+              </a:lnSpc>
+              <a:spcAft>
+                <a:spcPts val="300"/>
+              </a:spcAft>
+            </a:pPr>
+            <a:r>
+              <a:rPr sz="900" b="0">
+                <a:solidFill>
+                  <a:srgbClr val="1B5161"/>
+                </a:solidFill>
+                <a:latin typeface="DM Sans"/>
+              </a:rPr>
+              <a:t>All</a:t>
+            </a:r>
+          </a:p>
+        </p:txBody>
+      </p:sp>
+      <p:sp>
+        <p:nvSpPr>
+          <p:cNvPr id="50" name="Rectangle 49"/>
+          <p:cNvSpPr/>
+          <p:nvPr/>
+        </p:nvSpPr>
+        <p:spPr>
+          <a:xfrm>
+            <a:off x="548640" y="5148072"/>
+            <a:ext cx="8046720" cy="10972"/>
+          </a:xfrm>
+          <a:prstGeom prst="rect">
+            <a:avLst/>
+          </a:prstGeom>
+          <a:solidFill>
+            <a:srgbClr val="F1F1F1"/>
+          </a:solidFill>
+          <a:ln>
+            <a:noFill/>
+          </a:ln>
+          <a:effectLst/>
+        </p:spPr>
+        <p:style>
+          <a:lnRef idx="1">
+            <a:schemeClr val="accent1"/>
+          </a:lnRef>
+          <a:fillRef idx="3">
+            <a:schemeClr val="accent1"/>
+          </a:fillRef>
+          <a:effectRef idx="2">
+            <a:schemeClr val="accent1"/>
+          </a:effectRef>
+          <a:fontRef idx="minor">
+            <a:schemeClr val="lt1"/>
+          </a:fontRef>
+        </p:style>
+        <p:txBody>
+          <a:bodyPr rtlCol="0" anchor="ctr"/>
+          <a:lstStyle/>
+          <a:p>
+            <a:pPr algn="ctr"/>
+          </a:p>
+        </p:txBody>
+      </p:sp>
+    </p:spTree>
+  </p:cSld>
+  <p:clrMapOvr>
+    <a:masterClrMapping/>
+  </p:clrMapOvr>
+</p:sld>
+</file>
+
+<file path=ppt/slides/slide11.xml><?xml version="1.0" encoding="utf-8"?>
+<p:sld xmlns:a="http://schemas.openxmlformats.org/drawingml/2006/main" xmlns:p="http://schemas.openxmlformats.org/presentationml/2006/main" xmlns:r="http://schemas.openxmlformats.org/officeDocument/2006/relationships">
+  <p:cSld>
+    <p:spTree>
+      <p:nvGrpSpPr>
+        <p:cNvPr id="1" name=""/>
+        <p:cNvGrpSpPr/>
+        <p:nvPr/>
+      </p:nvGrpSpPr>
+      <p:grpSpPr/>
+      <p:sp>
+        <p:nvSpPr>
+          <p:cNvPr id="2" name="Rectangle 1"/>
+          <p:cNvSpPr/>
+          <p:nvPr/>
+        </p:nvSpPr>
+        <p:spPr>
+          <a:xfrm>
+            <a:off x="0" y="0"/>
+            <a:ext cx="9144000" cy="5143500"/>
+          </a:xfrm>
+          <a:prstGeom prst="rect">
+            <a:avLst/>
+          </a:prstGeom>
+          <a:solidFill>
+            <a:srgbClr val="FFFFFF"/>
+          </a:solidFill>
+          <a:ln>
+            <a:noFill/>
+          </a:ln>
+          <a:effectLst/>
+        </p:spPr>
+        <p:style>
+          <a:lnRef idx="1">
+            <a:schemeClr val="accent1"/>
+          </a:lnRef>
+          <a:fillRef idx="3">
+            <a:schemeClr val="accent1"/>
+          </a:fillRef>
+          <a:effectRef idx="2">
+            <a:schemeClr val="accent1"/>
+          </a:effectRef>
+          <a:fontRef idx="minor">
+            <a:schemeClr val="lt1"/>
+          </a:fontRef>
+        </p:style>
+        <p:txBody>
+          <a:bodyPr rtlCol="0" anchor="ctr"/>
+          <a:lstStyle/>
+          <a:p>
+            <a:pPr algn="ctr"/>
+          </a:p>
+        </p:txBody>
+      </p:sp>
+      <p:sp>
+        <p:nvSpPr>
+          <p:cNvPr id="3" name="Rectangle 2"/>
+          <p:cNvSpPr/>
+          <p:nvPr/>
+        </p:nvSpPr>
+        <p:spPr>
+          <a:xfrm>
+            <a:off x="548640" y="475488"/>
+            <a:ext cx="502920" cy="82296"/>
+          </a:xfrm>
+          <a:prstGeom prst="rect">
+            <a:avLst/>
+          </a:prstGeom>
+          <a:solidFill>
+            <a:srgbClr val="FF3620"/>
+          </a:solidFill>
+          <a:ln>
+            <a:noFill/>
+          </a:ln>
+          <a:effectLst/>
+        </p:spPr>
+        <p:style>
+          <a:lnRef idx="1">
+            <a:schemeClr val="accent1"/>
+          </a:lnRef>
+          <a:fillRef idx="3">
+            <a:schemeClr val="accent1"/>
+          </a:fillRef>
+          <a:effectRef idx="2">
+            <a:schemeClr val="accent1"/>
+          </a:effectRef>
+          <a:fontRef idx="minor">
+            <a:schemeClr val="lt1"/>
+          </a:fontRef>
+        </p:style>
+        <p:txBody>
+          <a:bodyPr rtlCol="0" anchor="ctr"/>
+          <a:lstStyle/>
+          <a:p>
+            <a:pPr algn="ctr"/>
+          </a:p>
+        </p:txBody>
+      </p:sp>
+      <p:sp>
+        <p:nvSpPr>
+          <p:cNvPr id="4" name="TextBox 3"/>
+          <p:cNvSpPr txBox="1"/>
+          <p:nvPr/>
+        </p:nvSpPr>
+        <p:spPr>
+          <a:xfrm>
+            <a:off x="548640" y="585216"/>
+            <a:ext cx="8046720" cy="274320"/>
+          </a:xfrm>
+          <a:prstGeom prst="rect">
+            <a:avLst/>
+          </a:prstGeom>
+          <a:noFill/>
+        </p:spPr>
+        <p:txBody>
+          <a:bodyPr wrap="square" anchor="t" lIns="0" rIns="0" tIns="0" bIns="0">
+            <a:spAutoFit/>
+          </a:bodyPr>
+          <a:lstStyle/>
+          <a:p>
+            <a:pPr algn="l">
+              <a:lnSpc>
+                <a:spcPct val="100000"/>
+              </a:lnSpc>
+              <a:spcAft>
+                <a:spcPts val="300"/>
+              </a:spcAft>
+            </a:pPr>
+            <a:r>
+              <a:rPr sz="1200" b="1">
+                <a:solidFill>
+                  <a:srgbClr val="618793"/>
+                </a:solidFill>
+                <a:latin typeface="Barlow"/>
+              </a:rPr>
+              <a:t>WHY IT MATTERS</a:t>
+            </a:r>
+          </a:p>
+        </p:txBody>
+      </p:sp>
+      <p:sp>
+        <p:nvSpPr>
+          <p:cNvPr id="5" name="TextBox 4"/>
+          <p:cNvSpPr txBox="1"/>
+          <p:nvPr/>
+        </p:nvSpPr>
+        <p:spPr>
+          <a:xfrm>
+            <a:off x="548640" y="896112"/>
+            <a:ext cx="8138160" cy="640080"/>
+          </a:xfrm>
+          <a:prstGeom prst="rect">
+            <a:avLst/>
+          </a:prstGeom>
+          <a:noFill/>
+        </p:spPr>
+        <p:txBody>
+          <a:bodyPr wrap="square" anchor="t" lIns="0" rIns="0" tIns="0" bIns="0">
+            <a:spAutoFit/>
+          </a:bodyPr>
+          <a:lstStyle/>
+          <a:p>
+            <a:pPr algn="l">
+              <a:lnSpc>
+                <a:spcPct val="100000"/>
+              </a:lnSpc>
+              <a:spcAft>
+                <a:spcPts val="300"/>
+              </a:spcAft>
+            </a:pPr>
+            <a:r>
+              <a:rPr sz="2300" b="1">
+                <a:solidFill>
+                  <a:srgbClr val="1B3037"/>
+                </a:solidFill>
+                <a:latin typeface="Barlow"/>
+              </a:rPr>
+              <a:t>Technical rigor that converts into migration throughput</a:t>
+            </a:r>
+          </a:p>
+        </p:txBody>
+      </p:sp>
+      <p:sp>
+        <p:nvSpPr>
+          <p:cNvPr id="6" name="TextBox 5"/>
+          <p:cNvSpPr txBox="1"/>
+          <p:nvPr/>
+        </p:nvSpPr>
+        <p:spPr>
+          <a:xfrm>
+            <a:off x="548640" y="2103120"/>
+            <a:ext cx="3840480" cy="320040"/>
+          </a:xfrm>
+          <a:prstGeom prst="rect">
+            <a:avLst/>
+          </a:prstGeom>
+          <a:noFill/>
+        </p:spPr>
+        <p:txBody>
+          <a:bodyPr wrap="square" anchor="t" lIns="0" rIns="0" tIns="0" bIns="0">
+            <a:spAutoFit/>
+          </a:bodyPr>
+          <a:lstStyle/>
+          <a:p>
+            <a:pPr algn="l">
+              <a:lnSpc>
+                <a:spcPct val="100000"/>
+              </a:lnSpc>
+              <a:spcAft>
+                <a:spcPts val="300"/>
+              </a:spcAft>
+            </a:pPr>
+            <a:r>
+              <a:rPr sz="1500" b="1">
+                <a:solidFill>
+                  <a:srgbClr val="1B5161"/>
+                </a:solidFill>
+                <a:latin typeface="Barlow"/>
+              </a:rPr>
+              <a:t>Technical impact</a:t>
+            </a:r>
+          </a:p>
+        </p:txBody>
+      </p:sp>
+      <p:sp>
+        <p:nvSpPr>
+          <p:cNvPr id="7" name="Rectangle 6"/>
+          <p:cNvSpPr/>
+          <p:nvPr/>
+        </p:nvSpPr>
+        <p:spPr>
+          <a:xfrm>
+            <a:off x="548640" y="2578608"/>
+            <a:ext cx="45720" cy="502920"/>
+          </a:xfrm>
+          <a:prstGeom prst="rect">
+            <a:avLst/>
+          </a:prstGeom>
+          <a:solidFill>
+            <a:srgbClr val="1B5161"/>
+          </a:solidFill>
+          <a:ln>
+            <a:noFill/>
+          </a:ln>
+          <a:effectLst/>
+        </p:spPr>
+        <p:style>
+          <a:lnRef idx="1">
+            <a:schemeClr val="accent1"/>
+          </a:lnRef>
+          <a:fillRef idx="3">
+            <a:schemeClr val="accent1"/>
+          </a:fillRef>
+          <a:effectRef idx="2">
+            <a:schemeClr val="accent1"/>
+          </a:effectRef>
+          <a:fontRef idx="minor">
+            <a:schemeClr val="lt1"/>
+          </a:fontRef>
+        </p:style>
+        <p:txBody>
+          <a:bodyPr rtlCol="0" anchor="ctr"/>
+          <a:lstStyle/>
+          <a:p>
+            <a:pPr algn="ctr"/>
+          </a:p>
+        </p:txBody>
+      </p:sp>
+      <p:sp>
+        <p:nvSpPr>
+          <p:cNvPr id="8" name="TextBox 7"/>
+          <p:cNvSpPr txBox="1"/>
+          <p:nvPr/>
+        </p:nvSpPr>
+        <p:spPr>
+          <a:xfrm>
+            <a:off x="749808" y="2560320"/>
+            <a:ext cx="3657600" cy="274320"/>
+          </a:xfrm>
+          <a:prstGeom prst="rect">
+            <a:avLst/>
+          </a:prstGeom>
+          <a:noFill/>
+        </p:spPr>
+        <p:txBody>
+          <a:bodyPr wrap="square" anchor="t" lIns="0" rIns="0" tIns="0" bIns="0">
+            <a:spAutoFit/>
+          </a:bodyPr>
+          <a:lstStyle/>
+          <a:p>
+            <a:pPr algn="l">
+              <a:lnSpc>
+                <a:spcPct val="100000"/>
+              </a:lnSpc>
+              <a:spcAft>
+                <a:spcPts val="300"/>
+              </a:spcAft>
+            </a:pPr>
+            <a:r>
+              <a:rPr sz="1150" b="1">
+                <a:solidFill>
+                  <a:srgbClr val="1B3037"/>
+                </a:solidFill>
+                <a:latin typeface="Barlow"/>
+              </a:rPr>
+              <a:t>Query-gated, never hallucinated</a:t>
+            </a:r>
+          </a:p>
+        </p:txBody>
+      </p:sp>
+      <p:sp>
+        <p:nvSpPr>
+          <p:cNvPr id="9" name="TextBox 8"/>
+          <p:cNvSpPr txBox="1"/>
+          <p:nvPr/>
+        </p:nvSpPr>
+        <p:spPr>
+          <a:xfrm>
+            <a:off x="749808" y="2816352"/>
+            <a:ext cx="3657600" cy="320040"/>
+          </a:xfrm>
+          <a:prstGeom prst="rect">
+            <a:avLst/>
+          </a:prstGeom>
+          <a:noFill/>
+        </p:spPr>
+        <p:txBody>
+          <a:bodyPr wrap="square" anchor="t" lIns="0" rIns="0" tIns="0" bIns="0">
+            <a:spAutoFit/>
+          </a:bodyPr>
+          <a:lstStyle/>
+          <a:p>
+            <a:pPr algn="l">
+              <a:lnSpc>
+                <a:spcPct val="100000"/>
+              </a:lnSpc>
+              <a:spcAft>
+                <a:spcPts val="300"/>
+              </a:spcAft>
+            </a:pPr>
+            <a:r>
+              <a:rPr sz="950" b="0">
+                <a:solidFill>
+                  <a:srgbClr val="618793"/>
+                </a:solidFill>
+                <a:latin typeface="DM Sans"/>
+              </a:rPr>
+              <a:t>Every verdict proven by a re-runnable query.</a:t>
+            </a:r>
+          </a:p>
+        </p:txBody>
+      </p:sp>
+      <p:sp>
+        <p:nvSpPr>
+          <p:cNvPr id="10" name="Rectangle 9"/>
+          <p:cNvSpPr/>
+          <p:nvPr/>
+        </p:nvSpPr>
+        <p:spPr>
+          <a:xfrm>
+            <a:off x="548640" y="3182112"/>
+            <a:ext cx="45720" cy="502920"/>
+          </a:xfrm>
+          <a:prstGeom prst="rect">
+            <a:avLst/>
+          </a:prstGeom>
+          <a:solidFill>
+            <a:srgbClr val="1B5161"/>
+          </a:solidFill>
+          <a:ln>
+            <a:noFill/>
+          </a:ln>
+          <a:effectLst/>
+        </p:spPr>
+        <p:style>
+          <a:lnRef idx="1">
+            <a:schemeClr val="accent1"/>
+          </a:lnRef>
+          <a:fillRef idx="3">
+            <a:schemeClr val="accent1"/>
+          </a:fillRef>
+          <a:effectRef idx="2">
+            <a:schemeClr val="accent1"/>
+          </a:effectRef>
+          <a:fontRef idx="minor">
+            <a:schemeClr val="lt1"/>
+          </a:fontRef>
+        </p:style>
+        <p:txBody>
+          <a:bodyPr rtlCol="0" anchor="ctr"/>
+          <a:lstStyle/>
+          <a:p>
+            <a:pPr algn="ctr"/>
+          </a:p>
+        </p:txBody>
+      </p:sp>
+      <p:sp>
+        <p:nvSpPr>
+          <p:cNvPr id="11" name="TextBox 10"/>
+          <p:cNvSpPr txBox="1"/>
+          <p:nvPr/>
+        </p:nvSpPr>
+        <p:spPr>
+          <a:xfrm>
+            <a:off x="749808" y="3163824"/>
+            <a:ext cx="3657600" cy="274320"/>
+          </a:xfrm>
+          <a:prstGeom prst="rect">
+            <a:avLst/>
+          </a:prstGeom>
+          <a:noFill/>
+        </p:spPr>
+        <p:txBody>
+          <a:bodyPr wrap="square" anchor="t" lIns="0" rIns="0" tIns="0" bIns="0">
+            <a:spAutoFit/>
+          </a:bodyPr>
+          <a:lstStyle/>
+          <a:p>
+            <a:pPr algn="l">
+              <a:lnSpc>
+                <a:spcPct val="100000"/>
+              </a:lnSpc>
+              <a:spcAft>
+                <a:spcPts val="300"/>
+              </a:spcAft>
+            </a:pPr>
+            <a:r>
+              <a:rPr sz="1150" b="1">
+                <a:solidFill>
+                  <a:srgbClr val="1B3037"/>
+                </a:solidFill>
+                <a:latin typeface="Barlow"/>
+              </a:rPr>
+              <a:t>Code-aware to the sub-expression</a:t>
+            </a:r>
+          </a:p>
+        </p:txBody>
+      </p:sp>
+      <p:sp>
+        <p:nvSpPr>
+          <p:cNvPr id="12" name="TextBox 11"/>
+          <p:cNvSpPr txBox="1"/>
+          <p:nvPr/>
+        </p:nvSpPr>
+        <p:spPr>
+          <a:xfrm>
+            <a:off x="749808" y="3419856"/>
+            <a:ext cx="3657600" cy="320040"/>
+          </a:xfrm>
+          <a:prstGeom prst="rect">
+            <a:avLst/>
+          </a:prstGeom>
+          <a:noFill/>
+        </p:spPr>
+        <p:txBody>
+          <a:bodyPr wrap="square" anchor="t" lIns="0" rIns="0" tIns="0" bIns="0">
+            <a:spAutoFit/>
+          </a:bodyPr>
+          <a:lstStyle/>
+          <a:p>
+            <a:pPr algn="l">
+              <a:lnSpc>
+                <a:spcPct val="100000"/>
+              </a:lnSpc>
+              <a:spcAft>
+                <a:spcPts val="300"/>
+              </a:spcAft>
+            </a:pPr>
+            <a:r>
+              <a:rPr sz="950" b="0">
+                <a:solidFill>
+                  <a:srgbClr val="618793"/>
+                </a:solidFill>
+                <a:latin typeface="DM Sans"/>
+              </a:rPr>
+              <a:t>Names the exact culprit + the source script.</a:t>
+            </a:r>
+          </a:p>
+        </p:txBody>
+      </p:sp>
+      <p:sp>
+        <p:nvSpPr>
+          <p:cNvPr id="13" name="Rectangle 12"/>
+          <p:cNvSpPr/>
+          <p:nvPr/>
+        </p:nvSpPr>
+        <p:spPr>
+          <a:xfrm>
+            <a:off x="548640" y="3785615"/>
+            <a:ext cx="45720" cy="502920"/>
+          </a:xfrm>
+          <a:prstGeom prst="rect">
+            <a:avLst/>
+          </a:prstGeom>
+          <a:solidFill>
+            <a:srgbClr val="1B5161"/>
+          </a:solidFill>
+          <a:ln>
+            <a:noFill/>
+          </a:ln>
+          <a:effectLst/>
+        </p:spPr>
+        <p:style>
+          <a:lnRef idx="1">
+            <a:schemeClr val="accent1"/>
+          </a:lnRef>
+          <a:fillRef idx="3">
+            <a:schemeClr val="accent1"/>
+          </a:fillRef>
+          <a:effectRef idx="2">
+            <a:schemeClr val="accent1"/>
+          </a:effectRef>
+          <a:fontRef idx="minor">
+            <a:schemeClr val="lt1"/>
+          </a:fontRef>
+        </p:style>
+        <p:txBody>
+          <a:bodyPr rtlCol="0" anchor="ctr"/>
+          <a:lstStyle/>
+          <a:p>
+            <a:pPr algn="ctr"/>
+          </a:p>
+        </p:txBody>
+      </p:sp>
+      <p:sp>
+        <p:nvSpPr>
+          <p:cNvPr id="14" name="TextBox 13"/>
+          <p:cNvSpPr txBox="1"/>
+          <p:nvPr/>
+        </p:nvSpPr>
+        <p:spPr>
+          <a:xfrm>
+            <a:off x="749808" y="3767328"/>
+            <a:ext cx="3657600" cy="274320"/>
+          </a:xfrm>
+          <a:prstGeom prst="rect">
+            <a:avLst/>
+          </a:prstGeom>
+          <a:noFill/>
+        </p:spPr>
+        <p:txBody>
+          <a:bodyPr wrap="square" anchor="t" lIns="0" rIns="0" tIns="0" bIns="0">
+            <a:spAutoFit/>
+          </a:bodyPr>
+          <a:lstStyle/>
+          <a:p>
+            <a:pPr algn="l">
+              <a:lnSpc>
+                <a:spcPct val="100000"/>
+              </a:lnSpc>
+              <a:spcAft>
+                <a:spcPts val="300"/>
+              </a:spcAft>
+            </a:pPr>
+            <a:r>
+              <a:rPr sz="1150" b="1">
+                <a:solidFill>
+                  <a:srgbClr val="1B3037"/>
+                </a:solidFill>
+                <a:latin typeface="Barlow"/>
+              </a:rPr>
+              <a:t>One engine, three surfaces</a:t>
+            </a:r>
+          </a:p>
+        </p:txBody>
+      </p:sp>
+      <p:sp>
+        <p:nvSpPr>
+          <p:cNvPr id="15" name="TextBox 14"/>
+          <p:cNvSpPr txBox="1"/>
+          <p:nvPr/>
+        </p:nvSpPr>
+        <p:spPr>
+          <a:xfrm>
+            <a:off x="749808" y="4023360"/>
+            <a:ext cx="3657600" cy="320040"/>
+          </a:xfrm>
+          <a:prstGeom prst="rect">
+            <a:avLst/>
+          </a:prstGeom>
+          <a:noFill/>
+        </p:spPr>
+        <p:txBody>
+          <a:bodyPr wrap="square" anchor="t" lIns="0" rIns="0" tIns="0" bIns="0">
+            <a:spAutoFit/>
+          </a:bodyPr>
+          <a:lstStyle/>
+          <a:p>
+            <a:pPr algn="l">
+              <a:lnSpc>
+                <a:spcPct val="100000"/>
+              </a:lnSpc>
+              <a:spcAft>
+                <a:spcPts val="300"/>
+              </a:spcAft>
+            </a:pPr>
+            <a:r>
+              <a:rPr sz="950" b="0">
+                <a:solidFill>
+                  <a:srgbClr val="618793"/>
+                </a:solidFill>
+                <a:latin typeface="DM Sans"/>
+              </a:rPr>
+              <a:t>App · CLI · Genie — identical output, det &amp; agentic.</a:t>
+            </a:r>
+          </a:p>
+        </p:txBody>
+      </p:sp>
+      <p:sp>
+        <p:nvSpPr>
+          <p:cNvPr id="16" name="Rectangle 15"/>
+          <p:cNvSpPr/>
+          <p:nvPr/>
+        </p:nvSpPr>
+        <p:spPr>
+          <a:xfrm>
+            <a:off x="548640" y="4389120"/>
+            <a:ext cx="45720" cy="502920"/>
+          </a:xfrm>
+          <a:prstGeom prst="rect">
+            <a:avLst/>
+          </a:prstGeom>
+          <a:solidFill>
+            <a:srgbClr val="1B5161"/>
+          </a:solidFill>
+          <a:ln>
+            <a:noFill/>
+          </a:ln>
+          <a:effectLst/>
+        </p:spPr>
+        <p:style>
+          <a:lnRef idx="1">
+            <a:schemeClr val="accent1"/>
+          </a:lnRef>
+          <a:fillRef idx="3">
+            <a:schemeClr val="accent1"/>
+          </a:fillRef>
+          <a:effectRef idx="2">
+            <a:schemeClr val="accent1"/>
+          </a:effectRef>
+          <a:fontRef idx="minor">
+            <a:schemeClr val="lt1"/>
+          </a:fontRef>
+        </p:style>
+        <p:txBody>
+          <a:bodyPr rtlCol="0" anchor="ctr"/>
+          <a:lstStyle/>
+          <a:p>
+            <a:pPr algn="ctr"/>
+          </a:p>
+        </p:txBody>
+      </p:sp>
+      <p:sp>
+        <p:nvSpPr>
+          <p:cNvPr id="17" name="TextBox 16"/>
+          <p:cNvSpPr txBox="1"/>
+          <p:nvPr/>
+        </p:nvSpPr>
+        <p:spPr>
+          <a:xfrm>
+            <a:off x="749808" y="4370832"/>
+            <a:ext cx="3657600" cy="274320"/>
+          </a:xfrm>
+          <a:prstGeom prst="rect">
+            <a:avLst/>
+          </a:prstGeom>
+          <a:noFill/>
+        </p:spPr>
+        <p:txBody>
+          <a:bodyPr wrap="square" anchor="t" lIns="0" rIns="0" tIns="0" bIns="0">
+            <a:spAutoFit/>
+          </a:bodyPr>
+          <a:lstStyle/>
+          <a:p>
+            <a:pPr algn="l">
+              <a:lnSpc>
+                <a:spcPct val="100000"/>
+              </a:lnSpc>
+              <a:spcAft>
+                <a:spcPts val="300"/>
+              </a:spcAft>
+            </a:pPr>
+            <a:r>
+              <a:rPr sz="1150" b="1">
+                <a:solidFill>
+                  <a:srgbClr val="1B3037"/>
+                </a:solidFill>
+                <a:latin typeface="Barlow"/>
+              </a:rPr>
+              <a:t>Scale-bounded</a:t>
+            </a:r>
+          </a:p>
+        </p:txBody>
+      </p:sp>
+      <p:sp>
+        <p:nvSpPr>
+          <p:cNvPr id="18" name="TextBox 17"/>
+          <p:cNvSpPr txBox="1"/>
+          <p:nvPr/>
+        </p:nvSpPr>
+        <p:spPr>
+          <a:xfrm>
+            <a:off x="749808" y="4626864"/>
+            <a:ext cx="3657600" cy="320040"/>
+          </a:xfrm>
+          <a:prstGeom prst="rect">
+            <a:avLst/>
+          </a:prstGeom>
+          <a:noFill/>
+        </p:spPr>
+        <p:txBody>
+          <a:bodyPr wrap="square" anchor="t" lIns="0" rIns="0" tIns="0" bIns="0">
+            <a:spAutoFit/>
+          </a:bodyPr>
+          <a:lstStyle/>
+          <a:p>
+            <a:pPr algn="l">
+              <a:lnSpc>
+                <a:spcPct val="100000"/>
+              </a:lnSpc>
+              <a:spcAft>
+                <a:spcPts val="300"/>
+              </a:spcAft>
+            </a:pPr>
+            <a:r>
+              <a:rPr sz="950" b="0">
+                <a:solidFill>
+                  <a:srgbClr val="618793"/>
+                </a:solidFill>
+                <a:latin typeface="DM Sans"/>
+              </a:rPr>
+              <a:t>Recon sample + scoped checks; 20M rows, 6 concurrent.</a:t>
+            </a:r>
+          </a:p>
+        </p:txBody>
+      </p:sp>
+      <p:sp>
+        <p:nvSpPr>
+          <p:cNvPr id="19" name="TextBox 18"/>
+          <p:cNvSpPr txBox="1"/>
+          <p:nvPr/>
+        </p:nvSpPr>
+        <p:spPr>
+          <a:xfrm>
+            <a:off x="4709159" y="2103120"/>
+            <a:ext cx="3840480" cy="320040"/>
+          </a:xfrm>
+          <a:prstGeom prst="rect">
+            <a:avLst/>
+          </a:prstGeom>
+          <a:noFill/>
+        </p:spPr>
+        <p:txBody>
+          <a:bodyPr wrap="square" anchor="t" lIns="0" rIns="0" tIns="0" bIns="0">
+            <a:spAutoFit/>
+          </a:bodyPr>
+          <a:lstStyle/>
+          <a:p>
+            <a:pPr algn="l">
+              <a:lnSpc>
+                <a:spcPct val="100000"/>
+              </a:lnSpc>
+              <a:spcAft>
+                <a:spcPts val="300"/>
+              </a:spcAft>
+            </a:pPr>
+            <a:r>
+              <a:rPr sz="1500" b="1">
+                <a:solidFill>
+                  <a:srgbClr val="FF3620"/>
+                </a:solidFill>
+                <a:latin typeface="Barlow"/>
+              </a:rPr>
+              <a:t>Business impact</a:t>
+            </a:r>
+          </a:p>
+        </p:txBody>
+      </p:sp>
+      <p:sp>
+        <p:nvSpPr>
+          <p:cNvPr id="20" name="Rectangle 19"/>
+          <p:cNvSpPr/>
+          <p:nvPr/>
+        </p:nvSpPr>
+        <p:spPr>
+          <a:xfrm>
+            <a:off x="4709159" y="2578608"/>
+            <a:ext cx="45720" cy="502920"/>
+          </a:xfrm>
+          <a:prstGeom prst="rect">
+            <a:avLst/>
+          </a:prstGeom>
+          <a:solidFill>
+            <a:srgbClr val="FF3620"/>
+          </a:solidFill>
+          <a:ln>
+            <a:noFill/>
+          </a:ln>
+          <a:effectLst/>
+        </p:spPr>
+        <p:style>
+          <a:lnRef idx="1">
+            <a:schemeClr val="accent1"/>
+          </a:lnRef>
+          <a:fillRef idx="3">
+            <a:schemeClr val="accent1"/>
+          </a:fillRef>
+          <a:effectRef idx="2">
+            <a:schemeClr val="accent1"/>
+          </a:effectRef>
+          <a:fontRef idx="minor">
+            <a:schemeClr val="lt1"/>
+          </a:fontRef>
+        </p:style>
+        <p:txBody>
+          <a:bodyPr rtlCol="0" anchor="ctr"/>
+          <a:lstStyle/>
+          <a:p>
+            <a:pPr algn="ctr"/>
+          </a:p>
+        </p:txBody>
+      </p:sp>
+      <p:sp>
+        <p:nvSpPr>
+          <p:cNvPr id="21" name="TextBox 20"/>
+          <p:cNvSpPr txBox="1"/>
+          <p:nvPr/>
+        </p:nvSpPr>
+        <p:spPr>
+          <a:xfrm>
+            <a:off x="4910327" y="2560320"/>
+            <a:ext cx="3657600" cy="274320"/>
+          </a:xfrm>
+          <a:prstGeom prst="rect">
+            <a:avLst/>
+          </a:prstGeom>
+          <a:noFill/>
+        </p:spPr>
+        <p:txBody>
+          <a:bodyPr wrap="square" anchor="t" lIns="0" rIns="0" tIns="0" bIns="0">
+            <a:spAutoFit/>
+          </a:bodyPr>
+          <a:lstStyle/>
+          <a:p>
+            <a:pPr algn="l">
+              <a:lnSpc>
+                <a:spcPct val="100000"/>
+              </a:lnSpc>
+              <a:spcAft>
+                <a:spcPts val="300"/>
+              </a:spcAft>
+            </a:pPr>
+            <a:r>
+              <a:rPr sz="1150" b="1">
+                <a:solidFill>
+                  <a:srgbClr val="1B3037"/>
+                </a:solidFill>
+                <a:latin typeface="Barlow"/>
+              </a:rPr>
+              <a:t>Days → minutes per migration</a:t>
+            </a:r>
+          </a:p>
+        </p:txBody>
+      </p:sp>
+      <p:sp>
+        <p:nvSpPr>
+          <p:cNvPr id="22" name="TextBox 21"/>
+          <p:cNvSpPr txBox="1"/>
+          <p:nvPr/>
+        </p:nvSpPr>
+        <p:spPr>
+          <a:xfrm>
+            <a:off x="4910327" y="2816352"/>
+            <a:ext cx="3657600" cy="320040"/>
+          </a:xfrm>
+          <a:prstGeom prst="rect">
+            <a:avLst/>
+          </a:prstGeom>
+          <a:noFill/>
+        </p:spPr>
+        <p:txBody>
+          <a:bodyPr wrap="square" anchor="t" lIns="0" rIns="0" tIns="0" bIns="0">
+            <a:spAutoFit/>
+          </a:bodyPr>
+          <a:lstStyle/>
+          <a:p>
+            <a:pPr algn="l">
+              <a:lnSpc>
+                <a:spcPct val="100000"/>
+              </a:lnSpc>
+              <a:spcAft>
+                <a:spcPts val="300"/>
+              </a:spcAft>
+            </a:pPr>
+            <a:r>
+              <a:rPr sz="950" b="0">
+                <a:solidFill>
+                  <a:srgbClr val="618793"/>
+                </a:solidFill>
+                <a:latin typeface="DM Sans"/>
+              </a:rPr>
+              <a:t>Reviewer-ready root cause for every difference.</a:t>
+            </a:r>
+          </a:p>
+        </p:txBody>
+      </p:sp>
+      <p:sp>
+        <p:nvSpPr>
+          <p:cNvPr id="23" name="Rectangle 22"/>
+          <p:cNvSpPr/>
+          <p:nvPr/>
+        </p:nvSpPr>
+        <p:spPr>
+          <a:xfrm>
+            <a:off x="4709159" y="3182112"/>
+            <a:ext cx="45720" cy="502920"/>
+          </a:xfrm>
+          <a:prstGeom prst="rect">
+            <a:avLst/>
+          </a:prstGeom>
+          <a:solidFill>
+            <a:srgbClr val="FF3620"/>
+          </a:solidFill>
+          <a:ln>
+            <a:noFill/>
+          </a:ln>
+          <a:effectLst/>
+        </p:spPr>
+        <p:style>
+          <a:lnRef idx="1">
+            <a:schemeClr val="accent1"/>
+          </a:lnRef>
+          <a:fillRef idx="3">
+            <a:schemeClr val="accent1"/>
+          </a:fillRef>
+          <a:effectRef idx="2">
+            <a:schemeClr val="accent1"/>
+          </a:effectRef>
+          <a:fontRef idx="minor">
+            <a:schemeClr val="lt1"/>
+          </a:fontRef>
+        </p:style>
+        <p:txBody>
+          <a:bodyPr rtlCol="0" anchor="ctr"/>
+          <a:lstStyle/>
+          <a:p>
+            <a:pPr algn="ctr"/>
+          </a:p>
+        </p:txBody>
+      </p:sp>
+      <p:sp>
+        <p:nvSpPr>
+          <p:cNvPr id="24" name="TextBox 23"/>
+          <p:cNvSpPr txBox="1"/>
+          <p:nvPr/>
+        </p:nvSpPr>
+        <p:spPr>
+          <a:xfrm>
+            <a:off x="4910327" y="3163824"/>
+            <a:ext cx="3657600" cy="274320"/>
+          </a:xfrm>
+          <a:prstGeom prst="rect">
+            <a:avLst/>
+          </a:prstGeom>
+          <a:noFill/>
+        </p:spPr>
+        <p:txBody>
+          <a:bodyPr wrap="square" anchor="t" lIns="0" rIns="0" tIns="0" bIns="0">
+            <a:spAutoFit/>
+          </a:bodyPr>
+          <a:lstStyle/>
+          <a:p>
+            <a:pPr algn="l">
+              <a:lnSpc>
+                <a:spcPct val="100000"/>
+              </a:lnSpc>
+              <a:spcAft>
+                <a:spcPts val="300"/>
+              </a:spcAft>
+            </a:pPr>
+            <a:r>
+              <a:rPr sz="1150" b="1">
+                <a:solidFill>
+                  <a:srgbClr val="1B3037"/>
+                </a:solidFill>
+                <a:latin typeface="Barlow"/>
+              </a:rPr>
+              <a:t>Fits every customer</a:t>
+            </a:r>
+          </a:p>
+        </p:txBody>
+      </p:sp>
+      <p:sp>
+        <p:nvSpPr>
+          <p:cNvPr id="25" name="TextBox 24"/>
+          <p:cNvSpPr txBox="1"/>
+          <p:nvPr/>
+        </p:nvSpPr>
+        <p:spPr>
+          <a:xfrm>
+            <a:off x="4910327" y="3419856"/>
+            <a:ext cx="3657600" cy="320040"/>
+          </a:xfrm>
+          <a:prstGeom prst="rect">
+            <a:avLst/>
+          </a:prstGeom>
+          <a:noFill/>
+        </p:spPr>
+        <p:txBody>
+          <a:bodyPr wrap="square" anchor="t" lIns="0" rIns="0" tIns="0" bIns="0">
+            <a:spAutoFit/>
+          </a:bodyPr>
+          <a:lstStyle/>
+          <a:p>
+            <a:pPr algn="l">
+              <a:lnSpc>
+                <a:spcPct val="100000"/>
+              </a:lnSpc>
+              <a:spcAft>
+                <a:spcPts val="300"/>
+              </a:spcAft>
+            </a:pPr>
+            <a:r>
+              <a:rPr sz="950" b="0">
+                <a:solidFill>
+                  <a:srgbClr val="618793"/>
+                </a:solidFill>
+                <a:latin typeface="DM Sans"/>
+              </a:rPr>
+              <a:t>Deterministic for Genie-restricted; agentic where allowed.</a:t>
+            </a:r>
+          </a:p>
+        </p:txBody>
+      </p:sp>
+      <p:sp>
+        <p:nvSpPr>
+          <p:cNvPr id="26" name="Rectangle 25"/>
+          <p:cNvSpPr/>
+          <p:nvPr/>
+        </p:nvSpPr>
+        <p:spPr>
+          <a:xfrm>
+            <a:off x="4709159" y="3785615"/>
+            <a:ext cx="45720" cy="502920"/>
+          </a:xfrm>
+          <a:prstGeom prst="rect">
+            <a:avLst/>
+          </a:prstGeom>
+          <a:solidFill>
+            <a:srgbClr val="FF3620"/>
+          </a:solidFill>
+          <a:ln>
+            <a:noFill/>
+          </a:ln>
+          <a:effectLst/>
+        </p:spPr>
+        <p:style>
+          <a:lnRef idx="1">
+            <a:schemeClr val="accent1"/>
+          </a:lnRef>
+          <a:fillRef idx="3">
+            <a:schemeClr val="accent1"/>
+          </a:fillRef>
+          <a:effectRef idx="2">
+            <a:schemeClr val="accent1"/>
+          </a:effectRef>
+          <a:fontRef idx="minor">
+            <a:schemeClr val="lt1"/>
+          </a:fontRef>
+        </p:style>
+        <p:txBody>
+          <a:bodyPr rtlCol="0" anchor="ctr"/>
+          <a:lstStyle/>
+          <a:p>
+            <a:pPr algn="ctr"/>
+          </a:p>
+        </p:txBody>
+      </p:sp>
+      <p:sp>
+        <p:nvSpPr>
+          <p:cNvPr id="27" name="TextBox 26"/>
+          <p:cNvSpPr txBox="1"/>
+          <p:nvPr/>
+        </p:nvSpPr>
+        <p:spPr>
+          <a:xfrm>
+            <a:off x="4910327" y="3767328"/>
+            <a:ext cx="3657600" cy="274320"/>
+          </a:xfrm>
+          <a:prstGeom prst="rect">
+            <a:avLst/>
+          </a:prstGeom>
+          <a:noFill/>
+        </p:spPr>
+        <p:txBody>
+          <a:bodyPr wrap="square" anchor="t" lIns="0" rIns="0" tIns="0" bIns="0">
+            <a:spAutoFit/>
+          </a:bodyPr>
+          <a:lstStyle/>
+          <a:p>
+            <a:pPr algn="l">
+              <a:lnSpc>
+                <a:spcPct val="100000"/>
+              </a:lnSpc>
+              <a:spcAft>
+                <a:spcPts val="300"/>
+              </a:spcAft>
+            </a:pPr>
+            <a:r>
+              <a:rPr sz="1150" b="1">
+                <a:solidFill>
+                  <a:srgbClr val="1B3037"/>
+                </a:solidFill>
+                <a:latin typeface="Barlow"/>
+              </a:rPr>
+              <a:t>Auditable &amp; trusted</a:t>
+            </a:r>
+          </a:p>
+        </p:txBody>
+      </p:sp>
+      <p:sp>
+        <p:nvSpPr>
+          <p:cNvPr id="28" name="TextBox 27"/>
+          <p:cNvSpPr txBox="1"/>
+          <p:nvPr/>
+        </p:nvSpPr>
+        <p:spPr>
+          <a:xfrm>
+            <a:off x="4910327" y="4023360"/>
+            <a:ext cx="3657600" cy="320040"/>
+          </a:xfrm>
+          <a:prstGeom prst="rect">
+            <a:avLst/>
+          </a:prstGeom>
+          <a:noFill/>
+        </p:spPr>
+        <p:txBody>
+          <a:bodyPr wrap="square" anchor="t" lIns="0" rIns="0" tIns="0" bIns="0">
+            <a:spAutoFit/>
+          </a:bodyPr>
+          <a:lstStyle/>
+          <a:p>
+            <a:pPr algn="l">
+              <a:lnSpc>
+                <a:spcPct val="100000"/>
+              </a:lnSpc>
+              <a:spcAft>
+                <a:spcPts val="300"/>
+              </a:spcAft>
+            </a:pPr>
+            <a:r>
+              <a:rPr sz="950" b="0">
+                <a:solidFill>
+                  <a:srgbClr val="618793"/>
+                </a:solidFill>
+                <a:latin typeface="DM Sans"/>
+              </a:rPr>
+              <a:t>Append-only audit trail; a query behind every verdict.</a:t>
+            </a:r>
+          </a:p>
+        </p:txBody>
+      </p:sp>
+      <p:sp>
+        <p:nvSpPr>
+          <p:cNvPr id="29" name="Rectangle 28"/>
+          <p:cNvSpPr/>
+          <p:nvPr/>
+        </p:nvSpPr>
+        <p:spPr>
+          <a:xfrm>
+            <a:off x="4709159" y="4389120"/>
+            <a:ext cx="45720" cy="502920"/>
+          </a:xfrm>
+          <a:prstGeom prst="rect">
+            <a:avLst/>
+          </a:prstGeom>
+          <a:solidFill>
+            <a:srgbClr val="FF3620"/>
+          </a:solidFill>
+          <a:ln>
+            <a:noFill/>
+          </a:ln>
+          <a:effectLst/>
+        </p:spPr>
+        <p:style>
+          <a:lnRef idx="1">
+            <a:schemeClr val="accent1"/>
+          </a:lnRef>
+          <a:fillRef idx="3">
+            <a:schemeClr val="accent1"/>
+          </a:fillRef>
+          <a:effectRef idx="2">
+            <a:schemeClr val="accent1"/>
+          </a:effectRef>
+          <a:fontRef idx="minor">
+            <a:schemeClr val="lt1"/>
+          </a:fontRef>
+        </p:style>
+        <p:txBody>
+          <a:bodyPr rtlCol="0" anchor="ctr"/>
+          <a:lstStyle/>
+          <a:p>
+            <a:pPr algn="ctr"/>
+          </a:p>
+        </p:txBody>
+      </p:sp>
+      <p:sp>
+        <p:nvSpPr>
+          <p:cNvPr id="30" name="TextBox 29"/>
+          <p:cNvSpPr txBox="1"/>
+          <p:nvPr/>
+        </p:nvSpPr>
+        <p:spPr>
+          <a:xfrm>
+            <a:off x="4910327" y="4370832"/>
+            <a:ext cx="3657600" cy="274320"/>
+          </a:xfrm>
+          <a:prstGeom prst="rect">
+            <a:avLst/>
+          </a:prstGeom>
+          <a:noFill/>
+        </p:spPr>
+        <p:txBody>
+          <a:bodyPr wrap="square" anchor="t" lIns="0" rIns="0" tIns="0" bIns="0">
+            <a:spAutoFit/>
+          </a:bodyPr>
+          <a:lstStyle/>
+          <a:p>
+            <a:pPr algn="l">
+              <a:lnSpc>
+                <a:spcPct val="100000"/>
+              </a:lnSpc>
+              <a:spcAft>
+                <a:spcPts val="300"/>
+              </a:spcAft>
+            </a:pPr>
+            <a:r>
+              <a:rPr sz="1150" b="1">
+                <a:solidFill>
+                  <a:srgbClr val="1B3037"/>
+                </a:solidFill>
+                <a:latin typeface="Barlow"/>
+              </a:rPr>
+              <a:t>Reusable asset</a:t>
+            </a:r>
+          </a:p>
+        </p:txBody>
+      </p:sp>
+      <p:sp>
+        <p:nvSpPr>
+          <p:cNvPr id="31" name="TextBox 30"/>
+          <p:cNvSpPr txBox="1"/>
+          <p:nvPr/>
+        </p:nvSpPr>
+        <p:spPr>
+          <a:xfrm>
+            <a:off x="4910327" y="4626864"/>
+            <a:ext cx="3657600" cy="320040"/>
+          </a:xfrm>
+          <a:prstGeom prst="rect">
+            <a:avLst/>
+          </a:prstGeom>
+          <a:noFill/>
+        </p:spPr>
+        <p:txBody>
+          <a:bodyPr wrap="square" anchor="t" lIns="0" rIns="0" tIns="0" bIns="0">
+            <a:spAutoFit/>
+          </a:bodyPr>
+          <a:lstStyle/>
+          <a:p>
+            <a:pPr algn="l">
+              <a:lnSpc>
+                <a:spcPct val="100000"/>
+              </a:lnSpc>
+              <a:spcAft>
+                <a:spcPts val="300"/>
+              </a:spcAft>
+            </a:pPr>
+            <a:r>
+              <a:rPr sz="950" b="0">
+                <a:solidFill>
+                  <a:srgbClr val="618793"/>
+                </a:solidFill>
+                <a:latin typeface="DM Sans"/>
+              </a:rPr>
+              <a:t>Dialect-agnostic KBs + harness = program-wide capability.</a:t>
+            </a:r>
+          </a:p>
+        </p:txBody>
+      </p:sp>
+    </p:spTree>
+  </p:cSld>
+  <p:clrMapOvr>
+    <a:masterClrMapping/>
+  </p:clrMapOvr>
+</p:sld>
+</file>
+
 <file path=ppt/slides/slide2.xml><?xml version="1.0" encoding="utf-8"?>
 <p:sld xmlns:a="http://schemas.openxmlformats.org/drawingml/2006/main" xmlns:p="http://schemas.openxmlformats.org/presentationml/2006/main" xmlns:r="http://schemas.openxmlformats.org/officeDocument/2006/relationships">
   <p:cSld>
@@ -11184,8 +14582,8 @@
         </p:nvSpPr>
         <p:spPr>
           <a:xfrm>
-            <a:off x="548640" y="3730752"/>
-            <a:ext cx="1371600" cy="274320"/>
+            <a:off x="548640" y="3712463"/>
+            <a:ext cx="1417320" cy="274320"/>
           </a:xfrm>
           <a:prstGeom prst="rect">
             <a:avLst/>
@@ -11226,8 +14624,8 @@
         </p:nvSpPr>
         <p:spPr>
           <a:xfrm>
-            <a:off x="1965960" y="3730752"/>
-            <a:ext cx="1371600" cy="274320"/>
+            <a:off x="1965960" y="3712463"/>
+            <a:ext cx="1417320" cy="274320"/>
           </a:xfrm>
           <a:prstGeom prst="rect">
             <a:avLst/>
@@ -11268,8 +14666,8 @@
         </p:nvSpPr>
         <p:spPr>
           <a:xfrm>
-            <a:off x="3246120" y="3730752"/>
-            <a:ext cx="1371600" cy="274320"/>
+            <a:off x="3246120" y="3712463"/>
+            <a:ext cx="1417320" cy="274320"/>
           </a:xfrm>
           <a:prstGeom prst="rect">
             <a:avLst/>
@@ -11310,8 +14708,8 @@
         </p:nvSpPr>
         <p:spPr>
           <a:xfrm>
-            <a:off x="4709160" y="3730752"/>
-            <a:ext cx="1371600" cy="274320"/>
+            <a:off x="4709160" y="3712463"/>
+            <a:ext cx="1417320" cy="274320"/>
           </a:xfrm>
           <a:prstGeom prst="rect">
             <a:avLst/>
@@ -11352,8 +14750,8 @@
         </p:nvSpPr>
         <p:spPr>
           <a:xfrm>
-            <a:off x="5989320" y="3730752"/>
-            <a:ext cx="1371600" cy="274320"/>
+            <a:off x="5989320" y="3712463"/>
+            <a:ext cx="1417320" cy="274320"/>
           </a:xfrm>
           <a:prstGeom prst="rect">
             <a:avLst/>
@@ -11394,8 +14792,8 @@
         </p:nvSpPr>
         <p:spPr>
           <a:xfrm>
-            <a:off x="7315200" y="3730752"/>
-            <a:ext cx="1371600" cy="274320"/>
+            <a:off x="7315200" y="3712463"/>
+            <a:ext cx="1417320" cy="274320"/>
           </a:xfrm>
           <a:prstGeom prst="rect">
             <a:avLst/>
@@ -11436,8 +14834,8 @@
         </p:nvSpPr>
         <p:spPr>
           <a:xfrm>
-            <a:off x="548640" y="4059936"/>
-            <a:ext cx="1371600" cy="274320"/>
+            <a:off x="548640" y="4023359"/>
+            <a:ext cx="1417320" cy="274320"/>
           </a:xfrm>
           <a:prstGeom prst="rect">
             <a:avLst/>
@@ -11478,8 +14876,8 @@
         </p:nvSpPr>
         <p:spPr>
           <a:xfrm>
-            <a:off x="1965960" y="4059936"/>
-            <a:ext cx="1371600" cy="274320"/>
+            <a:off x="1965960" y="4023359"/>
+            <a:ext cx="1417320" cy="274320"/>
           </a:xfrm>
           <a:prstGeom prst="rect">
             <a:avLst/>
@@ -11520,8 +14918,8 @@
         </p:nvSpPr>
         <p:spPr>
           <a:xfrm>
-            <a:off x="3246120" y="4059936"/>
-            <a:ext cx="1371600" cy="274320"/>
+            <a:off x="3246120" y="4023359"/>
+            <a:ext cx="1417320" cy="274320"/>
           </a:xfrm>
           <a:prstGeom prst="rect">
             <a:avLst/>
@@ -11562,8 +14960,8 @@
         </p:nvSpPr>
         <p:spPr>
           <a:xfrm>
-            <a:off x="4709160" y="4059936"/>
-            <a:ext cx="1371600" cy="274320"/>
+            <a:off x="4709160" y="4023359"/>
+            <a:ext cx="1417320" cy="274320"/>
           </a:xfrm>
           <a:prstGeom prst="rect">
             <a:avLst/>
@@ -11604,8 +15002,8 @@
         </p:nvSpPr>
         <p:spPr>
           <a:xfrm>
-            <a:off x="5989320" y="4059936"/>
-            <a:ext cx="1371600" cy="274320"/>
+            <a:off x="5989320" y="4023359"/>
+            <a:ext cx="1417320" cy="274320"/>
           </a:xfrm>
           <a:prstGeom prst="rect">
             <a:avLst/>
@@ -11646,8 +15044,8 @@
         </p:nvSpPr>
         <p:spPr>
           <a:xfrm>
-            <a:off x="7315200" y="4059936"/>
-            <a:ext cx="1371600" cy="274320"/>
+            <a:off x="7315200" y="4023359"/>
+            <a:ext cx="1417320" cy="274320"/>
           </a:xfrm>
           <a:prstGeom prst="rect">
             <a:avLst/>
@@ -11675,7 +15073,7 @@
                 </a:solidFill>
                 <a:latin typeface="DM Sans"/>
               </a:rPr>
-              <a:t>— (det shown)</a:t>
+              <a:t>— (det)</a:t>
             </a:r>
           </a:p>
         </p:txBody>
@@ -11688,36 +15086,288 @@
         </p:nvSpPr>
         <p:spPr>
           <a:xfrm>
-            <a:off x="548640" y="4443984"/>
-            <a:ext cx="8046720" cy="548640"/>
-          </a:xfrm>
-          <a:prstGeom prst="rect">
-            <a:avLst/>
-          </a:prstGeom>
-          <a:noFill/>
-        </p:spPr>
-        <p:txBody>
-          <a:bodyPr wrap="square" anchor="t" lIns="0" rIns="0" tIns="0" bIns="0">
-            <a:spAutoFit/>
-          </a:bodyPr>
-          <a:lstStyle/>
-          <a:p>
-            <a:pPr algn="l">
-              <a:lnSpc>
-                <a:spcPct val="105000"/>
-              </a:lnSpc>
-              <a:spcAft>
-                <a:spcPts val="300"/>
-              </a:spcAft>
-            </a:pPr>
-            <a:r>
-              <a:rPr sz="850" b="0">
+            <a:off x="548640" y="4334255"/>
+            <a:ext cx="1417320" cy="274320"/>
+          </a:xfrm>
+          <a:prstGeom prst="rect">
+            <a:avLst/>
+          </a:prstGeom>
+          <a:noFill/>
+        </p:spPr>
+        <p:txBody>
+          <a:bodyPr wrap="square" anchor="t" lIns="0" rIns="0" tIns="0" bIns="0">
+            <a:spAutoFit/>
+          </a:bodyPr>
+          <a:lstStyle/>
+          <a:p>
+            <a:pPr algn="l">
+              <a:lnSpc>
+                <a:spcPct val="100000"/>
+              </a:lnSpc>
+              <a:spcAft>
+                <a:spcPts val="300"/>
+              </a:spcAft>
+            </a:pPr>
+            <a:r>
+              <a:rPr sz="950" b="1">
+                <a:solidFill>
+                  <a:srgbClr val="FF3620"/>
+                </a:solidFill>
+                <a:latin typeface="DM Sans"/>
+              </a:rPr>
+              <a:t>50,000,000 (wide)</a:t>
+            </a:r>
+          </a:p>
+        </p:txBody>
+      </p:sp>
+      <p:sp>
+        <p:nvSpPr>
+          <p:cNvPr id="39" name="TextBox 38"/>
+          <p:cNvSpPr txBox="1"/>
+          <p:nvPr/>
+        </p:nvSpPr>
+        <p:spPr>
+          <a:xfrm>
+            <a:off x="1965960" y="4334255"/>
+            <a:ext cx="1417320" cy="274320"/>
+          </a:xfrm>
+          <a:prstGeom prst="rect">
+            <a:avLst/>
+          </a:prstGeom>
+          <a:noFill/>
+        </p:spPr>
+        <p:txBody>
+          <a:bodyPr wrap="square" anchor="t" lIns="0" rIns="0" tIns="0" bIns="0">
+            <a:spAutoFit/>
+          </a:bodyPr>
+          <a:lstStyle/>
+          <a:p>
+            <a:pPr algn="l">
+              <a:lnSpc>
+                <a:spcPct val="100000"/>
+              </a:lnSpc>
+              <a:spcAft>
+                <a:spcPts val="300"/>
+              </a:spcAft>
+            </a:pPr>
+            <a:r>
+              <a:rPr sz="950" b="1">
+                <a:solidFill>
+                  <a:srgbClr val="FF3620"/>
+                </a:solidFill>
+                <a:latin typeface="DM Sans"/>
+              </a:rPr>
+              <a:t>8.5 GB / table</a:t>
+            </a:r>
+          </a:p>
+        </p:txBody>
+      </p:sp>
+      <p:sp>
+        <p:nvSpPr>
+          <p:cNvPr id="40" name="TextBox 39"/>
+          <p:cNvSpPr txBox="1"/>
+          <p:nvPr/>
+        </p:nvSpPr>
+        <p:spPr>
+          <a:xfrm>
+            <a:off x="3246120" y="4334255"/>
+            <a:ext cx="1417320" cy="274320"/>
+          </a:xfrm>
+          <a:prstGeom prst="rect">
+            <a:avLst/>
+          </a:prstGeom>
+          <a:noFill/>
+        </p:spPr>
+        <p:txBody>
+          <a:bodyPr wrap="square" anchor="t" lIns="0" rIns="0" tIns="0" bIns="0">
+            <a:spAutoFit/>
+          </a:bodyPr>
+          <a:lstStyle/>
+          <a:p>
+            <a:pPr algn="l">
+              <a:lnSpc>
+                <a:spcPct val="100000"/>
+              </a:lnSpc>
+              <a:spcAft>
+                <a:spcPts val="300"/>
+              </a:spcAft>
+            </a:pPr>
+            <a:r>
+              <a:rPr sz="950" b="1">
+                <a:solidFill>
+                  <a:srgbClr val="FF3620"/>
+                </a:solidFill>
+                <a:latin typeface="DM Sans"/>
+              </a:rPr>
+              <a:t>~17 GB</a:t>
+            </a:r>
+          </a:p>
+        </p:txBody>
+      </p:sp>
+      <p:sp>
+        <p:nvSpPr>
+          <p:cNvPr id="41" name="TextBox 40"/>
+          <p:cNvSpPr txBox="1"/>
+          <p:nvPr/>
+        </p:nvSpPr>
+        <p:spPr>
+          <a:xfrm>
+            <a:off x="4709160" y="4334255"/>
+            <a:ext cx="1417320" cy="274320"/>
+          </a:xfrm>
+          <a:prstGeom prst="rect">
+            <a:avLst/>
+          </a:prstGeom>
+          <a:noFill/>
+        </p:spPr>
+        <p:txBody>
+          <a:bodyPr wrap="square" anchor="t" lIns="0" rIns="0" tIns="0" bIns="0">
+            <a:spAutoFit/>
+          </a:bodyPr>
+          <a:lstStyle/>
+          <a:p>
+            <a:pPr algn="l">
+              <a:lnSpc>
+                <a:spcPct val="100000"/>
+              </a:lnSpc>
+              <a:spcAft>
+                <a:spcPts val="300"/>
+              </a:spcAft>
+            </a:pPr>
+            <a:r>
+              <a:rPr sz="950" b="1">
+                <a:solidFill>
+                  <a:srgbClr val="FF3620"/>
+                </a:solidFill>
+                <a:latin typeface="DM Sans"/>
+              </a:rPr>
+              <a:t>1,637 s</a:t>
+            </a:r>
+          </a:p>
+        </p:txBody>
+      </p:sp>
+      <p:sp>
+        <p:nvSpPr>
+          <p:cNvPr id="42" name="TextBox 41"/>
+          <p:cNvSpPr txBox="1"/>
+          <p:nvPr/>
+        </p:nvSpPr>
+        <p:spPr>
+          <a:xfrm>
+            <a:off x="5989320" y="4334255"/>
+            <a:ext cx="1417320" cy="274320"/>
+          </a:xfrm>
+          <a:prstGeom prst="rect">
+            <a:avLst/>
+          </a:prstGeom>
+          <a:noFill/>
+        </p:spPr>
+        <p:txBody>
+          <a:bodyPr wrap="square" anchor="t" lIns="0" rIns="0" tIns="0" bIns="0">
+            <a:spAutoFit/>
+          </a:bodyPr>
+          <a:lstStyle/>
+          <a:p>
+            <a:pPr algn="l">
+              <a:lnSpc>
+                <a:spcPct val="100000"/>
+              </a:lnSpc>
+              <a:spcAft>
+                <a:spcPts val="300"/>
+              </a:spcAft>
+            </a:pPr>
+            <a:r>
+              <a:rPr sz="950" b="1">
+                <a:solidFill>
+                  <a:srgbClr val="FF3620"/>
+                </a:solidFill>
+                <a:latin typeface="DM Sans"/>
+              </a:rPr>
+              <a:t>~97 s</a:t>
+            </a:r>
+          </a:p>
+        </p:txBody>
+      </p:sp>
+      <p:sp>
+        <p:nvSpPr>
+          <p:cNvPr id="43" name="TextBox 42"/>
+          <p:cNvSpPr txBox="1"/>
+          <p:nvPr/>
+        </p:nvSpPr>
+        <p:spPr>
+          <a:xfrm>
+            <a:off x="7315200" y="4334255"/>
+            <a:ext cx="1417320" cy="274320"/>
+          </a:xfrm>
+          <a:prstGeom prst="rect">
+            <a:avLst/>
+          </a:prstGeom>
+          <a:noFill/>
+        </p:spPr>
+        <p:txBody>
+          <a:bodyPr wrap="square" anchor="t" lIns="0" rIns="0" tIns="0" bIns="0">
+            <a:spAutoFit/>
+          </a:bodyPr>
+          <a:lstStyle/>
+          <a:p>
+            <a:pPr algn="l">
+              <a:lnSpc>
+                <a:spcPct val="100000"/>
+              </a:lnSpc>
+              <a:spcAft>
+                <a:spcPts val="300"/>
+              </a:spcAft>
+            </a:pPr>
+            <a:r>
+              <a:rPr sz="950" b="1">
+                <a:solidFill>
+                  <a:srgbClr val="FF3620"/>
+                </a:solidFill>
+                <a:latin typeface="DM Sans"/>
+              </a:rPr>
+              <a:t>— (det)</a:t>
+            </a:r>
+          </a:p>
+        </p:txBody>
+      </p:sp>
+      <p:sp>
+        <p:nvSpPr>
+          <p:cNvPr id="44" name="TextBox 43"/>
+          <p:cNvSpPr txBox="1"/>
+          <p:nvPr/>
+        </p:nvSpPr>
+        <p:spPr>
+          <a:xfrm>
+            <a:off x="548640" y="4736592"/>
+            <a:ext cx="8046720" cy="365760"/>
+          </a:xfrm>
+          <a:prstGeom prst="rect">
+            <a:avLst/>
+          </a:prstGeom>
+          <a:noFill/>
+        </p:spPr>
+        <p:txBody>
+          <a:bodyPr wrap="square" anchor="t" lIns="0" rIns="0" tIns="0" bIns="0">
+            <a:spAutoFit/>
+          </a:bodyPr>
+          <a:lstStyle/>
+          <a:p>
+            <a:pPr algn="l">
+              <a:lnSpc>
+                <a:spcPct val="102000"/>
+              </a:lnSpc>
+              <a:spcAft>
+                <a:spcPts val="300"/>
+              </a:spcAft>
+            </a:pPr>
+            <a:r>
+              <a:rPr sz="800" b="0">
                 <a:solidFill>
                   <a:srgbClr val="618793"/>
                 </a:solidFill>
                 <a:latin typeface="DM Sans"/>
               </a:rPr>
-              <a:t>Stored = Delta/Parquet bytes (DESCRIBE DETAIL); low-cardinality demo columns compress ~20–30× (logical = the GB figure). RCA runs on the bounded recon sample — 10× data grows RCA ~2×, reconcile ~3.2×. A true TB run needs wider, higher-cardinality rows (raise N in build_retail_beds.py) — flagged follow-up, reproducible from the same scripts.</a:t>
+              <a:t>Prod-volume proof (bottom row): 50M WIDE high-cardinality rows = 8.5 GB stored/table (~17 GB) — reconcile 27 min, RCA ~97 s. RCA runs on the bounded recon sample, so it stays flat as volume grows. Stored = DESCRIBE DETAIL; low-cardinality demo cols compress ~20–30× (logical = GB column).</a:t>
             </a:r>
           </a:p>
         </p:txBody>
@@ -11865,7 +15515,7 @@
                 </a:solidFill>
                 <a:latin typeface="Barlow"/>
               </a:rPr>
-              <a:t>WHY IT MATTERS</a:t>
+              <a:t>VALIDATION · TEST COVERAGE</a:t>
             </a:r>
           </a:p>
         </p:txBody>
@@ -11901,75 +15551,35 @@
               </a:spcAft>
             </a:pPr>
             <a:r>
-              <a:rPr sz="2300" b="1">
+              <a:rPr sz="2200" b="1">
                 <a:solidFill>
                   <a:srgbClr val="1B3037"/>
                 </a:solidFill>
                 <a:latin typeface="Barlow"/>
               </a:rPr>
-              <a:t>Technical rigor that converts into migration throughput</a:t>
-            </a:r>
-          </a:p>
-        </p:txBody>
-      </p:sp>
-      <p:sp>
-        <p:nvSpPr>
-          <p:cNvPr id="6" name="TextBox 5"/>
-          <p:cNvSpPr txBox="1"/>
-          <p:nvPr/>
-        </p:nvSpPr>
-        <p:spPr>
-          <a:xfrm>
-            <a:off x="548640" y="2103120"/>
-            <a:ext cx="3840480" cy="320040"/>
-          </a:xfrm>
-          <a:prstGeom prst="rect">
-            <a:avLst/>
-          </a:prstGeom>
-          <a:noFill/>
-        </p:spPr>
-        <p:txBody>
-          <a:bodyPr wrap="square" anchor="t" lIns="0" rIns="0" tIns="0" bIns="0">
-            <a:spAutoFit/>
-          </a:bodyPr>
-          <a:lstStyle/>
-          <a:p>
-            <a:pPr algn="l">
-              <a:lnSpc>
-                <a:spcPct val="100000"/>
-              </a:lnSpc>
-              <a:spcAft>
-                <a:spcPts val="300"/>
-              </a:spcAft>
-            </a:pPr>
-            <a:r>
-              <a:rPr sz="1500" b="1">
-                <a:solidFill>
-                  <a:srgbClr val="1B5161"/>
-                </a:solidFill>
-                <a:latin typeface="Barlow"/>
-              </a:rPr>
-              <a:t>Technical impact</a:t>
-            </a:r>
-          </a:p>
-        </p:txBody>
-      </p:sp>
-      <p:sp>
-        <p:nvSpPr>
-          <p:cNvPr id="7" name="Rectangle 6"/>
+              <a:t>Tested across every capability — and every entry point</a:t>
+            </a:r>
+          </a:p>
+        </p:txBody>
+      </p:sp>
+      <p:sp>
+        <p:nvSpPr>
+          <p:cNvPr id="6" name="Rounded Rectangle 5"/>
           <p:cNvSpPr/>
           <p:nvPr/>
         </p:nvSpPr>
         <p:spPr>
           <a:xfrm>
-            <a:off x="548640" y="2578608"/>
-            <a:ext cx="45720" cy="502920"/>
-          </a:xfrm>
-          <a:prstGeom prst="rect">
-            <a:avLst/>
+            <a:off x="548640" y="1828800"/>
+            <a:ext cx="1874519" cy="914400"/>
+          </a:xfrm>
+          <a:prstGeom prst="roundRect">
+            <a:avLst>
+              <a:gd name="adj" fmla="val 8000"/>
+            </a:avLst>
           </a:prstGeom>
           <a:solidFill>
-            <a:srgbClr val="1B5161"/>
+            <a:srgbClr val="F3F6F7"/>
           </a:solidFill>
           <a:ln>
             <a:noFill/>
@@ -12000,104 +15610,125 @@
       </p:sp>
       <p:sp>
         <p:nvSpPr>
+          <p:cNvPr id="7" name="TextBox 6"/>
+          <p:cNvSpPr txBox="1"/>
+          <p:nvPr/>
+        </p:nvSpPr>
+        <p:spPr>
+          <a:xfrm>
+            <a:off x="548640" y="1920240"/>
+            <a:ext cx="1874519" cy="457200"/>
+          </a:xfrm>
+          <a:prstGeom prst="rect">
+            <a:avLst/>
+          </a:prstGeom>
+          <a:noFill/>
+        </p:spPr>
+        <p:txBody>
+          <a:bodyPr wrap="square" anchor="ctr" lIns="0" rIns="0" tIns="0" bIns="0">
+            <a:spAutoFit/>
+          </a:bodyPr>
+          <a:lstStyle/>
+          <a:p>
+            <a:pPr algn="ctr">
+              <a:lnSpc>
+                <a:spcPct val="100000"/>
+              </a:lnSpc>
+              <a:spcAft>
+                <a:spcPts val="300"/>
+              </a:spcAft>
+            </a:pPr>
+            <a:r>
+              <a:rPr sz="2600" b="1">
+                <a:solidFill>
+                  <a:srgbClr val="1B3037"/>
+                </a:solidFill>
+                <a:latin typeface="Barlow"/>
+              </a:rPr>
+              <a:t>3</a:t>
+            </a:r>
+          </a:p>
+        </p:txBody>
+      </p:sp>
+      <p:sp>
+        <p:nvSpPr>
           <p:cNvPr id="8" name="TextBox 7"/>
           <p:cNvSpPr txBox="1"/>
           <p:nvPr/>
         </p:nvSpPr>
         <p:spPr>
           <a:xfrm>
-            <a:off x="749808" y="2560320"/>
-            <a:ext cx="3657600" cy="274320"/>
-          </a:xfrm>
-          <a:prstGeom prst="rect">
-            <a:avLst/>
-          </a:prstGeom>
-          <a:noFill/>
-        </p:spPr>
-        <p:txBody>
-          <a:bodyPr wrap="square" anchor="t" lIns="0" rIns="0" tIns="0" bIns="0">
-            <a:spAutoFit/>
-          </a:bodyPr>
-          <a:lstStyle/>
-          <a:p>
-            <a:pPr algn="l">
-              <a:lnSpc>
-                <a:spcPct val="100000"/>
-              </a:lnSpc>
-              <a:spcAft>
-                <a:spcPts val="300"/>
-              </a:spcAft>
-            </a:pPr>
-            <a:r>
-              <a:rPr sz="1150" b="1">
-                <a:solidFill>
-                  <a:srgbClr val="1B3037"/>
-                </a:solidFill>
-                <a:latin typeface="Barlow"/>
-              </a:rPr>
-              <a:t>Query-gated, never hallucinated</a:t>
-            </a:r>
-          </a:p>
-        </p:txBody>
-      </p:sp>
-      <p:sp>
-        <p:nvSpPr>
-          <p:cNvPr id="9" name="TextBox 8"/>
-          <p:cNvSpPr txBox="1"/>
-          <p:nvPr/>
-        </p:nvSpPr>
-        <p:spPr>
-          <a:xfrm>
-            <a:off x="749808" y="2816352"/>
-            <a:ext cx="3657600" cy="320040"/>
-          </a:xfrm>
-          <a:prstGeom prst="rect">
-            <a:avLst/>
-          </a:prstGeom>
-          <a:noFill/>
-        </p:spPr>
-        <p:txBody>
-          <a:bodyPr wrap="square" anchor="t" lIns="0" rIns="0" tIns="0" bIns="0">
-            <a:spAutoFit/>
-          </a:bodyPr>
-          <a:lstStyle/>
-          <a:p>
-            <a:pPr algn="l">
-              <a:lnSpc>
-                <a:spcPct val="100000"/>
-              </a:lnSpc>
-              <a:spcAft>
-                <a:spcPts val="300"/>
-              </a:spcAft>
-            </a:pPr>
-            <a:r>
-              <a:rPr sz="950" b="0">
+            <a:off x="548640" y="2377440"/>
+            <a:ext cx="1874519" cy="365760"/>
+          </a:xfrm>
+          <a:prstGeom prst="rect">
+            <a:avLst/>
+          </a:prstGeom>
+          <a:noFill/>
+        </p:spPr>
+        <p:txBody>
+          <a:bodyPr wrap="square" anchor="t" lIns="0" rIns="0" tIns="0" bIns="0">
+            <a:spAutoFit/>
+          </a:bodyPr>
+          <a:lstStyle/>
+          <a:p>
+            <a:pPr algn="ctr">
+              <a:lnSpc>
+                <a:spcPct val="100000"/>
+              </a:lnSpc>
+              <a:spcAft>
+                <a:spcPts val="300"/>
+              </a:spcAft>
+            </a:pPr>
+            <a:r>
+              <a:rPr sz="800" b="0">
                 <a:solidFill>
                   <a:srgbClr val="618793"/>
                 </a:solidFill>
                 <a:latin typeface="DM Sans"/>
               </a:rPr>
-              <a:t>Every verdict proven by a re-runnable query.</a:t>
-            </a:r>
-          </a:p>
-        </p:txBody>
-      </p:sp>
-      <p:sp>
-        <p:nvSpPr>
-          <p:cNvPr id="10" name="Rectangle 9"/>
+              <a:t>beds: hybrid ·</a:t>
+            </a:r>
+          </a:p>
+          <a:p>
+            <a:pPr algn="ctr">
+              <a:lnSpc>
+                <a:spcPct val="100000"/>
+              </a:lnSpc>
+              <a:spcAft>
+                <a:spcPts val="300"/>
+              </a:spcAft>
+            </a:pPr>
+            <a:r>
+              <a:rPr sz="800" b="0">
+                <a:solidFill>
+                  <a:srgbClr val="618793"/>
+                </a:solidFill>
+                <a:latin typeface="DM Sans"/>
+              </a:rPr>
+              <a:t>deterministic · aggregate</a:t>
+            </a:r>
+          </a:p>
+        </p:txBody>
+      </p:sp>
+      <p:sp>
+        <p:nvSpPr>
+          <p:cNvPr id="9" name="Rounded Rectangle 8"/>
           <p:cNvSpPr/>
           <p:nvPr/>
         </p:nvSpPr>
         <p:spPr>
           <a:xfrm>
-            <a:off x="548640" y="3182112"/>
-            <a:ext cx="45720" cy="502920"/>
-          </a:xfrm>
-          <a:prstGeom prst="rect">
-            <a:avLst/>
+            <a:off x="2578608" y="1828800"/>
+            <a:ext cx="1874519" cy="914400"/>
+          </a:xfrm>
+          <a:prstGeom prst="roundRect">
+            <a:avLst>
+              <a:gd name="adj" fmla="val 8000"/>
+            </a:avLst>
           </a:prstGeom>
           <a:solidFill>
-            <a:srgbClr val="1B5161"/>
+            <a:srgbClr val="F3F6F7"/>
           </a:solidFill>
           <a:ln>
             <a:noFill/>
@@ -12128,104 +15759,125 @@
       </p:sp>
       <p:sp>
         <p:nvSpPr>
+          <p:cNvPr id="10" name="TextBox 9"/>
+          <p:cNvSpPr txBox="1"/>
+          <p:nvPr/>
+        </p:nvSpPr>
+        <p:spPr>
+          <a:xfrm>
+            <a:off x="2578608" y="1920240"/>
+            <a:ext cx="1874519" cy="457200"/>
+          </a:xfrm>
+          <a:prstGeom prst="rect">
+            <a:avLst/>
+          </a:prstGeom>
+          <a:noFill/>
+        </p:spPr>
+        <p:txBody>
+          <a:bodyPr wrap="square" anchor="ctr" lIns="0" rIns="0" tIns="0" bIns="0">
+            <a:spAutoFit/>
+          </a:bodyPr>
+          <a:lstStyle/>
+          <a:p>
+            <a:pPr algn="ctr">
+              <a:lnSpc>
+                <a:spcPct val="100000"/>
+              </a:lnSpc>
+              <a:spcAft>
+                <a:spcPts val="300"/>
+              </a:spcAft>
+            </a:pPr>
+            <a:r>
+              <a:rPr sz="2600" b="1">
+                <a:solidFill>
+                  <a:srgbClr val="FF3620"/>
+                </a:solidFill>
+                <a:latin typeface="Barlow"/>
+              </a:rPr>
+              <a:t>100%</a:t>
+            </a:r>
+          </a:p>
+        </p:txBody>
+      </p:sp>
+      <p:sp>
+        <p:nvSpPr>
           <p:cNvPr id="11" name="TextBox 10"/>
           <p:cNvSpPr txBox="1"/>
           <p:nvPr/>
         </p:nvSpPr>
         <p:spPr>
           <a:xfrm>
-            <a:off x="749808" y="3163824"/>
-            <a:ext cx="3657600" cy="274320"/>
-          </a:xfrm>
-          <a:prstGeom prst="rect">
-            <a:avLst/>
-          </a:prstGeom>
-          <a:noFill/>
-        </p:spPr>
-        <p:txBody>
-          <a:bodyPr wrap="square" anchor="t" lIns="0" rIns="0" tIns="0" bIns="0">
-            <a:spAutoFit/>
-          </a:bodyPr>
-          <a:lstStyle/>
-          <a:p>
-            <a:pPr algn="l">
-              <a:lnSpc>
-                <a:spcPct val="100000"/>
-              </a:lnSpc>
-              <a:spcAft>
-                <a:spcPts val="300"/>
-              </a:spcAft>
-            </a:pPr>
-            <a:r>
-              <a:rPr sz="1150" b="1">
-                <a:solidFill>
-                  <a:srgbClr val="1B3037"/>
-                </a:solidFill>
-                <a:latin typeface="Barlow"/>
-              </a:rPr>
-              <a:t>Code-aware to the sub-expression</a:t>
-            </a:r>
-          </a:p>
-        </p:txBody>
-      </p:sp>
-      <p:sp>
-        <p:nvSpPr>
-          <p:cNvPr id="12" name="TextBox 11"/>
-          <p:cNvSpPr txBox="1"/>
-          <p:nvPr/>
-        </p:nvSpPr>
-        <p:spPr>
-          <a:xfrm>
-            <a:off x="749808" y="3419856"/>
-            <a:ext cx="3657600" cy="320040"/>
-          </a:xfrm>
-          <a:prstGeom prst="rect">
-            <a:avLst/>
-          </a:prstGeom>
-          <a:noFill/>
-        </p:spPr>
-        <p:txBody>
-          <a:bodyPr wrap="square" anchor="t" lIns="0" rIns="0" tIns="0" bIns="0">
-            <a:spAutoFit/>
-          </a:bodyPr>
-          <a:lstStyle/>
-          <a:p>
-            <a:pPr algn="l">
-              <a:lnSpc>
-                <a:spcPct val="100000"/>
-              </a:lnSpc>
-              <a:spcAft>
-                <a:spcPts val="300"/>
-              </a:spcAft>
-            </a:pPr>
-            <a:r>
-              <a:rPr sz="950" b="0">
+            <a:off x="2578608" y="2377440"/>
+            <a:ext cx="1874519" cy="365760"/>
+          </a:xfrm>
+          <a:prstGeom prst="rect">
+            <a:avLst/>
+          </a:prstGeom>
+          <a:noFill/>
+        </p:spPr>
+        <p:txBody>
+          <a:bodyPr wrap="square" anchor="t" lIns="0" rIns="0" tIns="0" bIns="0">
+            <a:spAutoFit/>
+          </a:bodyPr>
+          <a:lstStyle/>
+          <a:p>
+            <a:pPr algn="ctr">
+              <a:lnSpc>
+                <a:spcPct val="100000"/>
+              </a:lnSpc>
+              <a:spcAft>
+                <a:spcPts val="300"/>
+              </a:spcAft>
+            </a:pPr>
+            <a:r>
+              <a:rPr sz="800" b="0">
                 <a:solidFill>
                   <a:srgbClr val="618793"/>
                 </a:solidFill>
                 <a:latin typeface="DM Sans"/>
               </a:rPr>
-              <a:t>Names the exact culprit + the source script.</a:t>
-            </a:r>
-          </a:p>
-        </p:txBody>
-      </p:sp>
-      <p:sp>
-        <p:nvSpPr>
-          <p:cNvPr id="13" name="Rectangle 12"/>
+              <a:t>seeded defects</a:t>
+            </a:r>
+          </a:p>
+          <a:p>
+            <a:pPr algn="ctr">
+              <a:lnSpc>
+                <a:spcPct val="100000"/>
+              </a:lnSpc>
+              <a:spcAft>
+                <a:spcPts val="300"/>
+              </a:spcAft>
+            </a:pPr>
+            <a:r>
+              <a:rPr sz="800" b="0">
+                <a:solidFill>
+                  <a:srgbClr val="618793"/>
+                </a:solidFill>
+                <a:latin typeface="DM Sans"/>
+              </a:rPr>
+              <a:t>detected &amp; classified</a:t>
+            </a:r>
+          </a:p>
+        </p:txBody>
+      </p:sp>
+      <p:sp>
+        <p:nvSpPr>
+          <p:cNvPr id="12" name="Rounded Rectangle 11"/>
           <p:cNvSpPr/>
           <p:nvPr/>
         </p:nvSpPr>
         <p:spPr>
           <a:xfrm>
-            <a:off x="548640" y="3785615"/>
-            <a:ext cx="45720" cy="502920"/>
-          </a:xfrm>
-          <a:prstGeom prst="rect">
-            <a:avLst/>
+            <a:off x="4608576" y="1828800"/>
+            <a:ext cx="1874519" cy="914400"/>
+          </a:xfrm>
+          <a:prstGeom prst="roundRect">
+            <a:avLst>
+              <a:gd name="adj" fmla="val 8000"/>
+            </a:avLst>
           </a:prstGeom>
           <a:solidFill>
-            <a:srgbClr val="1B5161"/>
+            <a:srgbClr val="F3F6F7"/>
           </a:solidFill>
           <a:ln>
             <a:noFill/>
@@ -12256,104 +15908,125 @@
       </p:sp>
       <p:sp>
         <p:nvSpPr>
+          <p:cNvPr id="13" name="TextBox 12"/>
+          <p:cNvSpPr txBox="1"/>
+          <p:nvPr/>
+        </p:nvSpPr>
+        <p:spPr>
+          <a:xfrm>
+            <a:off x="4608576" y="1920240"/>
+            <a:ext cx="1874519" cy="457200"/>
+          </a:xfrm>
+          <a:prstGeom prst="rect">
+            <a:avLst/>
+          </a:prstGeom>
+          <a:noFill/>
+        </p:spPr>
+        <p:txBody>
+          <a:bodyPr wrap="square" anchor="ctr" lIns="0" rIns="0" tIns="0" bIns="0">
+            <a:spAutoFit/>
+          </a:bodyPr>
+          <a:lstStyle/>
+          <a:p>
+            <a:pPr algn="ctr">
+              <a:lnSpc>
+                <a:spcPct val="100000"/>
+              </a:lnSpc>
+              <a:spcAft>
+                <a:spcPts val="300"/>
+              </a:spcAft>
+            </a:pPr>
+            <a:r>
+              <a:rPr sz="2600" b="1">
+                <a:solidFill>
+                  <a:srgbClr val="1B3037"/>
+                </a:solidFill>
+                <a:latin typeface="Barlow"/>
+              </a:rPr>
+              <a:t>3</a:t>
+            </a:r>
+          </a:p>
+        </p:txBody>
+      </p:sp>
+      <p:sp>
+        <p:nvSpPr>
           <p:cNvPr id="14" name="TextBox 13"/>
           <p:cNvSpPr txBox="1"/>
           <p:nvPr/>
         </p:nvSpPr>
         <p:spPr>
           <a:xfrm>
-            <a:off x="749808" y="3767328"/>
-            <a:ext cx="3657600" cy="274320"/>
-          </a:xfrm>
-          <a:prstGeom prst="rect">
-            <a:avLst/>
-          </a:prstGeom>
-          <a:noFill/>
-        </p:spPr>
-        <p:txBody>
-          <a:bodyPr wrap="square" anchor="t" lIns="0" rIns="0" tIns="0" bIns="0">
-            <a:spAutoFit/>
-          </a:bodyPr>
-          <a:lstStyle/>
-          <a:p>
-            <a:pPr algn="l">
-              <a:lnSpc>
-                <a:spcPct val="100000"/>
-              </a:lnSpc>
-              <a:spcAft>
-                <a:spcPts val="300"/>
-              </a:spcAft>
-            </a:pPr>
-            <a:r>
-              <a:rPr sz="1150" b="1">
-                <a:solidFill>
-                  <a:srgbClr val="1B3037"/>
-                </a:solidFill>
-                <a:latin typeface="Barlow"/>
-              </a:rPr>
-              <a:t>One engine, three surfaces</a:t>
-            </a:r>
-          </a:p>
-        </p:txBody>
-      </p:sp>
-      <p:sp>
-        <p:nvSpPr>
-          <p:cNvPr id="15" name="TextBox 14"/>
-          <p:cNvSpPr txBox="1"/>
-          <p:nvPr/>
-        </p:nvSpPr>
-        <p:spPr>
-          <a:xfrm>
-            <a:off x="749808" y="4023360"/>
-            <a:ext cx="3657600" cy="320040"/>
-          </a:xfrm>
-          <a:prstGeom prst="rect">
-            <a:avLst/>
-          </a:prstGeom>
-          <a:noFill/>
-        </p:spPr>
-        <p:txBody>
-          <a:bodyPr wrap="square" anchor="t" lIns="0" rIns="0" tIns="0" bIns="0">
-            <a:spAutoFit/>
-          </a:bodyPr>
-          <a:lstStyle/>
-          <a:p>
-            <a:pPr algn="l">
-              <a:lnSpc>
-                <a:spcPct val="100000"/>
-              </a:lnSpc>
-              <a:spcAft>
-                <a:spcPts val="300"/>
-              </a:spcAft>
-            </a:pPr>
-            <a:r>
-              <a:rPr sz="950" b="0">
+            <a:off x="4608576" y="2377440"/>
+            <a:ext cx="1874519" cy="365760"/>
+          </a:xfrm>
+          <a:prstGeom prst="rect">
+            <a:avLst/>
+          </a:prstGeom>
+          <a:noFill/>
+        </p:spPr>
+        <p:txBody>
+          <a:bodyPr wrap="square" anchor="t" lIns="0" rIns="0" tIns="0" bIns="0">
+            <a:spAutoFit/>
+          </a:bodyPr>
+          <a:lstStyle/>
+          <a:p>
+            <a:pPr algn="ctr">
+              <a:lnSpc>
+                <a:spcPct val="100000"/>
+              </a:lnSpc>
+              <a:spcAft>
+                <a:spcPts val="300"/>
+              </a:spcAft>
+            </a:pPr>
+            <a:r>
+              <a:rPr sz="800" b="0">
                 <a:solidFill>
                   <a:srgbClr val="618793"/>
                 </a:solidFill>
                 <a:latin typeface="DM Sans"/>
               </a:rPr>
-              <a:t>App · CLI · Genie — identical output, det &amp; agentic.</a:t>
-            </a:r>
-          </a:p>
-        </p:txBody>
-      </p:sp>
-      <p:sp>
-        <p:nvSpPr>
-          <p:cNvPr id="16" name="Rectangle 15"/>
+              <a:t>entry points:</a:t>
+            </a:r>
+          </a:p>
+          <a:p>
+            <a:pPr algn="ctr">
+              <a:lnSpc>
+                <a:spcPct val="100000"/>
+              </a:lnSpc>
+              <a:spcAft>
+                <a:spcPts val="300"/>
+              </a:spcAft>
+            </a:pPr>
+            <a:r>
+              <a:rPr sz="800" b="0">
+                <a:solidFill>
+                  <a:srgbClr val="618793"/>
+                </a:solidFill>
+                <a:latin typeface="DM Sans"/>
+              </a:rPr>
+              <a:t>App · CLI · Skill</a:t>
+            </a:r>
+          </a:p>
+        </p:txBody>
+      </p:sp>
+      <p:sp>
+        <p:nvSpPr>
+          <p:cNvPr id="15" name="Rounded Rectangle 14"/>
           <p:cNvSpPr/>
           <p:nvPr/>
         </p:nvSpPr>
         <p:spPr>
           <a:xfrm>
-            <a:off x="548640" y="4389120"/>
-            <a:ext cx="45720" cy="502920"/>
-          </a:xfrm>
-          <a:prstGeom prst="rect">
-            <a:avLst/>
+            <a:off x="6638544" y="1828800"/>
+            <a:ext cx="1874519" cy="914400"/>
+          </a:xfrm>
+          <a:prstGeom prst="roundRect">
+            <a:avLst>
+              <a:gd name="adj" fmla="val 8000"/>
+            </a:avLst>
           </a:prstGeom>
           <a:solidFill>
-            <a:srgbClr val="1B5161"/>
+            <a:srgbClr val="F3F6F7"/>
           </a:solidFill>
           <a:ln>
             <a:noFill/>
@@ -12384,146 +16057,125 @@
       </p:sp>
       <p:sp>
         <p:nvSpPr>
+          <p:cNvPr id="16" name="TextBox 15"/>
+          <p:cNvSpPr txBox="1"/>
+          <p:nvPr/>
+        </p:nvSpPr>
+        <p:spPr>
+          <a:xfrm>
+            <a:off x="6638544" y="1920240"/>
+            <a:ext cx="1874519" cy="457200"/>
+          </a:xfrm>
+          <a:prstGeom prst="rect">
+            <a:avLst/>
+          </a:prstGeom>
+          <a:noFill/>
+        </p:spPr>
+        <p:txBody>
+          <a:bodyPr wrap="square" anchor="ctr" lIns="0" rIns="0" tIns="0" bIns="0">
+            <a:spAutoFit/>
+          </a:bodyPr>
+          <a:lstStyle/>
+          <a:p>
+            <a:pPr algn="ctr">
+              <a:lnSpc>
+                <a:spcPct val="100000"/>
+              </a:lnSpc>
+              <a:spcAft>
+                <a:spcPts val="300"/>
+              </a:spcAft>
+            </a:pPr>
+            <a:r>
+              <a:rPr sz="2600" b="1">
+                <a:solidFill>
+                  <a:srgbClr val="1B3037"/>
+                </a:solidFill>
+                <a:latin typeface="Barlow"/>
+              </a:rPr>
+              <a:t>50M</a:t>
+            </a:r>
+          </a:p>
+        </p:txBody>
+      </p:sp>
+      <p:sp>
+        <p:nvSpPr>
           <p:cNvPr id="17" name="TextBox 16"/>
           <p:cNvSpPr txBox="1"/>
           <p:nvPr/>
         </p:nvSpPr>
         <p:spPr>
           <a:xfrm>
-            <a:off x="749808" y="4370832"/>
-            <a:ext cx="3657600" cy="274320"/>
-          </a:xfrm>
-          <a:prstGeom prst="rect">
-            <a:avLst/>
-          </a:prstGeom>
-          <a:noFill/>
-        </p:spPr>
-        <p:txBody>
-          <a:bodyPr wrap="square" anchor="t" lIns="0" rIns="0" tIns="0" bIns="0">
-            <a:spAutoFit/>
-          </a:bodyPr>
-          <a:lstStyle/>
-          <a:p>
-            <a:pPr algn="l">
-              <a:lnSpc>
-                <a:spcPct val="100000"/>
-              </a:lnSpc>
-              <a:spcAft>
-                <a:spcPts val="300"/>
-              </a:spcAft>
-            </a:pPr>
-            <a:r>
-              <a:rPr sz="1150" b="1">
-                <a:solidFill>
-                  <a:srgbClr val="1B3037"/>
-                </a:solidFill>
-                <a:latin typeface="Barlow"/>
-              </a:rPr>
-              <a:t>Scale-bounded</a:t>
-            </a:r>
-          </a:p>
-        </p:txBody>
-      </p:sp>
-      <p:sp>
-        <p:nvSpPr>
-          <p:cNvPr id="18" name="TextBox 17"/>
-          <p:cNvSpPr txBox="1"/>
-          <p:nvPr/>
-        </p:nvSpPr>
-        <p:spPr>
-          <a:xfrm>
-            <a:off x="749808" y="4626864"/>
-            <a:ext cx="3657600" cy="320040"/>
-          </a:xfrm>
-          <a:prstGeom prst="rect">
-            <a:avLst/>
-          </a:prstGeom>
-          <a:noFill/>
-        </p:spPr>
-        <p:txBody>
-          <a:bodyPr wrap="square" anchor="t" lIns="0" rIns="0" tIns="0" bIns="0">
-            <a:spAutoFit/>
-          </a:bodyPr>
-          <a:lstStyle/>
-          <a:p>
-            <a:pPr algn="l">
-              <a:lnSpc>
-                <a:spcPct val="100000"/>
-              </a:lnSpc>
-              <a:spcAft>
-                <a:spcPts val="300"/>
-              </a:spcAft>
-            </a:pPr>
-            <a:r>
-              <a:rPr sz="950" b="0">
+            <a:off x="6638544" y="2377440"/>
+            <a:ext cx="1874519" cy="365760"/>
+          </a:xfrm>
+          <a:prstGeom prst="rect">
+            <a:avLst/>
+          </a:prstGeom>
+          <a:noFill/>
+        </p:spPr>
+        <p:txBody>
+          <a:bodyPr wrap="square" anchor="t" lIns="0" rIns="0" tIns="0" bIns="0">
+            <a:spAutoFit/>
+          </a:bodyPr>
+          <a:lstStyle/>
+          <a:p>
+            <a:pPr algn="ctr">
+              <a:lnSpc>
+                <a:spcPct val="100000"/>
+              </a:lnSpc>
+              <a:spcAft>
+                <a:spcPts val="300"/>
+              </a:spcAft>
+            </a:pPr>
+            <a:r>
+              <a:rPr sz="800" b="0">
                 <a:solidFill>
                   <a:srgbClr val="618793"/>
                 </a:solidFill>
                 <a:latin typeface="DM Sans"/>
               </a:rPr>
-              <a:t>Recon sample + scoped checks; 20M rows, 6 concurrent.</a:t>
-            </a:r>
-          </a:p>
-        </p:txBody>
-      </p:sp>
-      <p:sp>
-        <p:nvSpPr>
-          <p:cNvPr id="19" name="TextBox 18"/>
-          <p:cNvSpPr txBox="1"/>
-          <p:nvPr/>
-        </p:nvSpPr>
-        <p:spPr>
-          <a:xfrm>
-            <a:off x="4709159" y="2103120"/>
-            <a:ext cx="3840480" cy="320040"/>
-          </a:xfrm>
-          <a:prstGeom prst="rect">
-            <a:avLst/>
-          </a:prstGeom>
-          <a:noFill/>
-        </p:spPr>
-        <p:txBody>
-          <a:bodyPr wrap="square" anchor="t" lIns="0" rIns="0" tIns="0" bIns="0">
-            <a:spAutoFit/>
-          </a:bodyPr>
-          <a:lstStyle/>
-          <a:p>
-            <a:pPr algn="l">
-              <a:lnSpc>
-                <a:spcPct val="100000"/>
-              </a:lnSpc>
-              <a:spcAft>
-                <a:spcPts val="300"/>
-              </a:spcAft>
-            </a:pPr>
-            <a:r>
-              <a:rPr sz="1500" b="1">
-                <a:solidFill>
-                  <a:srgbClr val="FF3620"/>
-                </a:solidFill>
-                <a:latin typeface="Barlow"/>
-              </a:rPr>
-              <a:t>Business impact</a:t>
-            </a:r>
-          </a:p>
-        </p:txBody>
-      </p:sp>
-      <p:sp>
-        <p:nvSpPr>
-          <p:cNvPr id="20" name="Rectangle 19"/>
+              <a:t>rows · 8.5 GB</a:t>
+            </a:r>
+          </a:p>
+          <a:p>
+            <a:pPr algn="ctr">
+              <a:lnSpc>
+                <a:spcPct val="100000"/>
+              </a:lnSpc>
+              <a:spcAft>
+                <a:spcPts val="300"/>
+              </a:spcAft>
+            </a:pPr>
+            <a:r>
+              <a:rPr sz="800" b="0">
+                <a:solidFill>
+                  <a:srgbClr val="618793"/>
+                </a:solidFill>
+                <a:latin typeface="DM Sans"/>
+              </a:rPr>
+              <a:t>reconciled (prod)</a:t>
+            </a:r>
+          </a:p>
+        </p:txBody>
+      </p:sp>
+      <p:sp>
+        <p:nvSpPr>
+          <p:cNvPr id="18" name="Rounded Rectangle 17"/>
           <p:cNvSpPr/>
           <p:nvPr/>
         </p:nvSpPr>
         <p:spPr>
           <a:xfrm>
-            <a:off x="4709159" y="2578608"/>
-            <a:ext cx="45720" cy="502920"/>
-          </a:xfrm>
-          <a:prstGeom prst="rect">
-            <a:avLst/>
+            <a:off x="548640" y="2907792"/>
+            <a:ext cx="8046720" cy="420624"/>
+          </a:xfrm>
+          <a:prstGeom prst="roundRect">
+            <a:avLst>
+              <a:gd name="adj" fmla="val 10000"/>
+            </a:avLst>
           </a:prstGeom>
           <a:solidFill>
-            <a:srgbClr val="FF3620"/>
+            <a:srgbClr val="1B3037"/>
           </a:solidFill>
           <a:ln>
             <a:noFill/>
@@ -12554,468 +16206,333 @@
       </p:sp>
       <p:sp>
         <p:nvSpPr>
+          <p:cNvPr id="19" name="TextBox 18"/>
+          <p:cNvSpPr txBox="1"/>
+          <p:nvPr/>
+        </p:nvSpPr>
+        <p:spPr>
+          <a:xfrm>
+            <a:off x="777240" y="2907792"/>
+            <a:ext cx="7589520" cy="420624"/>
+          </a:xfrm>
+          <a:prstGeom prst="rect">
+            <a:avLst/>
+          </a:prstGeom>
+          <a:noFill/>
+        </p:spPr>
+        <p:txBody>
+          <a:bodyPr wrap="square" anchor="ctr" lIns="0" rIns="0" tIns="0" bIns="0">
+            <a:spAutoFit/>
+          </a:bodyPr>
+          <a:lstStyle/>
+          <a:p>
+            <a:pPr algn="l">
+              <a:lnSpc>
+                <a:spcPct val="100000"/>
+              </a:lnSpc>
+              <a:spcAft>
+                <a:spcPts val="300"/>
+              </a:spcAft>
+            </a:pPr>
+            <a:r>
+              <a:rPr sz="950" b="1">
+                <a:solidFill>
+                  <a:srgbClr val="FFFFFF"/>
+                </a:solidFill>
+                <a:latin typeface="Barlow"/>
+              </a:rPr>
+              <a:t>Tested:  </a:t>
+            </a:r>
+            <a:r>
+              <a:rPr sz="950" b="0">
+                <a:solidFill>
+                  <a:srgbClr val="9EB7BE"/>
+                </a:solidFill>
+                <a:latin typeface="DM Sans"/>
+              </a:rPr>
+              <a:t>correctness · transform-logic + culprit + script location · confidence · deterministic &amp; hybrid · App/CLI/Skill parity · concurrency · prod-volume (50M / 8.5 GB)</a:t>
+            </a:r>
+          </a:p>
+        </p:txBody>
+      </p:sp>
+      <p:sp>
+        <p:nvSpPr>
+          <p:cNvPr id="20" name="TextBox 19"/>
+          <p:cNvSpPr txBox="1"/>
+          <p:nvPr/>
+        </p:nvSpPr>
+        <p:spPr>
+          <a:xfrm>
+            <a:off x="548640" y="3520440"/>
+            <a:ext cx="3931920" cy="274320"/>
+          </a:xfrm>
+          <a:prstGeom prst="rect">
+            <a:avLst/>
+          </a:prstGeom>
+          <a:noFill/>
+        </p:spPr>
+        <p:txBody>
+          <a:bodyPr wrap="square" anchor="t" lIns="0" rIns="0" tIns="0" bIns="0">
+            <a:spAutoFit/>
+          </a:bodyPr>
+          <a:lstStyle/>
+          <a:p>
+            <a:pPr algn="l">
+              <a:lnSpc>
+                <a:spcPct val="100000"/>
+              </a:lnSpc>
+              <a:spcAft>
+                <a:spcPts val="300"/>
+              </a:spcAft>
+            </a:pPr>
+            <a:r>
+              <a:rPr sz="1300" b="1">
+                <a:solidFill>
+                  <a:srgbClr val="00B378"/>
+                </a:solidFill>
+                <a:latin typeface="Barlow"/>
+              </a:rPr>
+              <a:t>✅  What worked</a:t>
+            </a:r>
+          </a:p>
+        </p:txBody>
+      </p:sp>
+      <p:sp>
+        <p:nvSpPr>
           <p:cNvPr id="21" name="TextBox 20"/>
           <p:cNvSpPr txBox="1"/>
           <p:nvPr/>
         </p:nvSpPr>
         <p:spPr>
           <a:xfrm>
-            <a:off x="4910327" y="2560320"/>
-            <a:ext cx="3657600" cy="274320"/>
-          </a:xfrm>
-          <a:prstGeom prst="rect">
-            <a:avLst/>
-          </a:prstGeom>
-          <a:noFill/>
-        </p:spPr>
-        <p:txBody>
-          <a:bodyPr wrap="square" anchor="t" lIns="0" rIns="0" tIns="0" bIns="0">
-            <a:spAutoFit/>
-          </a:bodyPr>
-          <a:lstStyle/>
-          <a:p>
-            <a:pPr algn="l">
-              <a:lnSpc>
-                <a:spcPct val="100000"/>
-              </a:lnSpc>
-              <a:spcAft>
-                <a:spcPts val="300"/>
-              </a:spcAft>
-            </a:pPr>
-            <a:r>
-              <a:rPr sz="1150" b="1">
+            <a:off x="548640" y="3840480"/>
+            <a:ext cx="4023360" cy="1280160"/>
+          </a:xfrm>
+          <a:prstGeom prst="rect">
+            <a:avLst/>
+          </a:prstGeom>
+          <a:noFill/>
+        </p:spPr>
+        <p:txBody>
+          <a:bodyPr wrap="square" anchor="t" lIns="0" rIns="0" tIns="0" bIns="0">
+            <a:spAutoFit/>
+          </a:bodyPr>
+          <a:lstStyle/>
+          <a:p>
+            <a:pPr algn="l">
+              <a:lnSpc>
+                <a:spcPct val="105000"/>
+              </a:lnSpc>
+              <a:spcAft>
+                <a:spcPts val="300"/>
+              </a:spcAft>
+            </a:pPr>
+            <a:r>
+              <a:rPr sz="900" b="0">
                 <a:solidFill>
                   <a:srgbClr val="1B3037"/>
                 </a:solidFill>
+                <a:latin typeface="DM Sans"/>
+              </a:rPr>
+              <a:t>•  Explains every mismatch and proves it with a live query</a:t>
+            </a:r>
+          </a:p>
+          <a:p>
+            <a:pPr algn="l">
+              <a:lnSpc>
+                <a:spcPct val="105000"/>
+              </a:lnSpc>
+              <a:spcAft>
+                <a:spcPts val="400"/>
+              </a:spcAft>
+            </a:pPr>
+            <a:r>
+              <a:rPr sz="900" b="0">
+                <a:solidFill>
+                  <a:srgbClr val="1B3037"/>
+                </a:solidFill>
+                <a:latin typeface="DM Sans"/>
+              </a:rPr>
+              <a:t>•  Shows the migrated derivation, the ⚠️ culprit sub-expression, and the 📄 script path + line</a:t>
+            </a:r>
+          </a:p>
+          <a:p>
+            <a:pPr algn="l">
+              <a:lnSpc>
+                <a:spcPct val="105000"/>
+              </a:lnSpc>
+              <a:spcAft>
+                <a:spcPts val="400"/>
+              </a:spcAft>
+            </a:pPr>
+            <a:r>
+              <a:rPr sz="900" b="0">
+                <a:solidFill>
+                  <a:srgbClr val="1B3037"/>
+                </a:solidFill>
+                <a:latin typeface="DM Sans"/>
+              </a:rPr>
+              <a:t>•  Deterministic (rules) and hybrid (query-gated FM) — same engine, one flag</a:t>
+            </a:r>
+          </a:p>
+          <a:p>
+            <a:pPr algn="l">
+              <a:lnSpc>
+                <a:spcPct val="105000"/>
+              </a:lnSpc>
+              <a:spcAft>
+                <a:spcPts val="400"/>
+              </a:spcAft>
+            </a:pPr>
+            <a:r>
+              <a:rPr sz="900" b="0">
+                <a:solidFill>
+                  <a:srgbClr val="1B3037"/>
+                </a:solidFill>
+                <a:latin typeface="DM Sans"/>
+              </a:rPr>
+              <a:t>•  Per-finding confidence + a run-level rollup</a:t>
+            </a:r>
+          </a:p>
+          <a:p>
+            <a:pPr algn="l">
+              <a:lnSpc>
+                <a:spcPct val="105000"/>
+              </a:lnSpc>
+              <a:spcAft>
+                <a:spcPts val="400"/>
+              </a:spcAft>
+            </a:pPr>
+            <a:r>
+              <a:rPr sz="900" b="0">
+                <a:solidFill>
+                  <a:srgbClr val="1B3037"/>
+                </a:solidFill>
+                <a:latin typeface="DM Sans"/>
+              </a:rPr>
+              <a:t>•  Identical output on App, CLI &amp; Skill; 6 concurrent runs held</a:t>
+            </a:r>
+          </a:p>
+        </p:txBody>
+      </p:sp>
+      <p:sp>
+        <p:nvSpPr>
+          <p:cNvPr id="22" name="TextBox 21"/>
+          <p:cNvSpPr txBox="1"/>
+          <p:nvPr/>
+        </p:nvSpPr>
+        <p:spPr>
+          <a:xfrm>
+            <a:off x="4663440" y="3520440"/>
+            <a:ext cx="3931920" cy="274320"/>
+          </a:xfrm>
+          <a:prstGeom prst="rect">
+            <a:avLst/>
+          </a:prstGeom>
+          <a:noFill/>
+        </p:spPr>
+        <p:txBody>
+          <a:bodyPr wrap="square" anchor="t" lIns="0" rIns="0" tIns="0" bIns="0">
+            <a:spAutoFit/>
+          </a:bodyPr>
+          <a:lstStyle/>
+          <a:p>
+            <a:pPr algn="l">
+              <a:lnSpc>
+                <a:spcPct val="100000"/>
+              </a:lnSpc>
+              <a:spcAft>
+                <a:spcPts val="300"/>
+              </a:spcAft>
+            </a:pPr>
+            <a:r>
+              <a:rPr sz="1300" b="1">
+                <a:solidFill>
+                  <a:srgbClr val="1B5161"/>
+                </a:solidFill>
                 <a:latin typeface="Barlow"/>
               </a:rPr>
-              <a:t>Days → minutes per migration</a:t>
-            </a:r>
-          </a:p>
-        </p:txBody>
-      </p:sp>
-      <p:sp>
-        <p:nvSpPr>
-          <p:cNvPr id="22" name="TextBox 21"/>
-          <p:cNvSpPr txBox="1"/>
-          <p:nvPr/>
-        </p:nvSpPr>
-        <p:spPr>
-          <a:xfrm>
-            <a:off x="4910327" y="2816352"/>
-            <a:ext cx="3657600" cy="320040"/>
-          </a:xfrm>
-          <a:prstGeom prst="rect">
-            <a:avLst/>
-          </a:prstGeom>
-          <a:noFill/>
-        </p:spPr>
-        <p:txBody>
-          <a:bodyPr wrap="square" anchor="t" lIns="0" rIns="0" tIns="0" bIns="0">
-            <a:spAutoFit/>
-          </a:bodyPr>
-          <a:lstStyle/>
-          <a:p>
-            <a:pPr algn="l">
-              <a:lnSpc>
-                <a:spcPct val="100000"/>
-              </a:lnSpc>
-              <a:spcAft>
-                <a:spcPts val="300"/>
-              </a:spcAft>
-            </a:pPr>
-            <a:r>
-              <a:rPr sz="950" b="0">
-                <a:solidFill>
-                  <a:srgbClr val="618793"/>
+              <a:t>🔎  Watch-outs</a:t>
+            </a:r>
+          </a:p>
+        </p:txBody>
+      </p:sp>
+      <p:sp>
+        <p:nvSpPr>
+          <p:cNvPr id="23" name="TextBox 22"/>
+          <p:cNvSpPr txBox="1"/>
+          <p:nvPr/>
+        </p:nvSpPr>
+        <p:spPr>
+          <a:xfrm>
+            <a:off x="4663440" y="3840480"/>
+            <a:ext cx="3931920" cy="1280160"/>
+          </a:xfrm>
+          <a:prstGeom prst="rect">
+            <a:avLst/>
+          </a:prstGeom>
+          <a:noFill/>
+        </p:spPr>
+        <p:txBody>
+          <a:bodyPr wrap="square" anchor="t" lIns="0" rIns="0" tIns="0" bIns="0">
+            <a:spAutoFit/>
+          </a:bodyPr>
+          <a:lstStyle/>
+          <a:p>
+            <a:pPr algn="l">
+              <a:lnSpc>
+                <a:spcPct val="105000"/>
+              </a:lnSpc>
+              <a:spcAft>
+                <a:spcPts val="300"/>
+              </a:spcAft>
+            </a:pPr>
+            <a:r>
+              <a:rPr sz="900" b="0">
+                <a:solidFill>
+                  <a:srgbClr val="1B3037"/>
                 </a:solidFill>
                 <a:latin typeface="DM Sans"/>
               </a:rPr>
-              <a:t>Reviewer-ready root cause for every difference.</a:t>
-            </a:r>
-          </a:p>
-        </p:txBody>
-      </p:sp>
-      <p:sp>
-        <p:nvSpPr>
-          <p:cNvPr id="23" name="Rectangle 22"/>
-          <p:cNvSpPr/>
-          <p:nvPr/>
-        </p:nvSpPr>
-        <p:spPr>
-          <a:xfrm>
-            <a:off x="4709159" y="3182112"/>
-            <a:ext cx="45720" cy="502920"/>
-          </a:xfrm>
-          <a:prstGeom prst="rect">
-            <a:avLst/>
-          </a:prstGeom>
-          <a:solidFill>
-            <a:srgbClr val="FF3620"/>
-          </a:solidFill>
-          <a:ln>
-            <a:noFill/>
-          </a:ln>
-          <a:effectLst/>
-        </p:spPr>
-        <p:style>
-          <a:lnRef idx="1">
-            <a:schemeClr val="accent1"/>
-          </a:lnRef>
-          <a:fillRef idx="3">
-            <a:schemeClr val="accent1"/>
-          </a:fillRef>
-          <a:effectRef idx="2">
-            <a:schemeClr val="accent1"/>
-          </a:effectRef>
-          <a:fontRef idx="minor">
-            <a:schemeClr val="lt1"/>
-          </a:fontRef>
-        </p:style>
-        <p:txBody>
-          <a:bodyPr rtlCol="0" anchor="ctr"/>
-          <a:lstStyle/>
-          <a:p>
-            <a:pPr algn="ctr"/>
-          </a:p>
-        </p:txBody>
-      </p:sp>
-      <p:sp>
-        <p:nvSpPr>
-          <p:cNvPr id="24" name="TextBox 23"/>
-          <p:cNvSpPr txBox="1"/>
-          <p:nvPr/>
-        </p:nvSpPr>
-        <p:spPr>
-          <a:xfrm>
-            <a:off x="4910327" y="3163824"/>
-            <a:ext cx="3657600" cy="274320"/>
-          </a:xfrm>
-          <a:prstGeom prst="rect">
-            <a:avLst/>
-          </a:prstGeom>
-          <a:noFill/>
-        </p:spPr>
-        <p:txBody>
-          <a:bodyPr wrap="square" anchor="t" lIns="0" rIns="0" tIns="0" bIns="0">
-            <a:spAutoFit/>
-          </a:bodyPr>
-          <a:lstStyle/>
-          <a:p>
-            <a:pPr algn="l">
-              <a:lnSpc>
-                <a:spcPct val="100000"/>
-              </a:lnSpc>
-              <a:spcAft>
-                <a:spcPts val="300"/>
-              </a:spcAft>
-            </a:pPr>
-            <a:r>
-              <a:rPr sz="1150" b="1">
+              <a:t>•  Agentic root-cause needs an FM endpoint + a good confirming query — query-gated, so a miss stays needs-review, never wrong</a:t>
+            </a:r>
+          </a:p>
+          <a:p>
+            <a:pPr algn="l">
+              <a:lnSpc>
+                <a:spcPct val="105000"/>
+              </a:lnSpc>
+              <a:spcAft>
+                <a:spcPts val="400"/>
+              </a:spcAft>
+            </a:pPr>
+            <a:r>
+              <a:rPr sz="900" b="0">
                 <a:solidFill>
                   <a:srgbClr val="1B3037"/>
                 </a:solidFill>
-                <a:latin typeface="Barlow"/>
-              </a:rPr>
-              <a:t>Fits every customer</a:t>
-            </a:r>
-          </a:p>
-        </p:txBody>
-      </p:sp>
-      <p:sp>
-        <p:nvSpPr>
-          <p:cNvPr id="25" name="TextBox 24"/>
-          <p:cNvSpPr txBox="1"/>
-          <p:nvPr/>
-        </p:nvSpPr>
-        <p:spPr>
-          <a:xfrm>
-            <a:off x="4910327" y="3419856"/>
-            <a:ext cx="3657600" cy="320040"/>
-          </a:xfrm>
-          <a:prstGeom prst="rect">
-            <a:avLst/>
-          </a:prstGeom>
-          <a:noFill/>
-        </p:spPr>
-        <p:txBody>
-          <a:bodyPr wrap="square" anchor="t" lIns="0" rIns="0" tIns="0" bIns="0">
-            <a:spAutoFit/>
-          </a:bodyPr>
-          <a:lstStyle/>
-          <a:p>
-            <a:pPr algn="l">
-              <a:lnSpc>
-                <a:spcPct val="100000"/>
-              </a:lnSpc>
-              <a:spcAft>
-                <a:spcPts val="300"/>
-              </a:spcAft>
-            </a:pPr>
-            <a:r>
-              <a:rPr sz="950" b="0">
-                <a:solidFill>
-                  <a:srgbClr val="618793"/>
-                </a:solidFill>
                 <a:latin typeface="DM Sans"/>
               </a:rPr>
-              <a:t>Deterministic for Genie-restricted; agentic where allowed.</a:t>
-            </a:r>
-          </a:p>
-        </p:txBody>
-      </p:sp>
-      <p:sp>
-        <p:nvSpPr>
-          <p:cNvPr id="26" name="Rectangle 25"/>
-          <p:cNvSpPr/>
-          <p:nvPr/>
-        </p:nvSpPr>
-        <p:spPr>
-          <a:xfrm>
-            <a:off x="4709159" y="3785615"/>
-            <a:ext cx="45720" cy="502920"/>
-          </a:xfrm>
-          <a:prstGeom prst="rect">
-            <a:avLst/>
-          </a:prstGeom>
-          <a:solidFill>
-            <a:srgbClr val="FF3620"/>
-          </a:solidFill>
-          <a:ln>
-            <a:noFill/>
-          </a:ln>
-          <a:effectLst/>
-        </p:spPr>
-        <p:style>
-          <a:lnRef idx="1">
-            <a:schemeClr val="accent1"/>
-          </a:lnRef>
-          <a:fillRef idx="3">
-            <a:schemeClr val="accent1"/>
-          </a:fillRef>
-          <a:effectRef idx="2">
-            <a:schemeClr val="accent1"/>
-          </a:effectRef>
-          <a:fontRef idx="minor">
-            <a:schemeClr val="lt1"/>
-          </a:fontRef>
-        </p:style>
-        <p:txBody>
-          <a:bodyPr rtlCol="0" anchor="ctr"/>
-          <a:lstStyle/>
-          <a:p>
-            <a:pPr algn="ctr"/>
-          </a:p>
-        </p:txBody>
-      </p:sp>
-      <p:sp>
-        <p:nvSpPr>
-          <p:cNvPr id="27" name="TextBox 26"/>
-          <p:cNvSpPr txBox="1"/>
-          <p:nvPr/>
-        </p:nvSpPr>
-        <p:spPr>
-          <a:xfrm>
-            <a:off x="4910327" y="3767328"/>
-            <a:ext cx="3657600" cy="274320"/>
-          </a:xfrm>
-          <a:prstGeom prst="rect">
-            <a:avLst/>
-          </a:prstGeom>
-          <a:noFill/>
-        </p:spPr>
-        <p:txBody>
-          <a:bodyPr wrap="square" anchor="t" lIns="0" rIns="0" tIns="0" bIns="0">
-            <a:spAutoFit/>
-          </a:bodyPr>
-          <a:lstStyle/>
-          <a:p>
-            <a:pPr algn="l">
-              <a:lnSpc>
-                <a:spcPct val="100000"/>
-              </a:lnSpc>
-              <a:spcAft>
-                <a:spcPts val="300"/>
-              </a:spcAft>
-            </a:pPr>
-            <a:r>
-              <a:rPr sz="1150" b="1">
+              <a:t>•  TB-scale needs wider / higher-cardinality rows (50M / 8.5 GB shown; TB = data-gen + warehouse cost)</a:t>
+            </a:r>
+          </a:p>
+          <a:p>
+            <a:pPr algn="l">
+              <a:lnSpc>
+                <a:spcPct val="105000"/>
+              </a:lnSpc>
+              <a:spcAft>
+                <a:spcPts val="400"/>
+              </a:spcAft>
+            </a:pPr>
+            <a:r>
+              <a:rPr sz="900" b="0">
                 <a:solidFill>
                   <a:srgbClr val="1B3037"/>
                 </a:solidFill>
-                <a:latin typeface="Barlow"/>
-              </a:rPr>
-              <a:t>Auditable &amp; trusted</a:t>
-            </a:r>
-          </a:p>
-        </p:txBody>
-      </p:sp>
-      <p:sp>
-        <p:nvSpPr>
-          <p:cNvPr id="28" name="TextBox 27"/>
-          <p:cNvSpPr txBox="1"/>
-          <p:nvPr/>
-        </p:nvSpPr>
-        <p:spPr>
-          <a:xfrm>
-            <a:off x="4910327" y="4023360"/>
-            <a:ext cx="3657600" cy="320040"/>
-          </a:xfrm>
-          <a:prstGeom prst="rect">
-            <a:avLst/>
-          </a:prstGeom>
-          <a:noFill/>
-        </p:spPr>
-        <p:txBody>
-          <a:bodyPr wrap="square" anchor="t" lIns="0" rIns="0" tIns="0" bIns="0">
-            <a:spAutoFit/>
-          </a:bodyPr>
-          <a:lstStyle/>
-          <a:p>
-            <a:pPr algn="l">
-              <a:lnSpc>
-                <a:spcPct val="100000"/>
-              </a:lnSpc>
-              <a:spcAft>
-                <a:spcPts val="300"/>
-              </a:spcAft>
-            </a:pPr>
-            <a:r>
-              <a:rPr sz="950" b="0">
-                <a:solidFill>
-                  <a:srgbClr val="618793"/>
-                </a:solidFill>
                 <a:latin typeface="DM Sans"/>
               </a:rPr>
-              <a:t>Append-only audit trail; a query behind every verdict.</a:t>
-            </a:r>
-          </a:p>
-        </p:txBody>
-      </p:sp>
-      <p:sp>
-        <p:nvSpPr>
-          <p:cNvPr id="29" name="Rectangle 28"/>
-          <p:cNvSpPr/>
-          <p:nvPr/>
-        </p:nvSpPr>
-        <p:spPr>
-          <a:xfrm>
-            <a:off x="4709159" y="4389120"/>
-            <a:ext cx="45720" cy="502920"/>
-          </a:xfrm>
-          <a:prstGeom prst="rect">
-            <a:avLst/>
-          </a:prstGeom>
-          <a:solidFill>
-            <a:srgbClr val="FF3620"/>
-          </a:solidFill>
-          <a:ln>
-            <a:noFill/>
-          </a:ln>
-          <a:effectLst/>
-        </p:spPr>
-        <p:style>
-          <a:lnRef idx="1">
-            <a:schemeClr val="accent1"/>
-          </a:lnRef>
-          <a:fillRef idx="3">
-            <a:schemeClr val="accent1"/>
-          </a:fillRef>
-          <a:effectRef idx="2">
-            <a:schemeClr val="accent1"/>
-          </a:effectRef>
-          <a:fontRef idx="minor">
-            <a:schemeClr val="lt1"/>
-          </a:fontRef>
-        </p:style>
-        <p:txBody>
-          <a:bodyPr rtlCol="0" anchor="ctr"/>
-          <a:lstStyle/>
-          <a:p>
-            <a:pPr algn="ctr"/>
-          </a:p>
-        </p:txBody>
-      </p:sp>
-      <p:sp>
-        <p:nvSpPr>
-          <p:cNvPr id="30" name="TextBox 29"/>
-          <p:cNvSpPr txBox="1"/>
-          <p:nvPr/>
-        </p:nvSpPr>
-        <p:spPr>
-          <a:xfrm>
-            <a:off x="4910327" y="4370832"/>
-            <a:ext cx="3657600" cy="274320"/>
-          </a:xfrm>
-          <a:prstGeom prst="rect">
-            <a:avLst/>
-          </a:prstGeom>
-          <a:noFill/>
-        </p:spPr>
-        <p:txBody>
-          <a:bodyPr wrap="square" anchor="t" lIns="0" rIns="0" tIns="0" bIns="0">
-            <a:spAutoFit/>
-          </a:bodyPr>
-          <a:lstStyle/>
-          <a:p>
-            <a:pPr algn="l">
-              <a:lnSpc>
-                <a:spcPct val="100000"/>
-              </a:lnSpc>
-              <a:spcAft>
-                <a:spcPts val="300"/>
-              </a:spcAft>
-            </a:pPr>
-            <a:r>
-              <a:rPr sz="1150" b="1">
-                <a:solidFill>
-                  <a:srgbClr val="1B3037"/>
-                </a:solidFill>
-                <a:latin typeface="Barlow"/>
-              </a:rPr>
-              <a:t>Reusable asset</a:t>
-            </a:r>
-          </a:p>
-        </p:txBody>
-      </p:sp>
-      <p:sp>
-        <p:nvSpPr>
-          <p:cNvPr id="31" name="TextBox 30"/>
-          <p:cNvSpPr txBox="1"/>
-          <p:nvPr/>
-        </p:nvSpPr>
-        <p:spPr>
-          <a:xfrm>
-            <a:off x="4910327" y="4626864"/>
-            <a:ext cx="3657600" cy="320040"/>
-          </a:xfrm>
-          <a:prstGeom prst="rect">
-            <a:avLst/>
-          </a:prstGeom>
-          <a:noFill/>
-        </p:spPr>
-        <p:txBody>
-          <a:bodyPr wrap="square" anchor="t" lIns="0" rIns="0" tIns="0" bIns="0">
-            <a:spAutoFit/>
-          </a:bodyPr>
-          <a:lstStyle/>
-          <a:p>
-            <a:pPr algn="l">
-              <a:lnSpc>
-                <a:spcPct val="100000"/>
-              </a:lnSpc>
-              <a:spcAft>
-                <a:spcPts val="300"/>
-              </a:spcAft>
-            </a:pPr>
-            <a:r>
-              <a:rPr sz="950" b="0">
-                <a:solidFill>
-                  <a:srgbClr val="618793"/>
-                </a:solidFill>
-                <a:latin typeface="DM Sans"/>
-              </a:rPr>
-              <a:t>Dialect-agnostic KBs + harness = program-wide capability.</a:t>
+              <a:t>•  A joined derivation (e.g. FX) needs the lookup table's columns — supplied via join-context</a:t>
             </a:r>
           </a:p>
         </p:txBody>

--- a/docs/ReconResolve_Leadership.pptx
+++ b/docs/ReconResolve_Leadership.pptx
@@ -4324,30 +4324,30 @@
         </p:nvSpPr>
         <p:spPr>
           <a:xfrm>
-            <a:off x="548640" y="2240280"/>
-            <a:ext cx="2834640" cy="329184"/>
-          </a:xfrm>
-          <a:prstGeom prst="rect">
-            <a:avLst/>
-          </a:prstGeom>
-          <a:noFill/>
-        </p:spPr>
-        <p:txBody>
-          <a:bodyPr wrap="square" anchor="t" lIns="0" rIns="0" tIns="0" bIns="0">
-            <a:spAutoFit/>
-          </a:bodyPr>
-          <a:lstStyle/>
-          <a:p>
-            <a:pPr algn="l">
-              <a:lnSpc>
-                <a:spcPct val="98000"/>
-              </a:lnSpc>
-              <a:spcAft>
-                <a:spcPts val="300"/>
-              </a:spcAft>
-            </a:pPr>
-            <a:r>
-              <a:rPr sz="1050" b="1">
+            <a:off x="548640" y="2212848"/>
+            <a:ext cx="2834640" cy="310896"/>
+          </a:xfrm>
+          <a:prstGeom prst="rect">
+            <a:avLst/>
+          </a:prstGeom>
+          <a:noFill/>
+        </p:spPr>
+        <p:txBody>
+          <a:bodyPr wrap="square" anchor="t" lIns="0" rIns="0" tIns="0" bIns="0">
+            <a:spAutoFit/>
+          </a:bodyPr>
+          <a:lstStyle/>
+          <a:p>
+            <a:pPr algn="l">
+              <a:lnSpc>
+                <a:spcPct val="95000"/>
+              </a:lnSpc>
+              <a:spcAft>
+                <a:spcPts val="300"/>
+              </a:spcAft>
+            </a:pPr>
+            <a:r>
+              <a:rPr sz="1000" b="1">
                 <a:solidFill>
                   <a:srgbClr val="1B3037"/>
                 </a:solidFill>
@@ -4366,7 +4366,7 @@
         </p:nvSpPr>
         <p:spPr>
           <a:xfrm>
-            <a:off x="3520440" y="2240280"/>
+            <a:off x="3520440" y="2212848"/>
             <a:ext cx="1051560" cy="274320"/>
           </a:xfrm>
           <a:prstGeom prst="rect">
@@ -4389,7 +4389,7 @@
               </a:spcAft>
             </a:pPr>
             <a:r>
-              <a:rPr sz="1000" b="1">
+              <a:rPr sz="950" b="1">
                 <a:solidFill>
                   <a:srgbClr val="00B378"/>
                 </a:solidFill>
@@ -4408,30 +4408,30 @@
         </p:nvSpPr>
         <p:spPr>
           <a:xfrm>
-            <a:off x="4663440" y="2240280"/>
-            <a:ext cx="2834640" cy="329184"/>
-          </a:xfrm>
-          <a:prstGeom prst="rect">
-            <a:avLst/>
-          </a:prstGeom>
-          <a:noFill/>
-        </p:spPr>
-        <p:txBody>
-          <a:bodyPr wrap="square" anchor="t" lIns="0" rIns="0" tIns="0" bIns="0">
-            <a:spAutoFit/>
-          </a:bodyPr>
-          <a:lstStyle/>
-          <a:p>
-            <a:pPr algn="l">
-              <a:lnSpc>
-                <a:spcPct val="98000"/>
-              </a:lnSpc>
-              <a:spcAft>
-                <a:spcPts val="300"/>
-              </a:spcAft>
-            </a:pPr>
-            <a:r>
-              <a:rPr sz="900" b="0">
+            <a:off x="4663440" y="2212848"/>
+            <a:ext cx="2834640" cy="310896"/>
+          </a:xfrm>
+          <a:prstGeom prst="rect">
+            <a:avLst/>
+          </a:prstGeom>
+          <a:noFill/>
+        </p:spPr>
+        <p:txBody>
+          <a:bodyPr wrap="square" anchor="t" lIns="0" rIns="0" tIns="0" bIns="0">
+            <a:spAutoFit/>
+          </a:bodyPr>
+          <a:lstStyle/>
+          <a:p>
+            <a:pPr algn="l">
+              <a:lnSpc>
+                <a:spcPct val="95000"/>
+              </a:lnSpc>
+              <a:spcAft>
+                <a:spcPts val="300"/>
+              </a:spcAft>
+            </a:pPr>
+            <a:r>
+              <a:rPr sz="850" b="0">
                 <a:solidFill>
                   <a:srgbClr val="618793"/>
                 </a:solidFill>
@@ -4450,7 +4450,7 @@
         </p:nvSpPr>
         <p:spPr>
           <a:xfrm>
-            <a:off x="7635240" y="2240280"/>
+            <a:off x="7635240" y="2212848"/>
             <a:ext cx="1143000" cy="274320"/>
           </a:xfrm>
           <a:prstGeom prst="rect">
@@ -4473,7 +4473,7 @@
               </a:spcAft>
             </a:pPr>
             <a:r>
-              <a:rPr sz="900" b="0">
+              <a:rPr sz="850" b="0">
                 <a:solidFill>
                   <a:srgbClr val="1B5161"/>
                 </a:solidFill>
@@ -4492,7 +4492,7 @@
         </p:nvSpPr>
         <p:spPr>
           <a:xfrm>
-            <a:off x="548640" y="2587752"/>
+            <a:off x="548640" y="2519172"/>
             <a:ext cx="8046720" cy="10972"/>
           </a:xfrm>
           <a:prstGeom prst="rect">
@@ -4536,30 +4536,30 @@
         </p:nvSpPr>
         <p:spPr>
           <a:xfrm>
-            <a:off x="548640" y="2606040"/>
-            <a:ext cx="2834640" cy="329184"/>
-          </a:xfrm>
-          <a:prstGeom prst="rect">
-            <a:avLst/>
-          </a:prstGeom>
-          <a:noFill/>
-        </p:spPr>
-        <p:txBody>
-          <a:bodyPr wrap="square" anchor="t" lIns="0" rIns="0" tIns="0" bIns="0">
-            <a:spAutoFit/>
-          </a:bodyPr>
-          <a:lstStyle/>
-          <a:p>
-            <a:pPr algn="l">
-              <a:lnSpc>
-                <a:spcPct val="98000"/>
-              </a:lnSpc>
-              <a:spcAft>
-                <a:spcPts val="300"/>
-              </a:spcAft>
-            </a:pPr>
-            <a:r>
-              <a:rPr sz="1050" b="1">
+            <a:off x="548640" y="2531059"/>
+            <a:ext cx="2834640" cy="310896"/>
+          </a:xfrm>
+          <a:prstGeom prst="rect">
+            <a:avLst/>
+          </a:prstGeom>
+          <a:noFill/>
+        </p:spPr>
+        <p:txBody>
+          <a:bodyPr wrap="square" anchor="t" lIns="0" rIns="0" tIns="0" bIns="0">
+            <a:spAutoFit/>
+          </a:bodyPr>
+          <a:lstStyle/>
+          <a:p>
+            <a:pPr algn="l">
+              <a:lnSpc>
+                <a:spcPct val="95000"/>
+              </a:lnSpc>
+              <a:spcAft>
+                <a:spcPts val="300"/>
+              </a:spcAft>
+            </a:pPr>
+            <a:r>
+              <a:rPr sz="1000" b="1">
                 <a:solidFill>
                   <a:srgbClr val="1B3037"/>
                 </a:solidFill>
@@ -4578,7 +4578,7 @@
         </p:nvSpPr>
         <p:spPr>
           <a:xfrm>
-            <a:off x="3520440" y="2606040"/>
+            <a:off x="3520440" y="2531059"/>
             <a:ext cx="1051560" cy="274320"/>
           </a:xfrm>
           <a:prstGeom prst="rect">
@@ -4601,7 +4601,7 @@
               </a:spcAft>
             </a:pPr>
             <a:r>
-              <a:rPr sz="1000" b="1">
+              <a:rPr sz="950" b="1">
                 <a:solidFill>
                   <a:srgbClr val="00B378"/>
                 </a:solidFill>
@@ -4620,30 +4620,30 @@
         </p:nvSpPr>
         <p:spPr>
           <a:xfrm>
-            <a:off x="4663440" y="2606040"/>
-            <a:ext cx="2834640" cy="329184"/>
-          </a:xfrm>
-          <a:prstGeom prst="rect">
-            <a:avLst/>
-          </a:prstGeom>
-          <a:noFill/>
-        </p:spPr>
-        <p:txBody>
-          <a:bodyPr wrap="square" anchor="t" lIns="0" rIns="0" tIns="0" bIns="0">
-            <a:spAutoFit/>
-          </a:bodyPr>
-          <a:lstStyle/>
-          <a:p>
-            <a:pPr algn="l">
-              <a:lnSpc>
-                <a:spcPct val="98000"/>
-              </a:lnSpc>
-              <a:spcAft>
-                <a:spcPts val="300"/>
-              </a:spcAft>
-            </a:pPr>
-            <a:r>
-              <a:rPr sz="900" b="0">
+            <a:off x="4663440" y="2531059"/>
+            <a:ext cx="2834640" cy="310896"/>
+          </a:xfrm>
+          <a:prstGeom prst="rect">
+            <a:avLst/>
+          </a:prstGeom>
+          <a:noFill/>
+        </p:spPr>
+        <p:txBody>
+          <a:bodyPr wrap="square" anchor="t" lIns="0" rIns="0" tIns="0" bIns="0">
+            <a:spAutoFit/>
+          </a:bodyPr>
+          <a:lstStyle/>
+          <a:p>
+            <a:pPr algn="l">
+              <a:lnSpc>
+                <a:spcPct val="95000"/>
+              </a:lnSpc>
+              <a:spcAft>
+                <a:spcPts val="300"/>
+              </a:spcAft>
+            </a:pPr>
+            <a:r>
+              <a:rPr sz="850" b="0">
                 <a:solidFill>
                   <a:srgbClr val="618793"/>
                 </a:solidFill>
@@ -4662,7 +4662,7 @@
         </p:nvSpPr>
         <p:spPr>
           <a:xfrm>
-            <a:off x="7635240" y="2606040"/>
+            <a:off x="7635240" y="2531059"/>
             <a:ext cx="1143000" cy="274320"/>
           </a:xfrm>
           <a:prstGeom prst="rect">
@@ -4685,7 +4685,7 @@
               </a:spcAft>
             </a:pPr>
             <a:r>
-              <a:rPr sz="900" b="0">
+              <a:rPr sz="850" b="0">
                 <a:solidFill>
                   <a:srgbClr val="1B5161"/>
                 </a:solidFill>
@@ -4704,7 +4704,7 @@
         </p:nvSpPr>
         <p:spPr>
           <a:xfrm>
-            <a:off x="548640" y="2953512"/>
+            <a:off x="548640" y="2837383"/>
             <a:ext cx="8046720" cy="10972"/>
           </a:xfrm>
           <a:prstGeom prst="rect">
@@ -4748,30 +4748,30 @@
         </p:nvSpPr>
         <p:spPr>
           <a:xfrm>
-            <a:off x="548640" y="2971800"/>
-            <a:ext cx="2834640" cy="329184"/>
-          </a:xfrm>
-          <a:prstGeom prst="rect">
-            <a:avLst/>
-          </a:prstGeom>
-          <a:noFill/>
-        </p:spPr>
-        <p:txBody>
-          <a:bodyPr wrap="square" anchor="t" lIns="0" rIns="0" tIns="0" bIns="0">
-            <a:spAutoFit/>
-          </a:bodyPr>
-          <a:lstStyle/>
-          <a:p>
-            <a:pPr algn="l">
-              <a:lnSpc>
-                <a:spcPct val="98000"/>
-              </a:lnSpc>
-              <a:spcAft>
-                <a:spcPts val="300"/>
-              </a:spcAft>
-            </a:pPr>
-            <a:r>
-              <a:rPr sz="1050" b="1">
+            <a:off x="548640" y="2849270"/>
+            <a:ext cx="2834640" cy="310896"/>
+          </a:xfrm>
+          <a:prstGeom prst="rect">
+            <a:avLst/>
+          </a:prstGeom>
+          <a:noFill/>
+        </p:spPr>
+        <p:txBody>
+          <a:bodyPr wrap="square" anchor="t" lIns="0" rIns="0" tIns="0" bIns="0">
+            <a:spAutoFit/>
+          </a:bodyPr>
+          <a:lstStyle/>
+          <a:p>
+            <a:pPr algn="l">
+              <a:lnSpc>
+                <a:spcPct val="95000"/>
+              </a:lnSpc>
+              <a:spcAft>
+                <a:spcPts val="300"/>
+              </a:spcAft>
+            </a:pPr>
+            <a:r>
+              <a:rPr sz="1000" b="1">
                 <a:solidFill>
                   <a:srgbClr val="1B3037"/>
                 </a:solidFill>
@@ -4790,7 +4790,7 @@
         </p:nvSpPr>
         <p:spPr>
           <a:xfrm>
-            <a:off x="3520440" y="2971800"/>
+            <a:off x="3520440" y="2849270"/>
             <a:ext cx="1051560" cy="274320"/>
           </a:xfrm>
           <a:prstGeom prst="rect">
@@ -4813,7 +4813,7 @@
               </a:spcAft>
             </a:pPr>
             <a:r>
-              <a:rPr sz="1000" b="1">
+              <a:rPr sz="950" b="1">
                 <a:solidFill>
                   <a:srgbClr val="00B378"/>
                 </a:solidFill>
@@ -4832,30 +4832,30 @@
         </p:nvSpPr>
         <p:spPr>
           <a:xfrm>
-            <a:off x="4663440" y="2971800"/>
-            <a:ext cx="2834640" cy="329184"/>
-          </a:xfrm>
-          <a:prstGeom prst="rect">
-            <a:avLst/>
-          </a:prstGeom>
-          <a:noFill/>
-        </p:spPr>
-        <p:txBody>
-          <a:bodyPr wrap="square" anchor="t" lIns="0" rIns="0" tIns="0" bIns="0">
-            <a:spAutoFit/>
-          </a:bodyPr>
-          <a:lstStyle/>
-          <a:p>
-            <a:pPr algn="l">
-              <a:lnSpc>
-                <a:spcPct val="98000"/>
-              </a:lnSpc>
-              <a:spcAft>
-                <a:spcPts val="300"/>
-              </a:spcAft>
-            </a:pPr>
-            <a:r>
-              <a:rPr sz="900" b="0">
+            <a:off x="4663440" y="2849270"/>
+            <a:ext cx="2834640" cy="310896"/>
+          </a:xfrm>
+          <a:prstGeom prst="rect">
+            <a:avLst/>
+          </a:prstGeom>
+          <a:noFill/>
+        </p:spPr>
+        <p:txBody>
+          <a:bodyPr wrap="square" anchor="t" lIns="0" rIns="0" tIns="0" bIns="0">
+            <a:spAutoFit/>
+          </a:bodyPr>
+          <a:lstStyle/>
+          <a:p>
+            <a:pPr algn="l">
+              <a:lnSpc>
+                <a:spcPct val="95000"/>
+              </a:lnSpc>
+              <a:spcAft>
+                <a:spcPts val="300"/>
+              </a:spcAft>
+            </a:pPr>
+            <a:r>
+              <a:rPr sz="850" b="0">
                 <a:solidFill>
                   <a:srgbClr val="618793"/>
                 </a:solidFill>
@@ -4874,7 +4874,7 @@
         </p:nvSpPr>
         <p:spPr>
           <a:xfrm>
-            <a:off x="7635240" y="2971800"/>
+            <a:off x="7635240" y="2849270"/>
             <a:ext cx="1143000" cy="274320"/>
           </a:xfrm>
           <a:prstGeom prst="rect">
@@ -4897,7 +4897,7 @@
               </a:spcAft>
             </a:pPr>
             <a:r>
-              <a:rPr sz="900" b="0">
+              <a:rPr sz="850" b="0">
                 <a:solidFill>
                   <a:srgbClr val="1B5161"/>
                 </a:solidFill>
@@ -4916,7 +4916,7 @@
         </p:nvSpPr>
         <p:spPr>
           <a:xfrm>
-            <a:off x="548640" y="3319272"/>
+            <a:off x="548640" y="3155594"/>
             <a:ext cx="8046720" cy="10972"/>
           </a:xfrm>
           <a:prstGeom prst="rect">
@@ -4960,30 +4960,30 @@
         </p:nvSpPr>
         <p:spPr>
           <a:xfrm>
-            <a:off x="548640" y="3337560"/>
-            <a:ext cx="2834640" cy="329184"/>
-          </a:xfrm>
-          <a:prstGeom prst="rect">
-            <a:avLst/>
-          </a:prstGeom>
-          <a:noFill/>
-        </p:spPr>
-        <p:txBody>
-          <a:bodyPr wrap="square" anchor="t" lIns="0" rIns="0" tIns="0" bIns="0">
-            <a:spAutoFit/>
-          </a:bodyPr>
-          <a:lstStyle/>
-          <a:p>
-            <a:pPr algn="l">
-              <a:lnSpc>
-                <a:spcPct val="98000"/>
-              </a:lnSpc>
-              <a:spcAft>
-                <a:spcPts val="300"/>
-              </a:spcAft>
-            </a:pPr>
-            <a:r>
-              <a:rPr sz="1050" b="1">
+            <a:off x="548640" y="3167481"/>
+            <a:ext cx="2834640" cy="310896"/>
+          </a:xfrm>
+          <a:prstGeom prst="rect">
+            <a:avLst/>
+          </a:prstGeom>
+          <a:noFill/>
+        </p:spPr>
+        <p:txBody>
+          <a:bodyPr wrap="square" anchor="t" lIns="0" rIns="0" tIns="0" bIns="0">
+            <a:spAutoFit/>
+          </a:bodyPr>
+          <a:lstStyle/>
+          <a:p>
+            <a:pPr algn="l">
+              <a:lnSpc>
+                <a:spcPct val="95000"/>
+              </a:lnSpc>
+              <a:spcAft>
+                <a:spcPts val="300"/>
+              </a:spcAft>
+            </a:pPr>
+            <a:r>
+              <a:rPr sz="1000" b="1">
                 <a:solidFill>
                   <a:srgbClr val="1B3037"/>
                 </a:solidFill>
@@ -5002,7 +5002,7 @@
         </p:nvSpPr>
         <p:spPr>
           <a:xfrm>
-            <a:off x="3520440" y="3337560"/>
+            <a:off x="3520440" y="3167481"/>
             <a:ext cx="1051560" cy="274320"/>
           </a:xfrm>
           <a:prstGeom prst="rect">
@@ -5025,7 +5025,7 @@
               </a:spcAft>
             </a:pPr>
             <a:r>
-              <a:rPr sz="1000" b="1">
+              <a:rPr sz="950" b="1">
                 <a:solidFill>
                   <a:srgbClr val="00B378"/>
                 </a:solidFill>
@@ -5044,30 +5044,30 @@
         </p:nvSpPr>
         <p:spPr>
           <a:xfrm>
-            <a:off x="4663440" y="3337560"/>
-            <a:ext cx="2834640" cy="329184"/>
-          </a:xfrm>
-          <a:prstGeom prst="rect">
-            <a:avLst/>
-          </a:prstGeom>
-          <a:noFill/>
-        </p:spPr>
-        <p:txBody>
-          <a:bodyPr wrap="square" anchor="t" lIns="0" rIns="0" tIns="0" bIns="0">
-            <a:spAutoFit/>
-          </a:bodyPr>
-          <a:lstStyle/>
-          <a:p>
-            <a:pPr algn="l">
-              <a:lnSpc>
-                <a:spcPct val="98000"/>
-              </a:lnSpc>
-              <a:spcAft>
-                <a:spcPts val="300"/>
-              </a:spcAft>
-            </a:pPr>
-            <a:r>
-              <a:rPr sz="900" b="0">
+            <a:off x="4663440" y="3167481"/>
+            <a:ext cx="2834640" cy="310896"/>
+          </a:xfrm>
+          <a:prstGeom prst="rect">
+            <a:avLst/>
+          </a:prstGeom>
+          <a:noFill/>
+        </p:spPr>
+        <p:txBody>
+          <a:bodyPr wrap="square" anchor="t" lIns="0" rIns="0" tIns="0" bIns="0">
+            <a:spAutoFit/>
+          </a:bodyPr>
+          <a:lstStyle/>
+          <a:p>
+            <a:pPr algn="l">
+              <a:lnSpc>
+                <a:spcPct val="95000"/>
+              </a:lnSpc>
+              <a:spcAft>
+                <a:spcPts val="300"/>
+              </a:spcAft>
+            </a:pPr>
+            <a:r>
+              <a:rPr sz="850" b="0">
                 <a:solidFill>
                   <a:srgbClr val="618793"/>
                 </a:solidFill>
@@ -5086,7 +5086,7 @@
         </p:nvSpPr>
         <p:spPr>
           <a:xfrm>
-            <a:off x="7635240" y="3337560"/>
+            <a:off x="7635240" y="3167481"/>
             <a:ext cx="1143000" cy="274320"/>
           </a:xfrm>
           <a:prstGeom prst="rect">
@@ -5109,7 +5109,7 @@
               </a:spcAft>
             </a:pPr>
             <a:r>
-              <a:rPr sz="900" b="0">
+              <a:rPr sz="850" b="0">
                 <a:solidFill>
                   <a:srgbClr val="1B5161"/>
                 </a:solidFill>
@@ -5128,7 +5128,7 @@
         </p:nvSpPr>
         <p:spPr>
           <a:xfrm>
-            <a:off x="548640" y="3685032"/>
+            <a:off x="548640" y="3473805"/>
             <a:ext cx="8046720" cy="10972"/>
           </a:xfrm>
           <a:prstGeom prst="rect">
@@ -5172,30 +5172,30 @@
         </p:nvSpPr>
         <p:spPr>
           <a:xfrm>
-            <a:off x="548640" y="3703320"/>
-            <a:ext cx="2834640" cy="329184"/>
-          </a:xfrm>
-          <a:prstGeom prst="rect">
-            <a:avLst/>
-          </a:prstGeom>
-          <a:noFill/>
-        </p:spPr>
-        <p:txBody>
-          <a:bodyPr wrap="square" anchor="t" lIns="0" rIns="0" tIns="0" bIns="0">
-            <a:spAutoFit/>
-          </a:bodyPr>
-          <a:lstStyle/>
-          <a:p>
-            <a:pPr algn="l">
-              <a:lnSpc>
-                <a:spcPct val="98000"/>
-              </a:lnSpc>
-              <a:spcAft>
-                <a:spcPts val="300"/>
-              </a:spcAft>
-            </a:pPr>
-            <a:r>
-              <a:rPr sz="1050" b="1">
+            <a:off x="548640" y="3485692"/>
+            <a:ext cx="2834640" cy="310896"/>
+          </a:xfrm>
+          <a:prstGeom prst="rect">
+            <a:avLst/>
+          </a:prstGeom>
+          <a:noFill/>
+        </p:spPr>
+        <p:txBody>
+          <a:bodyPr wrap="square" anchor="t" lIns="0" rIns="0" tIns="0" bIns="0">
+            <a:spAutoFit/>
+          </a:bodyPr>
+          <a:lstStyle/>
+          <a:p>
+            <a:pPr algn="l">
+              <a:lnSpc>
+                <a:spcPct val="95000"/>
+              </a:lnSpc>
+              <a:spcAft>
+                <a:spcPts val="300"/>
+              </a:spcAft>
+            </a:pPr>
+            <a:r>
+              <a:rPr sz="1000" b="1">
                 <a:solidFill>
                   <a:srgbClr val="1B3037"/>
                 </a:solidFill>
@@ -5214,7 +5214,7 @@
         </p:nvSpPr>
         <p:spPr>
           <a:xfrm>
-            <a:off x="3520440" y="3703320"/>
+            <a:off x="3520440" y="3485692"/>
             <a:ext cx="1051560" cy="274320"/>
           </a:xfrm>
           <a:prstGeom prst="rect">
@@ -5237,7 +5237,7 @@
               </a:spcAft>
             </a:pPr>
             <a:r>
-              <a:rPr sz="1000" b="1">
+              <a:rPr sz="950" b="1">
                 <a:solidFill>
                   <a:srgbClr val="00B378"/>
                 </a:solidFill>
@@ -5256,30 +5256,30 @@
         </p:nvSpPr>
         <p:spPr>
           <a:xfrm>
-            <a:off x="4663440" y="3703320"/>
-            <a:ext cx="2834640" cy="329184"/>
-          </a:xfrm>
-          <a:prstGeom prst="rect">
-            <a:avLst/>
-          </a:prstGeom>
-          <a:noFill/>
-        </p:spPr>
-        <p:txBody>
-          <a:bodyPr wrap="square" anchor="t" lIns="0" rIns="0" tIns="0" bIns="0">
-            <a:spAutoFit/>
-          </a:bodyPr>
-          <a:lstStyle/>
-          <a:p>
-            <a:pPr algn="l">
-              <a:lnSpc>
-                <a:spcPct val="98000"/>
-              </a:lnSpc>
-              <a:spcAft>
-                <a:spcPts val="300"/>
-              </a:spcAft>
-            </a:pPr>
-            <a:r>
-              <a:rPr sz="900" b="0">
+            <a:off x="4663440" y="3485692"/>
+            <a:ext cx="2834640" cy="310896"/>
+          </a:xfrm>
+          <a:prstGeom prst="rect">
+            <a:avLst/>
+          </a:prstGeom>
+          <a:noFill/>
+        </p:spPr>
+        <p:txBody>
+          <a:bodyPr wrap="square" anchor="t" lIns="0" rIns="0" tIns="0" bIns="0">
+            <a:spAutoFit/>
+          </a:bodyPr>
+          <a:lstStyle/>
+          <a:p>
+            <a:pPr algn="l">
+              <a:lnSpc>
+                <a:spcPct val="95000"/>
+              </a:lnSpc>
+              <a:spcAft>
+                <a:spcPts val="300"/>
+              </a:spcAft>
+            </a:pPr>
+            <a:r>
+              <a:rPr sz="850" b="0">
                 <a:solidFill>
                   <a:srgbClr val="618793"/>
                 </a:solidFill>
@@ -5298,7 +5298,7 @@
         </p:nvSpPr>
         <p:spPr>
           <a:xfrm>
-            <a:off x="7635240" y="3703320"/>
+            <a:off x="7635240" y="3485692"/>
             <a:ext cx="1143000" cy="274320"/>
           </a:xfrm>
           <a:prstGeom prst="rect">
@@ -5321,7 +5321,7 @@
               </a:spcAft>
             </a:pPr>
             <a:r>
-              <a:rPr sz="900" b="0">
+              <a:rPr sz="850" b="0">
                 <a:solidFill>
                   <a:srgbClr val="1B5161"/>
                 </a:solidFill>
@@ -5340,7 +5340,7 @@
         </p:nvSpPr>
         <p:spPr>
           <a:xfrm>
-            <a:off x="548640" y="4050791"/>
+            <a:off x="548640" y="3792016"/>
             <a:ext cx="8046720" cy="10972"/>
           </a:xfrm>
           <a:prstGeom prst="rect">
@@ -5384,30 +5384,30 @@
         </p:nvSpPr>
         <p:spPr>
           <a:xfrm>
-            <a:off x="548640" y="4069080"/>
-            <a:ext cx="2834640" cy="329184"/>
-          </a:xfrm>
-          <a:prstGeom prst="rect">
-            <a:avLst/>
-          </a:prstGeom>
-          <a:noFill/>
-        </p:spPr>
-        <p:txBody>
-          <a:bodyPr wrap="square" anchor="t" lIns="0" rIns="0" tIns="0" bIns="0">
-            <a:spAutoFit/>
-          </a:bodyPr>
-          <a:lstStyle/>
-          <a:p>
-            <a:pPr algn="l">
-              <a:lnSpc>
-                <a:spcPct val="98000"/>
-              </a:lnSpc>
-              <a:spcAft>
-                <a:spcPts val="300"/>
-              </a:spcAft>
-            </a:pPr>
-            <a:r>
-              <a:rPr sz="1050" b="1">
+            <a:off x="548640" y="3803903"/>
+            <a:ext cx="2834640" cy="310896"/>
+          </a:xfrm>
+          <a:prstGeom prst="rect">
+            <a:avLst/>
+          </a:prstGeom>
+          <a:noFill/>
+        </p:spPr>
+        <p:txBody>
+          <a:bodyPr wrap="square" anchor="t" lIns="0" rIns="0" tIns="0" bIns="0">
+            <a:spAutoFit/>
+          </a:bodyPr>
+          <a:lstStyle/>
+          <a:p>
+            <a:pPr algn="l">
+              <a:lnSpc>
+                <a:spcPct val="95000"/>
+              </a:lnSpc>
+              <a:spcAft>
+                <a:spcPts val="300"/>
+              </a:spcAft>
+            </a:pPr>
+            <a:r>
+              <a:rPr sz="1000" b="1">
                 <a:solidFill>
                   <a:srgbClr val="1B3037"/>
                 </a:solidFill>
@@ -5426,7 +5426,7 @@
         </p:nvSpPr>
         <p:spPr>
           <a:xfrm>
-            <a:off x="3520440" y="4069080"/>
+            <a:off x="3520440" y="3803903"/>
             <a:ext cx="1051560" cy="274320"/>
           </a:xfrm>
           <a:prstGeom prst="rect">
@@ -5449,7 +5449,7 @@
               </a:spcAft>
             </a:pPr>
             <a:r>
-              <a:rPr sz="1000" b="1">
+              <a:rPr sz="950" b="1">
                 <a:solidFill>
                   <a:srgbClr val="00B378"/>
                 </a:solidFill>
@@ -5468,30 +5468,30 @@
         </p:nvSpPr>
         <p:spPr>
           <a:xfrm>
-            <a:off x="4663440" y="4069080"/>
-            <a:ext cx="2834640" cy="329184"/>
-          </a:xfrm>
-          <a:prstGeom prst="rect">
-            <a:avLst/>
-          </a:prstGeom>
-          <a:noFill/>
-        </p:spPr>
-        <p:txBody>
-          <a:bodyPr wrap="square" anchor="t" lIns="0" rIns="0" tIns="0" bIns="0">
-            <a:spAutoFit/>
-          </a:bodyPr>
-          <a:lstStyle/>
-          <a:p>
-            <a:pPr algn="l">
-              <a:lnSpc>
-                <a:spcPct val="98000"/>
-              </a:lnSpc>
-              <a:spcAft>
-                <a:spcPts val="300"/>
-              </a:spcAft>
-            </a:pPr>
-            <a:r>
-              <a:rPr sz="900" b="0">
+            <a:off x="4663440" y="3803903"/>
+            <a:ext cx="2834640" cy="310896"/>
+          </a:xfrm>
+          <a:prstGeom prst="rect">
+            <a:avLst/>
+          </a:prstGeom>
+          <a:noFill/>
+        </p:spPr>
+        <p:txBody>
+          <a:bodyPr wrap="square" anchor="t" lIns="0" rIns="0" tIns="0" bIns="0">
+            <a:spAutoFit/>
+          </a:bodyPr>
+          <a:lstStyle/>
+          <a:p>
+            <a:pPr algn="l">
+              <a:lnSpc>
+                <a:spcPct val="95000"/>
+              </a:lnSpc>
+              <a:spcAft>
+                <a:spcPts val="300"/>
+              </a:spcAft>
+            </a:pPr>
+            <a:r>
+              <a:rPr sz="850" b="0">
                 <a:solidFill>
                   <a:srgbClr val="618793"/>
                 </a:solidFill>
@@ -5510,7 +5510,7 @@
         </p:nvSpPr>
         <p:spPr>
           <a:xfrm>
-            <a:off x="7635240" y="4069080"/>
+            <a:off x="7635240" y="3803903"/>
             <a:ext cx="1143000" cy="274320"/>
           </a:xfrm>
           <a:prstGeom prst="rect">
@@ -5533,7 +5533,7 @@
               </a:spcAft>
             </a:pPr>
             <a:r>
-              <a:rPr sz="900" b="0">
+              <a:rPr sz="850" b="0">
                 <a:solidFill>
                   <a:srgbClr val="1B5161"/>
                 </a:solidFill>
@@ -5552,7 +5552,7 @@
         </p:nvSpPr>
         <p:spPr>
           <a:xfrm>
-            <a:off x="548640" y="4416552"/>
+            <a:off x="548640" y="4110227"/>
             <a:ext cx="8046720" cy="10972"/>
           </a:xfrm>
           <a:prstGeom prst="rect">
@@ -5596,36 +5596,36 @@
         </p:nvSpPr>
         <p:spPr>
           <a:xfrm>
-            <a:off x="548640" y="4434840"/>
-            <a:ext cx="2834640" cy="329184"/>
-          </a:xfrm>
-          <a:prstGeom prst="rect">
-            <a:avLst/>
-          </a:prstGeom>
-          <a:noFill/>
-        </p:spPr>
-        <p:txBody>
-          <a:bodyPr wrap="square" anchor="t" lIns="0" rIns="0" tIns="0" bIns="0">
-            <a:spAutoFit/>
-          </a:bodyPr>
-          <a:lstStyle/>
-          <a:p>
-            <a:pPr algn="l">
-              <a:lnSpc>
-                <a:spcPct val="98000"/>
-              </a:lnSpc>
-              <a:spcAft>
-                <a:spcPts val="300"/>
-              </a:spcAft>
-            </a:pPr>
-            <a:r>
-              <a:rPr sz="1050" b="1">
+            <a:off x="548640" y="4122115"/>
+            <a:ext cx="2834640" cy="310896"/>
+          </a:xfrm>
+          <a:prstGeom prst="rect">
+            <a:avLst/>
+          </a:prstGeom>
+          <a:noFill/>
+        </p:spPr>
+        <p:txBody>
+          <a:bodyPr wrap="square" anchor="t" lIns="0" rIns="0" tIns="0" bIns="0">
+            <a:spAutoFit/>
+          </a:bodyPr>
+          <a:lstStyle/>
+          <a:p>
+            <a:pPr algn="l">
+              <a:lnSpc>
+                <a:spcPct val="95000"/>
+              </a:lnSpc>
+              <a:spcAft>
+                <a:spcPts val="300"/>
+              </a:spcAft>
+            </a:pPr>
+            <a:r>
+              <a:rPr sz="1000" b="1">
                 <a:solidFill>
                   <a:srgbClr val="1B3037"/>
                 </a:solidFill>
                 <a:latin typeface="Barlow"/>
               </a:rPr>
-              <a:t>Scale / prod-volume</a:t>
+              <a:t>UC lineage trace-back + blast radius</a:t>
             </a:r>
           </a:p>
         </p:txBody>
@@ -5638,7 +5638,7 @@
         </p:nvSpPr>
         <p:spPr>
           <a:xfrm>
-            <a:off x="3520440" y="4434840"/>
+            <a:off x="3520440" y="4122115"/>
             <a:ext cx="1051560" cy="274320"/>
           </a:xfrm>
           <a:prstGeom prst="rect">
@@ -5661,7 +5661,7 @@
               </a:spcAft>
             </a:pPr>
             <a:r>
-              <a:rPr sz="1000" b="1">
+              <a:rPr sz="950" b="1">
                 <a:solidFill>
                   <a:srgbClr val="00B378"/>
                 </a:solidFill>
@@ -5680,36 +5680,36 @@
         </p:nvSpPr>
         <p:spPr>
           <a:xfrm>
-            <a:off x="4663440" y="4434840"/>
-            <a:ext cx="2834640" cy="329184"/>
-          </a:xfrm>
-          <a:prstGeom prst="rect">
-            <a:avLst/>
-          </a:prstGeom>
-          <a:noFill/>
-        </p:spPr>
-        <p:txBody>
-          <a:bodyPr wrap="square" anchor="t" lIns="0" rIns="0" tIns="0" bIns="0">
-            <a:spAutoFit/>
-          </a:bodyPr>
-          <a:lstStyle/>
-          <a:p>
-            <a:pPr algn="l">
-              <a:lnSpc>
-                <a:spcPct val="98000"/>
-              </a:lnSpc>
-              <a:spcAft>
-                <a:spcPts val="300"/>
-              </a:spcAft>
-            </a:pPr>
-            <a:r>
-              <a:rPr sz="900" b="0">
+            <a:off x="4663440" y="4122115"/>
+            <a:ext cx="2834640" cy="310896"/>
+          </a:xfrm>
+          <a:prstGeom prst="rect">
+            <a:avLst/>
+          </a:prstGeom>
+          <a:noFill/>
+        </p:spPr>
+        <p:txBody>
+          <a:bodyPr wrap="square" anchor="t" lIns="0" rIns="0" tIns="0" bIns="0">
+            <a:spAutoFit/>
+          </a:bodyPr>
+          <a:lstStyle/>
+          <a:p>
+            <a:pPr algn="l">
+              <a:lnSpc>
+                <a:spcPct val="95000"/>
+              </a:lnSpc>
+              <a:spcAft>
+                <a:spcPts val="300"/>
+              </a:spcAft>
+            </a:pPr>
+            <a:r>
+              <a:rPr sz="850" b="0">
                 <a:solidFill>
                   <a:srgbClr val="618793"/>
                 </a:solidFill>
                 <a:latin typeface="DM Sans"/>
               </a:rPr>
-              <a:t>50M rows · 8.5 GB reconciled + RCA</a:t>
+              <a:t>walks column/table lineage to the root; downstream consumers</a:t>
             </a:r>
           </a:p>
         </p:txBody>
@@ -5722,7 +5722,7 @@
         </p:nvSpPr>
         <p:spPr>
           <a:xfrm>
-            <a:off x="7635240" y="4434840"/>
+            <a:off x="7635240" y="4122115"/>
             <a:ext cx="1143000" cy="274320"/>
           </a:xfrm>
           <a:prstGeom prst="rect">
@@ -5745,13 +5745,13 @@
               </a:spcAft>
             </a:pPr>
             <a:r>
-              <a:rPr sz="900" b="0">
+              <a:rPr sz="850" b="0">
                 <a:solidFill>
                   <a:srgbClr val="1B5161"/>
                 </a:solidFill>
                 <a:latin typeface="DM Sans"/>
               </a:rPr>
-              <a:t>All</a:t>
+              <a:t>App·CLI·Skill</a:t>
             </a:r>
           </a:p>
         </p:txBody>
@@ -5764,7 +5764,7 @@
         </p:nvSpPr>
         <p:spPr>
           <a:xfrm>
-            <a:off x="548640" y="4782312"/>
+            <a:off x="548640" y="4428439"/>
             <a:ext cx="8046720" cy="10972"/>
           </a:xfrm>
           <a:prstGeom prst="rect">
@@ -5808,36 +5808,36 @@
         </p:nvSpPr>
         <p:spPr>
           <a:xfrm>
-            <a:off x="548640" y="4800600"/>
-            <a:ext cx="2834640" cy="329184"/>
-          </a:xfrm>
-          <a:prstGeom prst="rect">
-            <a:avLst/>
-          </a:prstGeom>
-          <a:noFill/>
-        </p:spPr>
-        <p:txBody>
-          <a:bodyPr wrap="square" anchor="t" lIns="0" rIns="0" tIns="0" bIns="0">
-            <a:spAutoFit/>
-          </a:bodyPr>
-          <a:lstStyle/>
-          <a:p>
-            <a:pPr algn="l">
-              <a:lnSpc>
-                <a:spcPct val="98000"/>
-              </a:lnSpc>
-              <a:spcAft>
-                <a:spcPts val="300"/>
-              </a:spcAft>
-            </a:pPr>
-            <a:r>
-              <a:rPr sz="1050" b="1">
+            <a:off x="548640" y="4440326"/>
+            <a:ext cx="2834640" cy="310896"/>
+          </a:xfrm>
+          <a:prstGeom prst="rect">
+            <a:avLst/>
+          </a:prstGeom>
+          <a:noFill/>
+        </p:spPr>
+        <p:txBody>
+          <a:bodyPr wrap="square" anchor="t" lIns="0" rIns="0" tIns="0" bIns="0">
+            <a:spAutoFit/>
+          </a:bodyPr>
+          <a:lstStyle/>
+          <a:p>
+            <a:pPr algn="l">
+              <a:lnSpc>
+                <a:spcPct val="95000"/>
+              </a:lnSpc>
+              <a:spcAft>
+                <a:spcPts val="300"/>
+              </a:spcAft>
+            </a:pPr>
+            <a:r>
+              <a:rPr sz="1000" b="1">
                 <a:solidFill>
                   <a:srgbClr val="1B3037"/>
                 </a:solidFill>
                 <a:latin typeface="Barlow"/>
               </a:rPr>
-              <a:t>Concurrency</a:t>
+              <a:t>Scale / prod-volume</a:t>
             </a:r>
           </a:p>
         </p:txBody>
@@ -5850,7 +5850,7 @@
         </p:nvSpPr>
         <p:spPr>
           <a:xfrm>
-            <a:off x="3520440" y="4800600"/>
+            <a:off x="3520440" y="4440326"/>
             <a:ext cx="1051560" cy="274320"/>
           </a:xfrm>
           <a:prstGeom prst="rect">
@@ -5873,7 +5873,7 @@
               </a:spcAft>
             </a:pPr>
             <a:r>
-              <a:rPr sz="1000" b="1">
+              <a:rPr sz="950" b="1">
                 <a:solidFill>
                   <a:srgbClr val="00B378"/>
                 </a:solidFill>
@@ -5892,36 +5892,36 @@
         </p:nvSpPr>
         <p:spPr>
           <a:xfrm>
-            <a:off x="4663440" y="4800600"/>
-            <a:ext cx="2834640" cy="329184"/>
-          </a:xfrm>
-          <a:prstGeom prst="rect">
-            <a:avLst/>
-          </a:prstGeom>
-          <a:noFill/>
-        </p:spPr>
-        <p:txBody>
-          <a:bodyPr wrap="square" anchor="t" lIns="0" rIns="0" tIns="0" bIns="0">
-            <a:spAutoFit/>
-          </a:bodyPr>
-          <a:lstStyle/>
-          <a:p>
-            <a:pPr algn="l">
-              <a:lnSpc>
-                <a:spcPct val="98000"/>
-              </a:lnSpc>
-              <a:spcAft>
-                <a:spcPts val="300"/>
-              </a:spcAft>
-            </a:pPr>
-            <a:r>
-              <a:rPr sz="900" b="0">
+            <a:off x="4663440" y="4440326"/>
+            <a:ext cx="2834640" cy="310896"/>
+          </a:xfrm>
+          <a:prstGeom prst="rect">
+            <a:avLst/>
+          </a:prstGeom>
+          <a:noFill/>
+        </p:spPr>
+        <p:txBody>
+          <a:bodyPr wrap="square" anchor="t" lIns="0" rIns="0" tIns="0" bIns="0">
+            <a:spAutoFit/>
+          </a:bodyPr>
+          <a:lstStyle/>
+          <a:p>
+            <a:pPr algn="l">
+              <a:lnSpc>
+                <a:spcPct val="95000"/>
+              </a:lnSpc>
+              <a:spcAft>
+                <a:spcPts val="300"/>
+              </a:spcAft>
+            </a:pPr>
+            <a:r>
+              <a:rPr sz="850" b="0">
                 <a:solidFill>
                   <a:srgbClr val="618793"/>
                 </a:solidFill>
                 <a:latin typeface="DM Sans"/>
               </a:rPr>
-              <a:t>6 concurrent runs · ~500 s wall</a:t>
+              <a:t>50M rows · 8.5 GB reconciled + RCA</a:t>
             </a:r>
           </a:p>
         </p:txBody>
@@ -5934,7 +5934,7 @@
         </p:nvSpPr>
         <p:spPr>
           <a:xfrm>
-            <a:off x="7635240" y="4800600"/>
+            <a:off x="7635240" y="4440326"/>
             <a:ext cx="1143000" cy="274320"/>
           </a:xfrm>
           <a:prstGeom prst="rect">
@@ -5957,7 +5957,7 @@
               </a:spcAft>
             </a:pPr>
             <a:r>
-              <a:rPr sz="900" b="0">
+              <a:rPr sz="850" b="0">
                 <a:solidFill>
                   <a:srgbClr val="1B5161"/>
                 </a:solidFill>
@@ -5976,7 +5976,219 @@
         </p:nvSpPr>
         <p:spPr>
           <a:xfrm>
-            <a:off x="548640" y="5148072"/>
+            <a:off x="548640" y="4746650"/>
+            <a:ext cx="8046720" cy="10972"/>
+          </a:xfrm>
+          <a:prstGeom prst="rect">
+            <a:avLst/>
+          </a:prstGeom>
+          <a:solidFill>
+            <a:srgbClr val="F1F1F1"/>
+          </a:solidFill>
+          <a:ln>
+            <a:noFill/>
+          </a:ln>
+          <a:effectLst/>
+        </p:spPr>
+        <p:style>
+          <a:lnRef idx="1">
+            <a:schemeClr val="accent1"/>
+          </a:lnRef>
+          <a:fillRef idx="3">
+            <a:schemeClr val="accent1"/>
+          </a:fillRef>
+          <a:effectRef idx="2">
+            <a:schemeClr val="accent1"/>
+          </a:effectRef>
+          <a:fontRef idx="minor">
+            <a:schemeClr val="lt1"/>
+          </a:fontRef>
+        </p:style>
+        <p:txBody>
+          <a:bodyPr rtlCol="0" anchor="ctr"/>
+          <a:lstStyle/>
+          <a:p>
+            <a:pPr algn="ctr"/>
+          </a:p>
+        </p:txBody>
+      </p:sp>
+      <p:sp>
+        <p:nvSpPr>
+          <p:cNvPr id="51" name="TextBox 50"/>
+          <p:cNvSpPr txBox="1"/>
+          <p:nvPr/>
+        </p:nvSpPr>
+        <p:spPr>
+          <a:xfrm>
+            <a:off x="548640" y="4758537"/>
+            <a:ext cx="2834640" cy="310896"/>
+          </a:xfrm>
+          <a:prstGeom prst="rect">
+            <a:avLst/>
+          </a:prstGeom>
+          <a:noFill/>
+        </p:spPr>
+        <p:txBody>
+          <a:bodyPr wrap="square" anchor="t" lIns="0" rIns="0" tIns="0" bIns="0">
+            <a:spAutoFit/>
+          </a:bodyPr>
+          <a:lstStyle/>
+          <a:p>
+            <a:pPr algn="l">
+              <a:lnSpc>
+                <a:spcPct val="95000"/>
+              </a:lnSpc>
+              <a:spcAft>
+                <a:spcPts val="300"/>
+              </a:spcAft>
+            </a:pPr>
+            <a:r>
+              <a:rPr sz="1000" b="1">
+                <a:solidFill>
+                  <a:srgbClr val="1B3037"/>
+                </a:solidFill>
+                <a:latin typeface="Barlow"/>
+              </a:rPr>
+              <a:t>Concurrency</a:t>
+            </a:r>
+          </a:p>
+        </p:txBody>
+      </p:sp>
+      <p:sp>
+        <p:nvSpPr>
+          <p:cNvPr id="52" name="TextBox 51"/>
+          <p:cNvSpPr txBox="1"/>
+          <p:nvPr/>
+        </p:nvSpPr>
+        <p:spPr>
+          <a:xfrm>
+            <a:off x="3520440" y="4758537"/>
+            <a:ext cx="1051560" cy="274320"/>
+          </a:xfrm>
+          <a:prstGeom prst="rect">
+            <a:avLst/>
+          </a:prstGeom>
+          <a:noFill/>
+        </p:spPr>
+        <p:txBody>
+          <a:bodyPr wrap="square" anchor="t" lIns="0" rIns="0" tIns="0" bIns="0">
+            <a:spAutoFit/>
+          </a:bodyPr>
+          <a:lstStyle/>
+          <a:p>
+            <a:pPr algn="l">
+              <a:lnSpc>
+                <a:spcPct val="100000"/>
+              </a:lnSpc>
+              <a:spcAft>
+                <a:spcPts val="300"/>
+              </a:spcAft>
+            </a:pPr>
+            <a:r>
+              <a:rPr sz="950" b="1">
+                <a:solidFill>
+                  <a:srgbClr val="00B378"/>
+                </a:solidFill>
+                <a:latin typeface="Barlow"/>
+              </a:rPr>
+              <a:t>✅ Works</a:t>
+            </a:r>
+          </a:p>
+        </p:txBody>
+      </p:sp>
+      <p:sp>
+        <p:nvSpPr>
+          <p:cNvPr id="53" name="TextBox 52"/>
+          <p:cNvSpPr txBox="1"/>
+          <p:nvPr/>
+        </p:nvSpPr>
+        <p:spPr>
+          <a:xfrm>
+            <a:off x="4663440" y="4758537"/>
+            <a:ext cx="2834640" cy="310896"/>
+          </a:xfrm>
+          <a:prstGeom prst="rect">
+            <a:avLst/>
+          </a:prstGeom>
+          <a:noFill/>
+        </p:spPr>
+        <p:txBody>
+          <a:bodyPr wrap="square" anchor="t" lIns="0" rIns="0" tIns="0" bIns="0">
+            <a:spAutoFit/>
+          </a:bodyPr>
+          <a:lstStyle/>
+          <a:p>
+            <a:pPr algn="l">
+              <a:lnSpc>
+                <a:spcPct val="95000"/>
+              </a:lnSpc>
+              <a:spcAft>
+                <a:spcPts val="300"/>
+              </a:spcAft>
+            </a:pPr>
+            <a:r>
+              <a:rPr sz="850" b="0">
+                <a:solidFill>
+                  <a:srgbClr val="618793"/>
+                </a:solidFill>
+                <a:latin typeface="DM Sans"/>
+              </a:rPr>
+              <a:t>6 concurrent runs · ~500 s wall</a:t>
+            </a:r>
+          </a:p>
+        </p:txBody>
+      </p:sp>
+      <p:sp>
+        <p:nvSpPr>
+          <p:cNvPr id="54" name="TextBox 53"/>
+          <p:cNvSpPr txBox="1"/>
+          <p:nvPr/>
+        </p:nvSpPr>
+        <p:spPr>
+          <a:xfrm>
+            <a:off x="7635240" y="4758537"/>
+            <a:ext cx="1143000" cy="274320"/>
+          </a:xfrm>
+          <a:prstGeom prst="rect">
+            <a:avLst/>
+          </a:prstGeom>
+          <a:noFill/>
+        </p:spPr>
+        <p:txBody>
+          <a:bodyPr wrap="square" anchor="t" lIns="0" rIns="0" tIns="0" bIns="0">
+            <a:spAutoFit/>
+          </a:bodyPr>
+          <a:lstStyle/>
+          <a:p>
+            <a:pPr algn="l">
+              <a:lnSpc>
+                <a:spcPct val="100000"/>
+              </a:lnSpc>
+              <a:spcAft>
+                <a:spcPts val="300"/>
+              </a:spcAft>
+            </a:pPr>
+            <a:r>
+              <a:rPr sz="850" b="0">
+                <a:solidFill>
+                  <a:srgbClr val="1B5161"/>
+                </a:solidFill>
+                <a:latin typeface="DM Sans"/>
+              </a:rPr>
+              <a:t>All</a:t>
+            </a:r>
+          </a:p>
+        </p:txBody>
+      </p:sp>
+      <p:sp>
+        <p:nvSpPr>
+          <p:cNvPr id="55" name="Rectangle 54"/>
+          <p:cNvSpPr/>
+          <p:nvPr/>
+        </p:nvSpPr>
+        <p:spPr>
+          <a:xfrm>
+            <a:off x="548640" y="5064861"/>
             <a:ext cx="8046720" cy="10972"/>
           </a:xfrm>
           <a:prstGeom prst="rect">

--- a/docs/ReconResolve_Leadership.pptx
+++ b/docs/ReconResolve_Leadership.pptx
@@ -15537,7 +15537,7 @@
                 </a:solidFill>
                 <a:latin typeface="DM Sans"/>
               </a:rPr>
-              <a:t>— (det)</a:t>
+              <a:t>~268 s</a:t>
             </a:r>
           </a:p>
         </p:txBody>
